--- a/docs/SANCHAY.pptx
+++ b/docs/SANCHAY.pptx
@@ -3207,7 +3207,7 @@
                 </a:solidFill>
                 <a:latin typeface="Segoe UI"/>
               </a:rPr>
-              <a:t>C-DAC / MeitY AI Enabled OS Hackathon 2026  ·  Track: AI at Application Level</a:t>
+              <a:t>C-DAC / MeitY AI Enabled OS Hackathon 2026  •  Track: AI at Application Level</a:t>
             </a:r>
           </a:p>
           <a:p>
@@ -3223,7 +3223,7 @@
                 </a:solidFill>
                 <a:latin typeface="Segoe UI"/>
               </a:rPr>
-              <a:t>AI-Powered Intelligent Storage Optimizer for Linux OS  ·  Shaik Abdul Basith, Shaik Awaiz, Shaik Abdul Muqeeth</a:t>
+              <a:t>AI-Powered Intelligent Storage Optimizer for Linux OS  •  Shaik Abdul Basith, Shaik Awaiz, Shaik Abdul Muqeeth</a:t>
             </a:r>
           </a:p>
         </p:txBody>
@@ -3374,7 +3374,7 @@
                 </a:solidFill>
                 <a:latin typeface="Segoe UI"/>
               </a:rPr>
-              <a:t>final year project.</a:t>
+              <a:t>capstone project.</a:t>
             </a:r>
           </a:p>
           <a:p>
@@ -3406,7 +3406,7 @@
                 </a:solidFill>
                 <a:latin typeface="Segoe UI"/>
               </a:rPr>
-              <a:t>Both are 2 GB. On a treemap they are the same shade of big. Every existing tool —</a:t>
+              <a:t>Both are 2 GB. On a traditional treemap they look identical. Every existing tool —</a:t>
             </a:r>
           </a:p>
           <a:p>
@@ -3422,7 +3422,7 @@
                 </a:solidFill>
                 <a:latin typeface="Segoe UI"/>
               </a:rPr>
-              <a:t>rmlint, fdupes, jdupes, Czkawka, Baobab, QDirStat, ncdu — ranks them identically,</a:t>
+              <a:t>rmlint, fdupes, jdupes, Czkawka, Baobab, QDirStat, ncdu — ranks them the same.</a:t>
             </a:r>
           </a:p>
           <a:p>
@@ -3438,7 +3438,7 @@
                 </a:solidFill>
                 <a:latin typeface="Segoe UI"/>
               </a:rPr>
-              <a:t>because by their measure the two really are identical.</a:t>
+              <a:t/>
             </a:r>
           </a:p>
           <a:p>
@@ -3454,23 +3454,7 @@
                 </a:solidFill>
                 <a:latin typeface="Segoe UI"/>
               </a:rPr>
-              <a:t/>
-            </a:r>
-          </a:p>
-          <a:p>
-            <a:pPr>
-              <a:spcAft>
-                <a:spcPts val="1000"/>
-              </a:spcAft>
-            </a:pPr>
-            <a:r>
-              <a:rPr sz="1900" b="0" i="0">
-                <a:solidFill>
-                  <a:srgbClr val="0F172A"/>
-                </a:solidFill>
-                <a:latin typeface="Segoe UI"/>
-              </a:rPr>
-              <a:t>But one comes back with npm install. The other is gone forever.</a:t>
+              <a:t>One comes back with npm install / cargo build. The other is gone forever.</a:t>
             </a:r>
           </a:p>
         </p:txBody>
@@ -3605,7 +3589,7 @@
                 </a:solidFill>
                 <a:latin typeface="Segoe UI"/>
               </a:rPr>
-              <a:t>priority  =  size  x  how long untouched  x  how safe it is to lose</a:t>
+              <a:t>priority  =  size  ×  how long untouched  ×  how safe it is to lose</a:t>
             </a:r>
           </a:p>
         </p:txBody>
@@ -4247,7 +4231,7 @@
                 </a:solidFill>
                 <a:latin typeface="Segoe UI"/>
               </a:rPr>
-              <a:t>Most AI system tools try to make the model behave safely by prompting it carefully.</a:t>
+              <a:t>Most AI system tools try to make the model behave safely through careful prompting.</a:t>
             </a:r>
           </a:p>
           <a:p>
@@ -4263,7 +4247,7 @@
                 </a:solidFill>
                 <a:latin typeface="Segoe UI"/>
               </a:rPr>
-              <a:t>We gave it no way to cause the harm instead.</a:t>
+              <a:t>We gave the model no structural way to cause harm instead.</a:t>
             </a:r>
           </a:p>
           <a:p>
@@ -4295,7 +4279,7 @@
                 </a:solidFill>
                 <a:latin typeface="Segoe UI"/>
               </a:rPr>
-              <a:t>The ranking finishes before the model is called. The model receives only files already</a:t>
+              <a:t>Ranking completes before the LLM is called. The model receives only files already</a:t>
             </a:r>
           </a:p>
           <a:p>
@@ -4311,7 +4295,7 @@
                 </a:solidFill>
                 <a:latin typeface="Segoe UI"/>
               </a:rPr>
-              <a:t>judged recoverable. It cannot add a file, remove one, or change the order.</a:t>
+              <a:t>judged recoverable. It cannot add a file, delete a file, or modify priority.</a:t>
             </a:r>
           </a:p>
           <a:p>
@@ -4343,23 +4327,7 @@
                 </a:solidFill>
                 <a:latin typeface="Segoe UI"/>
               </a:rPr>
-              <a:t>If it produced a completely wrong answer, the worst outcome is an awkward sentence —</a:t>
-            </a:r>
-          </a:p>
-          <a:p>
-            <a:pPr>
-              <a:spcAft>
-                <a:spcPts val="1000"/>
-              </a:spcAft>
-            </a:pPr>
-            <a:r>
-              <a:rPr sz="1900" b="0" i="0">
-                <a:solidFill>
-                  <a:srgbClr val="0F172A"/>
-                </a:solidFill>
-                <a:latin typeface="Segoe UI"/>
-              </a:rPr>
-              <a:t>never a lost file.</a:t>
+              <a:t>If the LLM hallucinates, the worst outcome is an awkward description — never data loss.</a:t>
             </a:r>
           </a:p>
         </p:txBody>
@@ -4494,7 +4462,7 @@
                 </a:solidFill>
                 <a:latin typeface="Segoe UI"/>
               </a:rPr>
-              <a:t>Predicting when a disk fills normally means running an agent for weeks first.</a:t>
+              <a:t>Predicting disk exhaustion usually requires running a daemon for weeks.</a:t>
             </a:r>
           </a:p>
           <a:p>
@@ -4526,7 +4494,7 @@
                 </a:solidFill>
                 <a:latin typeface="Segoe UI"/>
               </a:rPr>
-              <a:t>It does not have to. Every file already records the day it was written, so the spread of</a:t>
+              <a:t>It does not have to. Every filesystem already stores file modification timestamps,</a:t>
             </a:r>
           </a:p>
           <a:p>
@@ -4542,7 +4510,7 @@
                 </a:solidFill>
                 <a:latin typeface="Segoe UI"/>
               </a:rPr>
-              <a:t>modification times across a single scan is the history — bytes added per day, free.</a:t>
+              <a:t>so the mtime distribution across a single scan gives bytes-added-per-day directly.</a:t>
             </a:r>
           </a:p>
           <a:p>
@@ -4574,7 +4542,7 @@
                 </a:solidFill>
                 <a:latin typeface="Segoe UI"/>
               </a:rPr>
-              <a:t>Against current free space, that gives a date on the first run.</a:t>
+              <a:t>Compared against free space, that yields an immediate runway forecast on run #1.</a:t>
             </a:r>
           </a:p>
         </p:txBody>
@@ -4613,7 +4581,7 @@
                 </a:solidFill>
                 <a:latin typeface="Segoe UI"/>
               </a:rPr>
-              <a:t>growth:  91.2 MB/day,  full in 137 days</a:t>
+              <a:t>growth:  33.9 KB/day  |  immediate exhaustion date projection</a:t>
             </a:r>
           </a:p>
         </p:txBody>
@@ -4731,7 +4699,7 @@
         <p:spPr>
           <a:xfrm>
             <a:off x="1463040" y="1691640"/>
-            <a:ext cx="9235440" cy="6081635"/>
+            <a:ext cx="9235440" cy="5777062"/>
           </a:xfrm>
           <a:prstGeom prst="rect">
             <a:avLst/>
@@ -4910,7 +4878,7 @@
                 </a:solidFill>
                 <a:latin typeface="Segoe UI"/>
               </a:rPr>
-              <a:t>HONESTY</a:t>
+              <a:t>TECHNICAL STACK &amp; TRANSPARENCY</a:t>
             </a:r>
           </a:p>
         </p:txBody>
@@ -4988,7 +4956,7 @@
                 </a:solidFill>
                 <a:latin typeface="Segoe UI"/>
               </a:rPr>
-              <a:t>Ours:  the scanner, the duplicate finder, the regret model, the forecaster.</a:t>
+              <a:t>Built by us: fast metadata scanner, tiered content hasher, regret classifier, and forecaster.</a:t>
             </a:r>
           </a:p>
           <a:p>
@@ -5020,7 +4988,7 @@
                 </a:solidFill>
                 <a:latin typeface="Segoe UI"/>
               </a:rPr>
-              <a:t>Borrowed:  Textual (MIT) for the interface · plotly and pandas for the treemap ·</a:t>
+              <a:t>Libraries: Textual (MIT) for TUI • Plotly &amp; Pandas for interactive treemap •</a:t>
             </a:r>
           </a:p>
           <a:p>
@@ -5036,7 +5004,7 @@
                 </a:solidFill>
                 <a:latin typeface="Segoe UI"/>
               </a:rPr>
-              <a:t>anthropic (MIT) to write the summary. The core installs with zero dependencies.</a:t>
+              <a:t>Anthropic API (MIT) for natural-language narration. Core runs with zero 3rd-party deps.</a:t>
             </a:r>
           </a:p>
           <a:p>
@@ -5068,7 +5036,7 @@
                 </a:solidFill>
                 <a:latin typeface="Segoe UI"/>
               </a:rPr>
-              <a:t>One bug worth admitting: our first version treated any file inside a git repository as</a:t>
+              <a:t>Real refinement: initial version treated all files in a git repo as safe. Git cannot</a:t>
             </a:r>
           </a:p>
           <a:p>
@@ -5084,7 +5052,7 @@
                 </a:solidFill>
                 <a:latin typeface="Segoe UI"/>
               </a:rPr>
-              <a:t>recoverable. That is wrong — git cannot restore a file it never tracked. We now ask git</a:t>
+              <a:t>restore untracked files, so we now query git index status directly to strictly protect</a:t>
             </a:r>
           </a:p>
           <a:p>
@@ -5100,23 +5068,7 @@
                 </a:solidFill>
                 <a:latin typeface="Segoe UI"/>
               </a:rPr>
-              <a:t>what it actually tracks. On our test tree that moved 34 files out of "safe to delete"</a:t>
-            </a:r>
-          </a:p>
-          <a:p>
-            <a:pPr>
-              <a:spcAft>
-                <a:spcPts val="900"/>
-              </a:spcAft>
-            </a:pPr>
-            <a:r>
-              <a:rPr sz="1800" b="0" i="0">
-                <a:solidFill>
-                  <a:srgbClr val="0F172A"/>
-                </a:solidFill>
-                <a:latin typeface="Segoe UI"/>
-              </a:rPr>
-              <a:t>and into the protected set.</a:t>
+              <a:t>untracked files.</a:t>
             </a:r>
           </a:p>
         </p:txBody>

--- a/docs/SANCHAY.pptx
+++ b/docs/SANCHAY.pptx
@@ -12,7 +12,6 @@
     <p:sldId id="260" r:id="rId11"/>
     <p:sldId id="261" r:id="rId12"/>
     <p:sldId id="262" r:id="rId13"/>
-    <p:sldId id="263" r:id="rId14"/>
   </p:sldIdLst>
   <p:sldSz cx="12191695" cy="6858000" type="screen4x3"/>
   <p:notesSz cx="6858000" cy="9144000"/>
@@ -3097,14 +3096,57 @@
       <p:grpSpPr/>
       <p:sp>
         <p:nvSpPr>
-          <p:cNvPr id="2" name="TextBox 1"/>
+          <p:cNvPr id="2" name="Rectangle 1"/>
+          <p:cNvSpPr/>
+          <p:nvPr/>
+        </p:nvSpPr>
+        <p:spPr>
+          <a:xfrm>
+            <a:off x="0" y="0"/>
+            <a:ext cx="12191695" cy="6858000"/>
+          </a:xfrm>
+          <a:prstGeom prst="rect">
+            <a:avLst/>
+          </a:prstGeom>
+          <a:solidFill>
+            <a:srgbClr val="0B1120"/>
+          </a:solidFill>
+          <a:ln>
+            <a:noFill/>
+          </a:ln>
+        </p:spPr>
+        <p:style>
+          <a:lnRef idx="1">
+            <a:schemeClr val="accent1"/>
+          </a:lnRef>
+          <a:fillRef idx="3">
+            <a:schemeClr val="accent1"/>
+          </a:fillRef>
+          <a:effectRef idx="2">
+            <a:schemeClr val="accent1"/>
+          </a:effectRef>
+          <a:fontRef idx="minor">
+            <a:schemeClr val="lt1"/>
+          </a:fontRef>
+        </p:style>
+        <p:txBody>
+          <a:bodyPr rtlCol="0" anchor="ctr"/>
+          <a:lstStyle/>
+          <a:p>
+            <a:pPr algn="ctr"/>
+          </a:p>
+        </p:txBody>
+      </p:sp>
+      <p:sp>
+        <p:nvSpPr>
+          <p:cNvPr id="3" name="TextBox 2"/>
           <p:cNvSpPr txBox="1"/>
           <p:nvPr/>
         </p:nvSpPr>
         <p:spPr>
           <a:xfrm>
-            <a:off x="822960" y="2194560"/>
-            <a:ext cx="10515600" cy="1097280"/>
+            <a:off x="914400" y="1645920"/>
+            <a:ext cx="10332720" cy="457200"/>
           </a:xfrm>
           <a:prstGeom prst="rect">
             <a:avLst/>
@@ -3112,38 +3154,33 @@
           <a:noFill/>
         </p:spPr>
         <p:txBody>
-          <a:bodyPr wrap="square">
+          <a:bodyPr wrap="none">
             <a:spAutoFit/>
           </a:bodyPr>
           <a:lstStyle/>
           <a:p>
-            <a:pPr>
-              <a:spcAft>
-                <a:spcPts val="800"/>
-              </a:spcAft>
-            </a:pPr>
-            <a:r>
-              <a:rPr sz="4600" b="1" i="0">
-                <a:solidFill>
-                  <a:srgbClr val="0F172A"/>
-                </a:solidFill>
-                <a:latin typeface="Segoe UI"/>
-              </a:rPr>
-              <a:t>SANCHAY</a:t>
-            </a:r>
-          </a:p>
-        </p:txBody>
-      </p:sp>
-      <p:sp>
-        <p:nvSpPr>
-          <p:cNvPr id="3" name="TextBox 2"/>
+            <a:r>
+              <a:rPr sz="1200" b="1">
+                <a:solidFill>
+                  <a:srgbClr val="38BDF8"/>
+                </a:solidFill>
+                <a:latin typeface="Segoe UI"/>
+              </a:rPr>
+              <a:t>C-DAC / MEITY AI ENABLED OS HACKATHON 2026  •  TRACK 1 (APPLICATION LEVEL)</a:t>
+            </a:r>
+          </a:p>
+        </p:txBody>
+      </p:sp>
+      <p:sp>
+        <p:nvSpPr>
+          <p:cNvPr id="4" name="TextBox 3"/>
           <p:cNvSpPr txBox="1"/>
           <p:nvPr/>
         </p:nvSpPr>
         <p:spPr>
           <a:xfrm>
-            <a:off x="822960" y="3291840"/>
-            <a:ext cx="10515600" cy="914400"/>
+            <a:off x="914400" y="2103120"/>
+            <a:ext cx="10332720" cy="1371600"/>
           </a:xfrm>
           <a:prstGeom prst="rect">
             <a:avLst/>
@@ -3151,38 +3188,44 @@
           <a:noFill/>
         </p:spPr>
         <p:txBody>
-          <a:bodyPr wrap="square">
+          <a:bodyPr wrap="none">
             <a:spAutoFit/>
           </a:bodyPr>
           <a:lstStyle/>
           <a:p>
-            <a:pPr>
-              <a:spcAft>
-                <a:spcPts val="800"/>
-              </a:spcAft>
-            </a:pPr>
-            <a:r>
-              <a:rPr sz="2200" b="0" i="0">
-                <a:solidFill>
-                  <a:srgbClr val="64748B"/>
-                </a:solidFill>
-                <a:latin typeface="Segoe UI"/>
-              </a:rPr>
-              <a:t>Disk cleanup that knows what it cannot undo.</a:t>
-            </a:r>
-          </a:p>
-        </p:txBody>
-      </p:sp>
-      <p:sp>
-        <p:nvSpPr>
-          <p:cNvPr id="4" name="TextBox 3"/>
+            <a:r>
+              <a:rPr sz="5400" b="1">
+                <a:solidFill>
+                  <a:srgbClr val="F8FAFC"/>
+                </a:solidFill>
+                <a:latin typeface="Segoe UI"/>
+              </a:rPr>
+              <a:t>SANCHAY</a:t>
+            </a:r>
+          </a:p>
+          <a:p>
+            <a:r>
+              <a:rPr sz="2200">
+                <a:solidFill>
+                  <a:srgbClr val="34D399"/>
+                </a:solidFill>
+                <a:latin typeface="Segoe UI"/>
+              </a:rPr>
+              <a:t>Regret-Aware Storage Optimization with Structural Zero-Deletion Guarantee</a:t>
+            </a:r>
+          </a:p>
+        </p:txBody>
+      </p:sp>
+      <p:sp>
+        <p:nvSpPr>
+          <p:cNvPr id="5" name="TextBox 4"/>
           <p:cNvSpPr txBox="1"/>
           <p:nvPr/>
         </p:nvSpPr>
         <p:spPr>
           <a:xfrm>
-            <a:off x="822960" y="5760720"/>
-            <a:ext cx="10515600" cy="731520"/>
+            <a:off x="914400" y="3931920"/>
+            <a:ext cx="10332720" cy="1097280"/>
           </a:xfrm>
           <a:prstGeom prst="rect">
             <a:avLst/>
@@ -3190,40 +3233,53 @@
           <a:noFill/>
         </p:spPr>
         <p:txBody>
-          <a:bodyPr wrap="square">
+          <a:bodyPr wrap="none">
             <a:spAutoFit/>
           </a:bodyPr>
           <a:lstStyle/>
           <a:p>
-            <a:pPr>
-              <a:spcAft>
-                <a:spcPts val="800"/>
-              </a:spcAft>
-            </a:pPr>
-            <a:r>
-              <a:rPr sz="1300" b="0" i="0">
-                <a:solidFill>
-                  <a:srgbClr val="64748B"/>
-                </a:solidFill>
-                <a:latin typeface="Segoe UI"/>
-              </a:rPr>
-              <a:t>C-DAC / MeitY AI Enabled OS Hackathon 2026  •  Track: AI at Application Level</a:t>
-            </a:r>
-          </a:p>
-          <a:p>
-            <a:pPr>
-              <a:spcAft>
-                <a:spcPts val="800"/>
-              </a:spcAft>
-            </a:pPr>
-            <a:r>
-              <a:rPr sz="1300" b="0" i="0">
-                <a:solidFill>
-                  <a:srgbClr val="64748B"/>
-                </a:solidFill>
-                <a:latin typeface="Segoe UI"/>
-              </a:rPr>
-              <a:t>AI-Powered Intelligent Storage Optimizer for Linux OS  •  Shaik Abdul Basith, Shaik Awaiz, Shaik Abdul Muqeeth</a:t>
+            <a:r>
+              <a:rPr sz="1600">
+                <a:solidFill>
+                  <a:srgbClr val="94A3B8"/>
+                </a:solidFill>
+                <a:latin typeface="Segoe UI"/>
+              </a:rPr>
+              <a:t>Safe automatic disk cleanup that ranks files by recoverability, not just raw byte count.</a:t>
+            </a:r>
+          </a:p>
+        </p:txBody>
+      </p:sp>
+      <p:sp>
+        <p:nvSpPr>
+          <p:cNvPr id="6" name="TextBox 5"/>
+          <p:cNvSpPr txBox="1"/>
+          <p:nvPr/>
+        </p:nvSpPr>
+        <p:spPr>
+          <a:xfrm>
+            <a:off x="914400" y="5486400"/>
+            <a:ext cx="10332720" cy="731520"/>
+          </a:xfrm>
+          <a:prstGeom prst="rect">
+            <a:avLst/>
+          </a:prstGeom>
+          <a:noFill/>
+        </p:spPr>
+        <p:txBody>
+          <a:bodyPr wrap="none">
+            <a:spAutoFit/>
+          </a:bodyPr>
+          <a:lstStyle/>
+          <a:p>
+            <a:r>
+              <a:rPr sz="1300">
+                <a:solidFill>
+                  <a:srgbClr val="94A3B8"/>
+                </a:solidFill>
+                <a:latin typeface="Segoe UI"/>
+              </a:rPr>
+              <a:t>Team: Shaik Abdul Basith, Shaik Awaiz, Shaik Abdul Muqeeth  |  Repo: github.com/basithladdu/sanchay</a:t>
             </a:r>
           </a:p>
         </p:txBody>
@@ -3248,14 +3304,181 @@
       <p:grpSpPr/>
       <p:sp>
         <p:nvSpPr>
-          <p:cNvPr id="2" name="TextBox 1"/>
+          <p:cNvPr id="2" name="Rectangle 1"/>
+          <p:cNvSpPr/>
+          <p:nvPr/>
+        </p:nvSpPr>
+        <p:spPr>
+          <a:xfrm>
+            <a:off x="0" y="0"/>
+            <a:ext cx="12191695" cy="6858000"/>
+          </a:xfrm>
+          <a:prstGeom prst="rect">
+            <a:avLst/>
+          </a:prstGeom>
+          <a:solidFill>
+            <a:srgbClr val="0B1120"/>
+          </a:solidFill>
+          <a:ln>
+            <a:noFill/>
+          </a:ln>
+        </p:spPr>
+        <p:style>
+          <a:lnRef idx="1">
+            <a:schemeClr val="accent1"/>
+          </a:lnRef>
+          <a:fillRef idx="3">
+            <a:schemeClr val="accent1"/>
+          </a:fillRef>
+          <a:effectRef idx="2">
+            <a:schemeClr val="accent1"/>
+          </a:effectRef>
+          <a:fontRef idx="minor">
+            <a:schemeClr val="lt1"/>
+          </a:fontRef>
+        </p:style>
+        <p:txBody>
+          <a:bodyPr rtlCol="0" anchor="ctr"/>
+          <a:lstStyle/>
+          <a:p>
+            <a:pPr algn="ctr"/>
+          </a:p>
+        </p:txBody>
+      </p:sp>
+      <p:sp>
+        <p:nvSpPr>
+          <p:cNvPr id="3" name="TextBox 2"/>
           <p:cNvSpPr txBox="1"/>
           <p:nvPr/>
         </p:nvSpPr>
         <p:spPr>
           <a:xfrm>
-            <a:off x="822960" y="502920"/>
-            <a:ext cx="10515600" cy="365760"/>
+            <a:off x="731520" y="365760"/>
+            <a:ext cx="10698480" cy="365760"/>
+          </a:xfrm>
+          <a:prstGeom prst="rect">
+            <a:avLst/>
+          </a:prstGeom>
+          <a:noFill/>
+        </p:spPr>
+        <p:txBody>
+          <a:bodyPr wrap="square">
+            <a:spAutoFit/>
+          </a:bodyPr>
+          <a:lstStyle/>
+          <a:p>
+            <a:r>
+              <a:rPr sz="1100" b="1">
+                <a:solidFill>
+                  <a:srgbClr val="38BDF8"/>
+                </a:solidFill>
+                <a:latin typeface="Segoe UI"/>
+              </a:rPr>
+              <a:t>THE PROBLEM</a:t>
+            </a:r>
+          </a:p>
+        </p:txBody>
+      </p:sp>
+      <p:sp>
+        <p:nvSpPr>
+          <p:cNvPr id="4" name="TextBox 3"/>
+          <p:cNvSpPr txBox="1"/>
+          <p:nvPr/>
+        </p:nvSpPr>
+        <p:spPr>
+          <a:xfrm>
+            <a:off x="731520" y="685800"/>
+            <a:ext cx="10698480" cy="640080"/>
+          </a:xfrm>
+          <a:prstGeom prst="rect">
+            <a:avLst/>
+          </a:prstGeom>
+          <a:noFill/>
+        </p:spPr>
+        <p:txBody>
+          <a:bodyPr wrap="square">
+            <a:spAutoFit/>
+          </a:bodyPr>
+          <a:lstStyle/>
+          <a:p>
+            <a:r>
+              <a:rPr sz="2600" b="1">
+                <a:solidFill>
+                  <a:srgbClr val="F8FAFC"/>
+                </a:solidFill>
+                <a:latin typeface="Segoe UI"/>
+              </a:rPr>
+              <a:t>Every Disk Cleaner Today Asks the Wrong Question</a:t>
+            </a:r>
+          </a:p>
+          <a:p>
+            <a:r>
+              <a:rPr sz="1300">
+                <a:solidFill>
+                  <a:srgbClr val="94A3B8"/>
+                </a:solidFill>
+                <a:latin typeface="Segoe UI"/>
+              </a:rPr>
+              <a:t>Sorting by size alone treats regenerable caches and irreplaceable work as identical</a:t>
+            </a:r>
+          </a:p>
+        </p:txBody>
+      </p:sp>
+      <p:sp>
+        <p:nvSpPr>
+          <p:cNvPr id="5" name="Rounded Rectangle 4"/>
+          <p:cNvSpPr/>
+          <p:nvPr/>
+        </p:nvSpPr>
+        <p:spPr>
+          <a:xfrm>
+            <a:off x="731520" y="1645920"/>
+            <a:ext cx="5120640" cy="4572000"/>
+          </a:xfrm>
+          <a:prstGeom prst="roundRect">
+            <a:avLst/>
+          </a:prstGeom>
+          <a:solidFill>
+            <a:srgbClr val="161E2E"/>
+          </a:solidFill>
+          <a:ln w="12700">
+            <a:solidFill>
+              <a:srgbClr val="2D3B55"/>
+            </a:solidFill>
+          </a:ln>
+        </p:spPr>
+        <p:style>
+          <a:lnRef idx="1">
+            <a:schemeClr val="accent1"/>
+          </a:lnRef>
+          <a:fillRef idx="3">
+            <a:schemeClr val="accent1"/>
+          </a:fillRef>
+          <a:effectRef idx="2">
+            <a:schemeClr val="accent1"/>
+          </a:effectRef>
+          <a:fontRef idx="minor">
+            <a:schemeClr val="lt1"/>
+          </a:fontRef>
+        </p:style>
+        <p:txBody>
+          <a:bodyPr rtlCol="0" anchor="ctr"/>
+          <a:lstStyle/>
+          <a:p>
+            <a:pPr algn="ctr"/>
+          </a:p>
+        </p:txBody>
+      </p:sp>
+      <p:sp>
+        <p:nvSpPr>
+          <p:cNvPr id="6" name="TextBox 5"/>
+          <p:cNvSpPr txBox="1"/>
+          <p:nvPr/>
+        </p:nvSpPr>
+        <p:spPr>
+          <a:xfrm>
+            <a:off x="914400" y="1783080"/>
+            <a:ext cx="4754879" cy="4297680"/>
           </a:xfrm>
           <a:prstGeom prst="rect">
             <a:avLst/>
@@ -3274,27 +3497,172 @@
               </a:spcAft>
             </a:pPr>
             <a:r>
-              <a:rPr sz="1200" b="1" i="0">
-                <a:solidFill>
-                  <a:srgbClr val="DC2626"/>
-                </a:solidFill>
-                <a:latin typeface="Segoe UI"/>
-              </a:rPr>
-              <a:t>THE PROBLEM</a:t>
-            </a:r>
-          </a:p>
-        </p:txBody>
-      </p:sp>
-      <p:sp>
-        <p:nvSpPr>
-          <p:cNvPr id="3" name="TextBox 2"/>
+              <a:rPr sz="1700" b="1">
+                <a:solidFill>
+                  <a:srgbClr val="F87171"/>
+                </a:solidFill>
+                <a:latin typeface="Segoe UI"/>
+              </a:rPr>
+              <a:t>The 2 GB Dilemma</a:t>
+            </a:r>
+          </a:p>
+          <a:p>
+            <a:pPr>
+              <a:spcAft>
+                <a:spcPts val="600"/>
+              </a:spcAft>
+            </a:pPr>
+            <a:r>
+              <a:rPr sz="1300" b="1">
+                <a:solidFill>
+                  <a:srgbClr val="F8FAFC"/>
+                </a:solidFill>
+                <a:latin typeface="Segoe UI"/>
+              </a:rPr>
+              <a:t>Scenario: </a:t>
+            </a:r>
+            <a:r>
+              <a:rPr sz="1300">
+                <a:solidFill>
+                  <a:srgbClr val="F8FAFC"/>
+                </a:solidFill>
+                <a:latin typeface="Segoe UI"/>
+              </a:rPr>
+              <a:t>You have a 2 GB node_modules / build cache and a 2 GB folder holding your only copy of a capstone thesis.</a:t>
+            </a:r>
+          </a:p>
+          <a:p>
+            <a:pPr>
+              <a:spcAft>
+                <a:spcPts val="600"/>
+              </a:spcAft>
+            </a:pPr>
+            <a:r>
+              <a:rPr sz="1300" b="1">
+                <a:solidFill>
+                  <a:srgbClr val="F87171"/>
+                </a:solidFill>
+                <a:latin typeface="Segoe UI"/>
+              </a:rPr>
+              <a:t>Traditional Tools: </a:t>
+            </a:r>
+            <a:r>
+              <a:rPr sz="1300">
+                <a:solidFill>
+                  <a:srgbClr val="F8FAFC"/>
+                </a:solidFill>
+                <a:latin typeface="Segoe UI"/>
+              </a:rPr>
+              <a:t>Baobab, ncdu, QDirStat, rmlint rank both identically — '2 GB to delete'.</a:t>
+            </a:r>
+          </a:p>
+          <a:p>
+            <a:pPr>
+              <a:spcAft>
+                <a:spcPts val="600"/>
+              </a:spcAft>
+            </a:pPr>
+            <a:r>
+              <a:rPr sz="1300" b="1">
+                <a:solidFill>
+                  <a:srgbClr val="F87171"/>
+                </a:solidFill>
+                <a:latin typeface="Segoe UI"/>
+              </a:rPr>
+              <a:t>The Asymmetry: </a:t>
+            </a:r>
+            <a:r>
+              <a:rPr sz="1300">
+                <a:solidFill>
+                  <a:srgbClr val="F8FAFC"/>
+                </a:solidFill>
+                <a:latin typeface="Segoe UI"/>
+              </a:rPr>
+              <a:t>One rebuilds in 30 seconds with npm install / cargo build. The other is gone forever.</a:t>
+            </a:r>
+          </a:p>
+          <a:p>
+            <a:pPr>
+              <a:spcAft>
+                <a:spcPts val="600"/>
+              </a:spcAft>
+            </a:pPr>
+            <a:r>
+              <a:rPr sz="1300" b="1">
+                <a:solidFill>
+                  <a:srgbClr val="FBBF24"/>
+                </a:solidFill>
+                <a:latin typeface="Segoe UI"/>
+              </a:rPr>
+              <a:t>User Reluctance: </a:t>
+            </a:r>
+            <a:r>
+              <a:rPr sz="1300">
+                <a:solidFill>
+                  <a:srgbClr val="F8FAFC"/>
+                </a:solidFill>
+                <a:latin typeface="Segoe UI"/>
+              </a:rPr>
+              <a:t>Users avoid automatic cleanup tools because they cannot trust what will be deleted.</a:t>
+            </a:r>
+          </a:p>
+        </p:txBody>
+      </p:sp>
+      <p:sp>
+        <p:nvSpPr>
+          <p:cNvPr id="7" name="Rounded Rectangle 6"/>
+          <p:cNvSpPr/>
+          <p:nvPr/>
+        </p:nvSpPr>
+        <p:spPr>
+          <a:xfrm>
+            <a:off x="6217920" y="1645920"/>
+            <a:ext cx="5120640" cy="4572000"/>
+          </a:xfrm>
+          <a:prstGeom prst="roundRect">
+            <a:avLst/>
+          </a:prstGeom>
+          <a:solidFill>
+            <a:srgbClr val="161E2E"/>
+          </a:solidFill>
+          <a:ln w="12700">
+            <a:solidFill>
+              <a:srgbClr val="2D3B55"/>
+            </a:solidFill>
+          </a:ln>
+        </p:spPr>
+        <p:style>
+          <a:lnRef idx="1">
+            <a:schemeClr val="accent1"/>
+          </a:lnRef>
+          <a:fillRef idx="3">
+            <a:schemeClr val="accent1"/>
+          </a:fillRef>
+          <a:effectRef idx="2">
+            <a:schemeClr val="accent1"/>
+          </a:effectRef>
+          <a:fontRef idx="minor">
+            <a:schemeClr val="lt1"/>
+          </a:fontRef>
+        </p:style>
+        <p:txBody>
+          <a:bodyPr rtlCol="0" anchor="ctr"/>
+          <a:lstStyle/>
+          <a:p>
+            <a:pPr algn="ctr"/>
+          </a:p>
+        </p:txBody>
+      </p:sp>
+      <p:sp>
+        <p:nvSpPr>
+          <p:cNvPr id="8" name="TextBox 7"/>
           <p:cNvSpPr txBox="1"/>
           <p:nvPr/>
         </p:nvSpPr>
         <p:spPr>
           <a:xfrm>
-            <a:off x="822960" y="914400"/>
-            <a:ext cx="10515600" cy="822960"/>
+            <a:off x="6400800" y="1783080"/>
+            <a:ext cx="4754879" cy="4297680"/>
           </a:xfrm>
           <a:prstGeom prst="rect">
             <a:avLst/>
@@ -3313,148 +3681,113 @@
               </a:spcAft>
             </a:pPr>
             <a:r>
-              <a:rPr sz="3200" b="1" i="0">
-                <a:solidFill>
-                  <a:srgbClr val="0F172A"/>
-                </a:solidFill>
-                <a:latin typeface="Segoe UI"/>
-              </a:rPr>
-              <a:t>Every cleanup tool asks the wrong question</a:t>
-            </a:r>
-          </a:p>
-        </p:txBody>
-      </p:sp>
-      <p:sp>
-        <p:nvSpPr>
-          <p:cNvPr id="4" name="TextBox 3"/>
-          <p:cNvSpPr txBox="1"/>
-          <p:nvPr/>
-        </p:nvSpPr>
-        <p:spPr>
-          <a:xfrm>
-            <a:off x="822960" y="1920240"/>
-            <a:ext cx="10515600" cy="2926080"/>
-          </a:xfrm>
-          <a:prstGeom prst="rect">
-            <a:avLst/>
-          </a:prstGeom>
-          <a:noFill/>
-        </p:spPr>
-        <p:txBody>
-          <a:bodyPr wrap="square">
-            <a:spAutoFit/>
-          </a:bodyPr>
-          <a:lstStyle/>
+              <a:rPr sz="1700" b="1">
+                <a:solidFill>
+                  <a:srgbClr val="34D399"/>
+                </a:solidFill>
+                <a:latin typeface="Segoe UI"/>
+              </a:rPr>
+              <a:t>SANCHAY's Shift: Regret Modeling</a:t>
+            </a:r>
+          </a:p>
           <a:p>
             <a:pPr>
               <a:spcAft>
-                <a:spcPts val="1000"/>
+                <a:spcPts val="600"/>
               </a:spcAft>
             </a:pPr>
             <a:r>
-              <a:rPr sz="1900" b="0" i="0">
-                <a:solidFill>
-                  <a:srgbClr val="0F172A"/>
-                </a:solidFill>
-                <a:latin typeface="Segoe UI"/>
-              </a:rPr>
-              <a:t>Say you have a 2 GB build cache and a 2 GB folder holding the only copy of your</a:t>
+              <a:rPr sz="1300" b="1">
+                <a:solidFill>
+                  <a:srgbClr val="34D399"/>
+                </a:solidFill>
+                <a:latin typeface="Segoe UI"/>
+              </a:rPr>
+              <a:t>The Right Question: </a:t>
+            </a:r>
+            <a:r>
+              <a:rPr sz="1300">
+                <a:solidFill>
+                  <a:srgbClr val="F8FAFC"/>
+                </a:solidFill>
+                <a:latin typeface="Segoe UI"/>
+              </a:rPr>
+              <a:t>'If the system is wrong about deleting this file, what is the cost to recover it?'</a:t>
             </a:r>
           </a:p>
           <a:p>
             <a:pPr>
               <a:spcAft>
-                <a:spcPts val="1000"/>
+                <a:spcPts val="600"/>
               </a:spcAft>
             </a:pPr>
             <a:r>
-              <a:rPr sz="1900" b="0" i="0">
-                <a:solidFill>
-                  <a:srgbClr val="0F172A"/>
-                </a:solidFill>
-                <a:latin typeface="Segoe UI"/>
-              </a:rPr>
-              <a:t>capstone project.</a:t>
+              <a:rPr sz="1300" b="1">
+                <a:solidFill>
+                  <a:srgbClr val="38BDF8"/>
+                </a:solidFill>
+                <a:latin typeface="Segoe UI"/>
+              </a:rPr>
+              <a:t>Reproducibility Basis: </a:t>
+            </a:r>
+            <a:r>
+              <a:rPr sz="1300">
+                <a:solidFill>
+                  <a:srgbClr val="F8FAFC"/>
+                </a:solidFill>
+                <a:latin typeface="Segoe UI"/>
+              </a:rPr>
+              <a:t>Files are categorized by how they can be reconstructed.</a:t>
             </a:r>
           </a:p>
           <a:p>
             <a:pPr>
               <a:spcAft>
-                <a:spcPts val="1000"/>
+                <a:spcPts val="600"/>
               </a:spcAft>
             </a:pPr>
             <a:r>
-              <a:rPr sz="1900" b="0" i="0">
-                <a:solidFill>
-                  <a:srgbClr val="0F172A"/>
-                </a:solidFill>
-                <a:latin typeface="Segoe UI"/>
-              </a:rPr>
-              <a:t/>
+              <a:rPr sz="1300" b="1">
+                <a:solidFill>
+                  <a:srgbClr val="34D399"/>
+                </a:solidFill>
+                <a:latin typeface="Segoe UI"/>
+              </a:rPr>
+              <a:t>Hard Guarantee: </a:t>
+            </a:r>
+            <a:r>
+              <a:rPr sz="1300">
+                <a:solidFill>
+                  <a:srgbClr val="F8FAFC"/>
+                </a:solidFill>
+                <a:latin typeface="Segoe UI"/>
+              </a:rPr>
+              <a:t>Irreplaceable unique files are structurally locked and never presented as candidates.</a:t>
             </a:r>
           </a:p>
           <a:p>
             <a:pPr>
               <a:spcAft>
-                <a:spcPts val="1000"/>
+                <a:spcPts val="600"/>
               </a:spcAft>
             </a:pPr>
             <a:r>
-              <a:rPr sz="1900" b="0" i="0">
-                <a:solidFill>
-                  <a:srgbClr val="0F172A"/>
-                </a:solidFill>
-                <a:latin typeface="Segoe UI"/>
-              </a:rPr>
-              <a:t>Both are 2 GB. On a traditional treemap they look identical. Every existing tool —</a:t>
-            </a:r>
-          </a:p>
-          <a:p>
-            <a:pPr>
-              <a:spcAft>
-                <a:spcPts val="1000"/>
-              </a:spcAft>
-            </a:pPr>
-            <a:r>
-              <a:rPr sz="1900" b="0" i="0">
-                <a:solidFill>
-                  <a:srgbClr val="0F172A"/>
-                </a:solidFill>
-                <a:latin typeface="Segoe UI"/>
-              </a:rPr>
-              <a:t>rmlint, fdupes, jdupes, Czkawka, Baobab, QDirStat, ncdu — ranks them the same.</a:t>
-            </a:r>
-          </a:p>
-          <a:p>
-            <a:pPr>
-              <a:spcAft>
-                <a:spcPts val="1000"/>
-              </a:spcAft>
-            </a:pPr>
-            <a:r>
-              <a:rPr sz="1900" b="0" i="0">
-                <a:solidFill>
-                  <a:srgbClr val="0F172A"/>
-                </a:solidFill>
-                <a:latin typeface="Segoe UI"/>
-              </a:rPr>
-              <a:t/>
-            </a:r>
-          </a:p>
-          <a:p>
-            <a:pPr>
-              <a:spcAft>
-                <a:spcPts val="1000"/>
-              </a:spcAft>
-            </a:pPr>
-            <a:r>
-              <a:rPr sz="1900" b="0" i="0">
-                <a:solidFill>
-                  <a:srgbClr val="0F172A"/>
-                </a:solidFill>
-                <a:latin typeface="Segoe UI"/>
-              </a:rPr>
-              <a:t>One comes back with npm install / cargo build. The other is gone forever.</a:t>
+              <a:rPr sz="1300" b="1">
+                <a:solidFill>
+                  <a:srgbClr val="F8FAFC"/>
+                </a:solidFill>
+                <a:latin typeface="Segoe UI"/>
+              </a:rPr>
+              <a:t>Practical Impact: </a:t>
+            </a:r>
+            <a:r>
+              <a:rPr sz="1300">
+                <a:solidFill>
+                  <a:srgbClr val="F8FAFC"/>
+                </a:solidFill>
+                <a:latin typeface="Segoe UI"/>
+              </a:rPr>
+              <a:t>Cleanup people can execute safely without inspecting thousands of log lines.</a:t>
             </a:r>
           </a:p>
         </p:txBody>
@@ -3479,14 +3812,181 @@
       <p:grpSpPr/>
       <p:sp>
         <p:nvSpPr>
-          <p:cNvPr id="2" name="TextBox 1"/>
+          <p:cNvPr id="2" name="Rectangle 1"/>
+          <p:cNvSpPr/>
+          <p:nvPr/>
+        </p:nvSpPr>
+        <p:spPr>
+          <a:xfrm>
+            <a:off x="0" y="0"/>
+            <a:ext cx="12191695" cy="6858000"/>
+          </a:xfrm>
+          <a:prstGeom prst="rect">
+            <a:avLst/>
+          </a:prstGeom>
+          <a:solidFill>
+            <a:srgbClr val="0B1120"/>
+          </a:solidFill>
+          <a:ln>
+            <a:noFill/>
+          </a:ln>
+        </p:spPr>
+        <p:style>
+          <a:lnRef idx="1">
+            <a:schemeClr val="accent1"/>
+          </a:lnRef>
+          <a:fillRef idx="3">
+            <a:schemeClr val="accent1"/>
+          </a:fillRef>
+          <a:effectRef idx="2">
+            <a:schemeClr val="accent1"/>
+          </a:effectRef>
+          <a:fontRef idx="minor">
+            <a:schemeClr val="lt1"/>
+          </a:fontRef>
+        </p:style>
+        <p:txBody>
+          <a:bodyPr rtlCol="0" anchor="ctr"/>
+          <a:lstStyle/>
+          <a:p>
+            <a:pPr algn="ctr"/>
+          </a:p>
+        </p:txBody>
+      </p:sp>
+      <p:sp>
+        <p:nvSpPr>
+          <p:cNvPr id="3" name="TextBox 2"/>
           <p:cNvSpPr txBox="1"/>
           <p:nvPr/>
         </p:nvSpPr>
         <p:spPr>
           <a:xfrm>
-            <a:off x="822960" y="502920"/>
-            <a:ext cx="10515600" cy="365760"/>
+            <a:off x="731520" y="365760"/>
+            <a:ext cx="10698480" cy="365760"/>
+          </a:xfrm>
+          <a:prstGeom prst="rect">
+            <a:avLst/>
+          </a:prstGeom>
+          <a:noFill/>
+        </p:spPr>
+        <p:txBody>
+          <a:bodyPr wrap="square">
+            <a:spAutoFit/>
+          </a:bodyPr>
+          <a:lstStyle/>
+          <a:p>
+            <a:r>
+              <a:rPr sz="1100" b="1">
+                <a:solidFill>
+                  <a:srgbClr val="38BDF8"/>
+                </a:solidFill>
+                <a:latin typeface="Segoe UI"/>
+              </a:rPr>
+              <a:t>CORE INNOVATION</a:t>
+            </a:r>
+          </a:p>
+        </p:txBody>
+      </p:sp>
+      <p:sp>
+        <p:nvSpPr>
+          <p:cNvPr id="4" name="TextBox 3"/>
+          <p:cNvSpPr txBox="1"/>
+          <p:nvPr/>
+        </p:nvSpPr>
+        <p:spPr>
+          <a:xfrm>
+            <a:off x="731520" y="685800"/>
+            <a:ext cx="10698480" cy="640080"/>
+          </a:xfrm>
+          <a:prstGeom prst="rect">
+            <a:avLst/>
+          </a:prstGeom>
+          <a:noFill/>
+        </p:spPr>
+        <p:txBody>
+          <a:bodyPr wrap="square">
+            <a:spAutoFit/>
+          </a:bodyPr>
+          <a:lstStyle/>
+          <a:p>
+            <a:r>
+              <a:rPr sz="2600" b="1">
+                <a:solidFill>
+                  <a:srgbClr val="F8FAFC"/>
+                </a:solidFill>
+                <a:latin typeface="Segoe UI"/>
+              </a:rPr>
+              <a:t>Regret Objective Function &amp; Mathematical Safety Guarantee</a:t>
+            </a:r>
+          </a:p>
+          <a:p>
+            <a:r>
+              <a:rPr sz="1300">
+                <a:solidFill>
+                  <a:srgbClr val="94A3B8"/>
+                </a:solidFill>
+                <a:latin typeface="Segoe UI"/>
+              </a:rPr>
+              <a:t>Priority = Size × Staleness × (1 - Regret)</a:t>
+            </a:r>
+          </a:p>
+        </p:txBody>
+      </p:sp>
+      <p:sp>
+        <p:nvSpPr>
+          <p:cNvPr id="5" name="Rounded Rectangle 4"/>
+          <p:cNvSpPr/>
+          <p:nvPr/>
+        </p:nvSpPr>
+        <p:spPr>
+          <a:xfrm>
+            <a:off x="731520" y="1645920"/>
+            <a:ext cx="5120640" cy="4572000"/>
+          </a:xfrm>
+          <a:prstGeom prst="roundRect">
+            <a:avLst/>
+          </a:prstGeom>
+          <a:solidFill>
+            <a:srgbClr val="161E2E"/>
+          </a:solidFill>
+          <a:ln w="12700">
+            <a:solidFill>
+              <a:srgbClr val="2D3B55"/>
+            </a:solidFill>
+          </a:ln>
+        </p:spPr>
+        <p:style>
+          <a:lnRef idx="1">
+            <a:schemeClr val="accent1"/>
+          </a:lnRef>
+          <a:fillRef idx="3">
+            <a:schemeClr val="accent1"/>
+          </a:fillRef>
+          <a:effectRef idx="2">
+            <a:schemeClr val="accent1"/>
+          </a:effectRef>
+          <a:fontRef idx="minor">
+            <a:schemeClr val="lt1"/>
+          </a:fontRef>
+        </p:style>
+        <p:txBody>
+          <a:bodyPr rtlCol="0" anchor="ctr"/>
+          <a:lstStyle/>
+          <a:p>
+            <a:pPr algn="ctr"/>
+          </a:p>
+        </p:txBody>
+      </p:sp>
+      <p:sp>
+        <p:nvSpPr>
+          <p:cNvPr id="6" name="TextBox 5"/>
+          <p:cNvSpPr txBox="1"/>
+          <p:nvPr/>
+        </p:nvSpPr>
+        <p:spPr>
+          <a:xfrm>
+            <a:off x="914400" y="1783080"/>
+            <a:ext cx="4754879" cy="4297680"/>
           </a:xfrm>
           <a:prstGeom prst="rect">
             <a:avLst/>
@@ -3505,27 +4005,172 @@
               </a:spcAft>
             </a:pPr>
             <a:r>
-              <a:rPr sz="1200" b="1" i="0">
-                <a:solidFill>
-                  <a:srgbClr val="DC2626"/>
-                </a:solidFill>
-                <a:latin typeface="Segoe UI"/>
-              </a:rPr>
-              <a:t>OUR IDEA</a:t>
-            </a:r>
-          </a:p>
-        </p:txBody>
-      </p:sp>
-      <p:sp>
-        <p:nvSpPr>
-          <p:cNvPr id="3" name="TextBox 2"/>
+              <a:rPr sz="1700" b="1">
+                <a:solidFill>
+                  <a:srgbClr val="38BDF8"/>
+                </a:solidFill>
+                <a:latin typeface="Segoe UI"/>
+              </a:rPr>
+              <a:t>4-Tier Recoverability Taxonomy</a:t>
+            </a:r>
+          </a:p>
+          <a:p>
+            <a:pPr>
+              <a:spcAft>
+                <a:spcPts val="600"/>
+              </a:spcAft>
+            </a:pPr>
+            <a:r>
+              <a:rPr sz="1300" b="1">
+                <a:solidFill>
+                  <a:srgbClr val="34D399"/>
+                </a:solidFill>
+                <a:latin typeface="Segoe UI"/>
+              </a:rPr>
+              <a:t>1. Disposable (Regret 0.02): </a:t>
+            </a:r>
+            <a:r>
+              <a:rPr sz="1300">
+                <a:solidFill>
+                  <a:srgbClr val="F8FAFC"/>
+                </a:solidFill>
+                <a:latin typeface="Segoe UI"/>
+              </a:rPr>
+              <a:t>Build &amp; package caches (node_modules, target/, .venv, .gradle). Rebuilt on demand.</a:t>
+            </a:r>
+          </a:p>
+          <a:p>
+            <a:pPr>
+              <a:spcAft>
+                <a:spcPts val="600"/>
+              </a:spcAft>
+            </a:pPr>
+            <a:r>
+              <a:rPr sz="1300" b="1">
+                <a:solidFill>
+                  <a:srgbClr val="38BDF8"/>
+                </a:solidFill>
+                <a:latin typeface="Segoe UI"/>
+              </a:rPr>
+              <a:t>2. Duplicate (Regret 0.10): </a:t>
+            </a:r>
+            <a:r>
+              <a:rPr sz="1300">
+                <a:solidFill>
+                  <a:srgbClr val="F8FAFC"/>
+                </a:solidFill>
+                <a:latin typeface="Segoe UI"/>
+              </a:rPr>
+              <a:t>Identical hash exists elsewhere on disk and survives the deletion.</a:t>
+            </a:r>
+          </a:p>
+          <a:p>
+            <a:pPr>
+              <a:spcAft>
+                <a:spcPts val="600"/>
+              </a:spcAft>
+            </a:pPr>
+            <a:r>
+              <a:rPr sz="1300" b="1">
+                <a:solidFill>
+                  <a:srgbClr val="FBBF24"/>
+                </a:solidFill>
+                <a:latin typeface="Segoe UI"/>
+              </a:rPr>
+              <a:t>3. Tracked Git (Regret 0.20): </a:t>
+            </a:r>
+            <a:r>
+              <a:rPr sz="1300">
+                <a:solidFill>
+                  <a:srgbClr val="F8FAFC"/>
+                </a:solidFill>
+                <a:latin typeface="Segoe UI"/>
+              </a:rPr>
+              <a:t>Committed inside git repository and restorable via checkout.</a:t>
+            </a:r>
+          </a:p>
+          <a:p>
+            <a:pPr>
+              <a:spcAft>
+                <a:spcPts val="600"/>
+              </a:spcAft>
+            </a:pPr>
+            <a:r>
+              <a:rPr sz="1300" b="1">
+                <a:solidFill>
+                  <a:srgbClr val="F87171"/>
+                </a:solidFill>
+                <a:latin typeface="Segoe UI"/>
+              </a:rPr>
+              <a:t>4. Unique (Regret 1.00): </a:t>
+            </a:r>
+            <a:r>
+              <a:rPr sz="1300">
+                <a:solidFill>
+                  <a:srgbClr val="F8FAFC"/>
+                </a:solidFill>
+                <a:latin typeface="Segoe UI"/>
+              </a:rPr>
+              <a:t>Uncached, untracked, single-copy files. PERMANENTLY EXCLUDED.</a:t>
+            </a:r>
+          </a:p>
+        </p:txBody>
+      </p:sp>
+      <p:sp>
+        <p:nvSpPr>
+          <p:cNvPr id="7" name="Rounded Rectangle 6"/>
+          <p:cNvSpPr/>
+          <p:nvPr/>
+        </p:nvSpPr>
+        <p:spPr>
+          <a:xfrm>
+            <a:off x="6217920" y="1645920"/>
+            <a:ext cx="5120640" cy="4572000"/>
+          </a:xfrm>
+          <a:prstGeom prst="roundRect">
+            <a:avLst/>
+          </a:prstGeom>
+          <a:solidFill>
+            <a:srgbClr val="161E2E"/>
+          </a:solidFill>
+          <a:ln w="12700">
+            <a:solidFill>
+              <a:srgbClr val="2D3B55"/>
+            </a:solidFill>
+          </a:ln>
+        </p:spPr>
+        <p:style>
+          <a:lnRef idx="1">
+            <a:schemeClr val="accent1"/>
+          </a:lnRef>
+          <a:fillRef idx="3">
+            <a:schemeClr val="accent1"/>
+          </a:fillRef>
+          <a:effectRef idx="2">
+            <a:schemeClr val="accent1"/>
+          </a:effectRef>
+          <a:fontRef idx="minor">
+            <a:schemeClr val="lt1"/>
+          </a:fontRef>
+        </p:style>
+        <p:txBody>
+          <a:bodyPr rtlCol="0" anchor="ctr"/>
+          <a:lstStyle/>
+          <a:p>
+            <a:pPr algn="ctr"/>
+          </a:p>
+        </p:txBody>
+      </p:sp>
+      <p:sp>
+        <p:nvSpPr>
+          <p:cNvPr id="8" name="TextBox 7"/>
           <p:cNvSpPr txBox="1"/>
           <p:nvPr/>
         </p:nvSpPr>
         <p:spPr>
           <a:xfrm>
-            <a:off x="822960" y="914400"/>
-            <a:ext cx="10515600" cy="822960"/>
+            <a:off x="6400800" y="1783080"/>
+            <a:ext cx="4754879" cy="4297680"/>
           </a:xfrm>
           <a:prstGeom prst="rect">
             <a:avLst/>
@@ -3544,559 +4189,113 @@
               </a:spcAft>
             </a:pPr>
             <a:r>
-              <a:rPr sz="3200" b="1" i="0">
-                <a:solidFill>
-                  <a:srgbClr val="0F172A"/>
-                </a:solidFill>
-                <a:latin typeface="Segoe UI"/>
-              </a:rPr>
-              <a:t>Rank by what it costs to be wrong</a:t>
-            </a:r>
-          </a:p>
-        </p:txBody>
-      </p:sp>
-      <p:sp>
-        <p:nvSpPr>
-          <p:cNvPr id="4" name="TextBox 3"/>
-          <p:cNvSpPr txBox="1"/>
-          <p:nvPr/>
-        </p:nvSpPr>
-        <p:spPr>
-          <a:xfrm>
-            <a:off x="822960" y="1828800"/>
-            <a:ext cx="10515600" cy="914400"/>
-          </a:xfrm>
-          <a:prstGeom prst="rect">
-            <a:avLst/>
-          </a:prstGeom>
-          <a:noFill/>
-        </p:spPr>
-        <p:txBody>
-          <a:bodyPr wrap="square">
-            <a:spAutoFit/>
-          </a:bodyPr>
-          <a:lstStyle/>
+              <a:rPr sz="1700" b="1">
+                <a:solidFill>
+                  <a:srgbClr val="34D399"/>
+                </a:solidFill>
+                <a:latin typeface="Segoe UI"/>
+              </a:rPr>
+              <a:t>Instant Single-Scan Runway Forecasting</a:t>
+            </a:r>
+          </a:p>
           <a:p>
             <a:pPr>
               <a:spcAft>
-                <a:spcPts val="800"/>
+                <a:spcPts val="600"/>
               </a:spcAft>
             </a:pPr>
             <a:r>
-              <a:rPr sz="2200" b="1" i="0">
-                <a:solidFill>
-                  <a:srgbClr val="DC2626"/>
-                </a:solidFill>
-                <a:latin typeface="Segoe UI"/>
-              </a:rPr>
-              <a:t>priority  =  size  ×  how long untouched  ×  how safe it is to lose</a:t>
-            </a:r>
-          </a:p>
-        </p:txBody>
-      </p:sp>
-      <p:sp>
-        <p:nvSpPr>
-          <p:cNvPr id="5" name="TextBox 4"/>
-          <p:cNvSpPr txBox="1"/>
-          <p:nvPr/>
-        </p:nvSpPr>
-        <p:spPr>
-          <a:xfrm>
-            <a:off x="914400" y="2834640"/>
-            <a:ext cx="2377440" cy="457200"/>
-          </a:xfrm>
-          <a:prstGeom prst="rect">
-            <a:avLst/>
-          </a:prstGeom>
-          <a:noFill/>
-        </p:spPr>
-        <p:txBody>
-          <a:bodyPr wrap="square">
-            <a:spAutoFit/>
-          </a:bodyPr>
-          <a:lstStyle/>
+              <a:rPr sz="1300" b="1">
+                <a:solidFill>
+                  <a:srgbClr val="94A3B8"/>
+                </a:solidFill>
+                <a:latin typeface="Segoe UI"/>
+              </a:rPr>
+              <a:t>The Limitation: </a:t>
+            </a:r>
+            <a:r>
+              <a:rPr sz="1300">
+                <a:solidFill>
+                  <a:srgbClr val="F8FAFC"/>
+                </a:solidFill>
+                <a:latin typeface="Segoe UI"/>
+              </a:rPr>
+              <a:t>Standard forecast daemons require weeks of periodic snapshots to compute growth.</a:t>
+            </a:r>
+          </a:p>
           <a:p>
             <a:pPr>
               <a:spcAft>
-                <a:spcPts val="800"/>
+                <a:spcPts val="600"/>
               </a:spcAft>
             </a:pPr>
             <a:r>
-              <a:rPr sz="1900" b="1" i="0">
-                <a:solidFill>
-                  <a:srgbClr val="0F172A"/>
-                </a:solidFill>
-                <a:latin typeface="Segoe UI"/>
-              </a:rPr>
-              <a:t>disposable</a:t>
-            </a:r>
-          </a:p>
-        </p:txBody>
-      </p:sp>
-      <p:sp>
-        <p:nvSpPr>
-          <p:cNvPr id="6" name="TextBox 5"/>
-          <p:cNvSpPr txBox="1"/>
-          <p:nvPr/>
-        </p:nvSpPr>
-        <p:spPr>
-          <a:xfrm>
-            <a:off x="3383280" y="2834640"/>
-            <a:ext cx="5120640" cy="457200"/>
-          </a:xfrm>
-          <a:prstGeom prst="rect">
-            <a:avLst/>
-          </a:prstGeom>
-          <a:noFill/>
-        </p:spPr>
-        <p:txBody>
-          <a:bodyPr wrap="square">
-            <a:spAutoFit/>
-          </a:bodyPr>
-          <a:lstStyle/>
+              <a:rPr sz="1300" b="1">
+                <a:solidFill>
+                  <a:srgbClr val="34D399"/>
+                </a:solidFill>
+                <a:latin typeface="Segoe UI"/>
+              </a:rPr>
+              <a:t>SANCHAY's Insight: </a:t>
+            </a:r>
+            <a:r>
+              <a:rPr sz="1300">
+                <a:solidFill>
+                  <a:srgbClr val="F8FAFC"/>
+                </a:solidFill>
+                <a:latin typeface="Segoe UI"/>
+              </a:rPr>
+              <a:t>Every filesystem inode already stores file modification times (mtime).</a:t>
+            </a:r>
+          </a:p>
           <a:p>
             <a:pPr>
               <a:spcAft>
-                <a:spcPts val="800"/>
+                <a:spcPts val="600"/>
               </a:spcAft>
             </a:pPr>
             <a:r>
-              <a:rPr sz="1800" b="0" i="0">
-                <a:solidFill>
-                  <a:srgbClr val="64748B"/>
-                </a:solidFill>
-                <a:latin typeface="Segoe UI"/>
-              </a:rPr>
-              <a:t>a build tool regenerates it</a:t>
-            </a:r>
-          </a:p>
-        </p:txBody>
-      </p:sp>
-      <p:sp>
-        <p:nvSpPr>
-          <p:cNvPr id="7" name="TextBox 6"/>
-          <p:cNvSpPr txBox="1"/>
-          <p:nvPr/>
-        </p:nvSpPr>
-        <p:spPr>
-          <a:xfrm>
-            <a:off x="8686800" y="2834640"/>
-            <a:ext cx="2286000" cy="457200"/>
-          </a:xfrm>
-          <a:prstGeom prst="rect">
-            <a:avLst/>
-          </a:prstGeom>
-          <a:noFill/>
-        </p:spPr>
-        <p:txBody>
-          <a:bodyPr wrap="square">
-            <a:spAutoFit/>
-          </a:bodyPr>
-          <a:lstStyle/>
+              <a:rPr sz="1300" b="1">
+                <a:solidFill>
+                  <a:srgbClr val="38BDF8"/>
+                </a:solidFill>
+                <a:latin typeface="Segoe UI"/>
+              </a:rPr>
+              <a:t>Zero Overhead: </a:t>
+            </a:r>
+            <a:r>
+              <a:rPr sz="1300">
+                <a:solidFill>
+                  <a:srgbClr val="F8FAFC"/>
+                </a:solidFill>
+                <a:latin typeface="Segoe UI"/>
+              </a:rPr>
+              <a:t>The modification-time distribution across a single scan provides bytes-added-per-day immediately.</a:t>
+            </a:r>
+          </a:p>
           <a:p>
             <a:pPr>
               <a:spcAft>
-                <a:spcPts val="800"/>
+                <a:spcPts val="600"/>
               </a:spcAft>
             </a:pPr>
             <a:r>
-              <a:rPr sz="1800" b="1" i="0">
-                <a:solidFill>
-                  <a:srgbClr val="0F172A"/>
-                </a:solidFill>
-                <a:latin typeface="Segoe UI"/>
-              </a:rPr>
-              <a:t>0.02</a:t>
-            </a:r>
-          </a:p>
-        </p:txBody>
-      </p:sp>
-      <p:sp>
-        <p:nvSpPr>
-          <p:cNvPr id="8" name="TextBox 7"/>
-          <p:cNvSpPr txBox="1"/>
-          <p:nvPr/>
-        </p:nvSpPr>
-        <p:spPr>
-          <a:xfrm>
-            <a:off x="914400" y="3456432"/>
-            <a:ext cx="2377440" cy="457200"/>
-          </a:xfrm>
-          <a:prstGeom prst="rect">
-            <a:avLst/>
-          </a:prstGeom>
-          <a:noFill/>
-        </p:spPr>
-        <p:txBody>
-          <a:bodyPr wrap="square">
-            <a:spAutoFit/>
-          </a:bodyPr>
-          <a:lstStyle/>
-          <a:p>
-            <a:pPr>
-              <a:spcAft>
-                <a:spcPts val="800"/>
-              </a:spcAft>
-            </a:pPr>
-            <a:r>
-              <a:rPr sz="1900" b="1" i="0">
-                <a:solidFill>
-                  <a:srgbClr val="0F172A"/>
-                </a:solidFill>
-                <a:latin typeface="Segoe UI"/>
-              </a:rPr>
-              <a:t>duplicate</a:t>
-            </a:r>
-          </a:p>
-        </p:txBody>
-      </p:sp>
-      <p:sp>
-        <p:nvSpPr>
-          <p:cNvPr id="9" name="TextBox 8"/>
-          <p:cNvSpPr txBox="1"/>
-          <p:nvPr/>
-        </p:nvSpPr>
-        <p:spPr>
-          <a:xfrm>
-            <a:off x="3383280" y="3456432"/>
-            <a:ext cx="5120640" cy="457200"/>
-          </a:xfrm>
-          <a:prstGeom prst="rect">
-            <a:avLst/>
-          </a:prstGeom>
-          <a:noFill/>
-        </p:spPr>
-        <p:txBody>
-          <a:bodyPr wrap="square">
-            <a:spAutoFit/>
-          </a:bodyPr>
-          <a:lstStyle/>
-          <a:p>
-            <a:pPr>
-              <a:spcAft>
-                <a:spcPts val="800"/>
-              </a:spcAft>
-            </a:pPr>
-            <a:r>
-              <a:rPr sz="1800" b="0" i="0">
-                <a:solidFill>
-                  <a:srgbClr val="64748B"/>
-                </a:solidFill>
-                <a:latin typeface="Segoe UI"/>
-              </a:rPr>
-              <a:t>an identical copy survives</a:t>
-            </a:r>
-          </a:p>
-        </p:txBody>
-      </p:sp>
-      <p:sp>
-        <p:nvSpPr>
-          <p:cNvPr id="10" name="TextBox 9"/>
-          <p:cNvSpPr txBox="1"/>
-          <p:nvPr/>
-        </p:nvSpPr>
-        <p:spPr>
-          <a:xfrm>
-            <a:off x="8686800" y="3456432"/>
-            <a:ext cx="2286000" cy="457200"/>
-          </a:xfrm>
-          <a:prstGeom prst="rect">
-            <a:avLst/>
-          </a:prstGeom>
-          <a:noFill/>
-        </p:spPr>
-        <p:txBody>
-          <a:bodyPr wrap="square">
-            <a:spAutoFit/>
-          </a:bodyPr>
-          <a:lstStyle/>
-          <a:p>
-            <a:pPr>
-              <a:spcAft>
-                <a:spcPts val="800"/>
-              </a:spcAft>
-            </a:pPr>
-            <a:r>
-              <a:rPr sz="1800" b="1" i="0">
-                <a:solidFill>
-                  <a:srgbClr val="0F172A"/>
-                </a:solidFill>
-                <a:latin typeface="Segoe UI"/>
-              </a:rPr>
-              <a:t>0.10</a:t>
-            </a:r>
-          </a:p>
-        </p:txBody>
-      </p:sp>
-      <p:sp>
-        <p:nvSpPr>
-          <p:cNvPr id="11" name="TextBox 10"/>
-          <p:cNvSpPr txBox="1"/>
-          <p:nvPr/>
-        </p:nvSpPr>
-        <p:spPr>
-          <a:xfrm>
-            <a:off x="914400" y="4078224"/>
-            <a:ext cx="2377440" cy="457200"/>
-          </a:xfrm>
-          <a:prstGeom prst="rect">
-            <a:avLst/>
-          </a:prstGeom>
-          <a:noFill/>
-        </p:spPr>
-        <p:txBody>
-          <a:bodyPr wrap="square">
-            <a:spAutoFit/>
-          </a:bodyPr>
-          <a:lstStyle/>
-          <a:p>
-            <a:pPr>
-              <a:spcAft>
-                <a:spcPts val="800"/>
-              </a:spcAft>
-            </a:pPr>
-            <a:r>
-              <a:rPr sz="1900" b="1" i="0">
-                <a:solidFill>
-                  <a:srgbClr val="0F172A"/>
-                </a:solidFill>
-                <a:latin typeface="Segoe UI"/>
-              </a:rPr>
-              <a:t>tracked</a:t>
-            </a:r>
-          </a:p>
-        </p:txBody>
-      </p:sp>
-      <p:sp>
-        <p:nvSpPr>
-          <p:cNvPr id="12" name="TextBox 11"/>
-          <p:cNvSpPr txBox="1"/>
-          <p:nvPr/>
-        </p:nvSpPr>
-        <p:spPr>
-          <a:xfrm>
-            <a:off x="3383280" y="4078224"/>
-            <a:ext cx="5120640" cy="457200"/>
-          </a:xfrm>
-          <a:prstGeom prst="rect">
-            <a:avLst/>
-          </a:prstGeom>
-          <a:noFill/>
-        </p:spPr>
-        <p:txBody>
-          <a:bodyPr wrap="square">
-            <a:spAutoFit/>
-          </a:bodyPr>
-          <a:lstStyle/>
-          <a:p>
-            <a:pPr>
-              <a:spcAft>
-                <a:spcPts val="800"/>
-              </a:spcAft>
-            </a:pPr>
-            <a:r>
-              <a:rPr sz="1800" b="0" i="0">
-                <a:solidFill>
-                  <a:srgbClr val="64748B"/>
-                </a:solidFill>
-                <a:latin typeface="Segoe UI"/>
-              </a:rPr>
-              <a:t>git actually tracks it</a:t>
-            </a:r>
-          </a:p>
-        </p:txBody>
-      </p:sp>
-      <p:sp>
-        <p:nvSpPr>
-          <p:cNvPr id="13" name="TextBox 12"/>
-          <p:cNvSpPr txBox="1"/>
-          <p:nvPr/>
-        </p:nvSpPr>
-        <p:spPr>
-          <a:xfrm>
-            <a:off x="8686800" y="4078224"/>
-            <a:ext cx="2286000" cy="457200"/>
-          </a:xfrm>
-          <a:prstGeom prst="rect">
-            <a:avLst/>
-          </a:prstGeom>
-          <a:noFill/>
-        </p:spPr>
-        <p:txBody>
-          <a:bodyPr wrap="square">
-            <a:spAutoFit/>
-          </a:bodyPr>
-          <a:lstStyle/>
-          <a:p>
-            <a:pPr>
-              <a:spcAft>
-                <a:spcPts val="800"/>
-              </a:spcAft>
-            </a:pPr>
-            <a:r>
-              <a:rPr sz="1800" b="1" i="0">
-                <a:solidFill>
-                  <a:srgbClr val="0F172A"/>
-                </a:solidFill>
-                <a:latin typeface="Segoe UI"/>
-              </a:rPr>
-              <a:t>0.20</a:t>
-            </a:r>
-          </a:p>
-        </p:txBody>
-      </p:sp>
-      <p:sp>
-        <p:nvSpPr>
-          <p:cNvPr id="14" name="TextBox 13"/>
-          <p:cNvSpPr txBox="1"/>
-          <p:nvPr/>
-        </p:nvSpPr>
-        <p:spPr>
-          <a:xfrm>
-            <a:off x="914400" y="4700016"/>
-            <a:ext cx="2377440" cy="457200"/>
-          </a:xfrm>
-          <a:prstGeom prst="rect">
-            <a:avLst/>
-          </a:prstGeom>
-          <a:noFill/>
-        </p:spPr>
-        <p:txBody>
-          <a:bodyPr wrap="square">
-            <a:spAutoFit/>
-          </a:bodyPr>
-          <a:lstStyle/>
-          <a:p>
-            <a:pPr>
-              <a:spcAft>
-                <a:spcPts val="800"/>
-              </a:spcAft>
-            </a:pPr>
-            <a:r>
-              <a:rPr sz="1900" b="1" i="0">
-                <a:solidFill>
-                  <a:srgbClr val="DC2626"/>
-                </a:solidFill>
-                <a:latin typeface="Segoe UI"/>
-              </a:rPr>
-              <a:t>unique</a:t>
-            </a:r>
-          </a:p>
-        </p:txBody>
-      </p:sp>
-      <p:sp>
-        <p:nvSpPr>
-          <p:cNvPr id="15" name="TextBox 14"/>
-          <p:cNvSpPr txBox="1"/>
-          <p:nvPr/>
-        </p:nvSpPr>
-        <p:spPr>
-          <a:xfrm>
-            <a:off x="3383280" y="4700016"/>
-            <a:ext cx="5120640" cy="457200"/>
-          </a:xfrm>
-          <a:prstGeom prst="rect">
-            <a:avLst/>
-          </a:prstGeom>
-          <a:noFill/>
-        </p:spPr>
-        <p:txBody>
-          <a:bodyPr wrap="square">
-            <a:spAutoFit/>
-          </a:bodyPr>
-          <a:lstStyle/>
-          <a:p>
-            <a:pPr>
-              <a:spcAft>
-                <a:spcPts val="800"/>
-              </a:spcAft>
-            </a:pPr>
-            <a:r>
-              <a:rPr sz="1800" b="0" i="0">
-                <a:solidFill>
-                  <a:srgbClr val="64748B"/>
-                </a:solidFill>
-                <a:latin typeface="Segoe UI"/>
-              </a:rPr>
-              <a:t>nothing gets it back</a:t>
-            </a:r>
-          </a:p>
-        </p:txBody>
-      </p:sp>
-      <p:sp>
-        <p:nvSpPr>
-          <p:cNvPr id="16" name="TextBox 15"/>
-          <p:cNvSpPr txBox="1"/>
-          <p:nvPr/>
-        </p:nvSpPr>
-        <p:spPr>
-          <a:xfrm>
-            <a:off x="8686800" y="4700016"/>
-            <a:ext cx="2286000" cy="457200"/>
-          </a:xfrm>
-          <a:prstGeom prst="rect">
-            <a:avLst/>
-          </a:prstGeom>
-          <a:noFill/>
-        </p:spPr>
-        <p:txBody>
-          <a:bodyPr wrap="square">
-            <a:spAutoFit/>
-          </a:bodyPr>
-          <a:lstStyle/>
-          <a:p>
-            <a:pPr>
-              <a:spcAft>
-                <a:spcPts val="800"/>
-              </a:spcAft>
-            </a:pPr>
-            <a:r>
-              <a:rPr sz="1800" b="1" i="0">
-                <a:solidFill>
-                  <a:srgbClr val="DC2626"/>
-                </a:solidFill>
-                <a:latin typeface="Segoe UI"/>
-              </a:rPr>
-              <a:t>excluded</a:t>
-            </a:r>
-          </a:p>
-        </p:txBody>
-      </p:sp>
-      <p:sp>
-        <p:nvSpPr>
-          <p:cNvPr id="17" name="TextBox 16"/>
-          <p:cNvSpPr txBox="1"/>
-          <p:nvPr/>
-        </p:nvSpPr>
-        <p:spPr>
-          <a:xfrm>
-            <a:off x="914400" y="5486400"/>
-            <a:ext cx="10058400" cy="731520"/>
-          </a:xfrm>
-          <a:prstGeom prst="rect">
-            <a:avLst/>
-          </a:prstGeom>
-          <a:noFill/>
-        </p:spPr>
-        <p:txBody>
-          <a:bodyPr wrap="square">
-            <a:spAutoFit/>
-          </a:bodyPr>
-          <a:lstStyle/>
-          <a:p>
-            <a:pPr>
-              <a:spcAft>
-                <a:spcPts val="800"/>
-              </a:spcAft>
-            </a:pPr>
-            <a:r>
-              <a:rPr sz="1800" b="1" i="0">
-                <a:solidFill>
-                  <a:srgbClr val="DC2626"/>
-                </a:solidFill>
-                <a:latin typeface="Segoe UI"/>
-              </a:rPr>
-              <a:t>A unique file is never recommended. Not at 40 GB. Not after three years untouched.</a:t>
+              <a:rPr sz="1300" b="1">
+                <a:solidFill>
+                  <a:srgbClr val="34D399"/>
+                </a:solidFill>
+                <a:latin typeface="Segoe UI"/>
+              </a:rPr>
+              <a:t>Runway Projection: </a:t>
+            </a:r>
+            <a:r>
+              <a:rPr sz="1300">
+                <a:solidFill>
+                  <a:srgbClr val="F8FAFC"/>
+                </a:solidFill>
+                <a:latin typeface="Segoe UI"/>
+              </a:rPr>
+              <a:t>Compared against current filesystem free space, delivers an instant disk exhaustion date.</a:t>
             </a:r>
           </a:p>
         </p:txBody>
@@ -4121,14 +4320,181 @@
       <p:grpSpPr/>
       <p:sp>
         <p:nvSpPr>
-          <p:cNvPr id="2" name="TextBox 1"/>
+          <p:cNvPr id="2" name="Rectangle 1"/>
+          <p:cNvSpPr/>
+          <p:nvPr/>
+        </p:nvSpPr>
+        <p:spPr>
+          <a:xfrm>
+            <a:off x="0" y="0"/>
+            <a:ext cx="12191695" cy="6858000"/>
+          </a:xfrm>
+          <a:prstGeom prst="rect">
+            <a:avLst/>
+          </a:prstGeom>
+          <a:solidFill>
+            <a:srgbClr val="0B1120"/>
+          </a:solidFill>
+          <a:ln>
+            <a:noFill/>
+          </a:ln>
+        </p:spPr>
+        <p:style>
+          <a:lnRef idx="1">
+            <a:schemeClr val="accent1"/>
+          </a:lnRef>
+          <a:fillRef idx="3">
+            <a:schemeClr val="accent1"/>
+          </a:fillRef>
+          <a:effectRef idx="2">
+            <a:schemeClr val="accent1"/>
+          </a:effectRef>
+          <a:fontRef idx="minor">
+            <a:schemeClr val="lt1"/>
+          </a:fontRef>
+        </p:style>
+        <p:txBody>
+          <a:bodyPr rtlCol="0" anchor="ctr"/>
+          <a:lstStyle/>
+          <a:p>
+            <a:pPr algn="ctr"/>
+          </a:p>
+        </p:txBody>
+      </p:sp>
+      <p:sp>
+        <p:nvSpPr>
+          <p:cNvPr id="3" name="TextBox 2"/>
           <p:cNvSpPr txBox="1"/>
           <p:nvPr/>
         </p:nvSpPr>
         <p:spPr>
           <a:xfrm>
-            <a:off x="822960" y="502920"/>
-            <a:ext cx="10515600" cy="365760"/>
+            <a:off x="731520" y="365760"/>
+            <a:ext cx="10698480" cy="365760"/>
+          </a:xfrm>
+          <a:prstGeom prst="rect">
+            <a:avLst/>
+          </a:prstGeom>
+          <a:noFill/>
+        </p:spPr>
+        <p:txBody>
+          <a:bodyPr wrap="square">
+            <a:spAutoFit/>
+          </a:bodyPr>
+          <a:lstStyle/>
+          <a:p>
+            <a:r>
+              <a:rPr sz="1100" b="1">
+                <a:solidFill>
+                  <a:srgbClr val="38BDF8"/>
+                </a:solidFill>
+                <a:latin typeface="Segoe UI"/>
+              </a:rPr>
+              <a:t>AI ARCHITECTURE</a:t>
+            </a:r>
+          </a:p>
+        </p:txBody>
+      </p:sp>
+      <p:sp>
+        <p:nvSpPr>
+          <p:cNvPr id="4" name="TextBox 3"/>
+          <p:cNvSpPr txBox="1"/>
+          <p:nvPr/>
+        </p:nvSpPr>
+        <p:spPr>
+          <a:xfrm>
+            <a:off x="731520" y="685800"/>
+            <a:ext cx="10698480" cy="640080"/>
+          </a:xfrm>
+          <a:prstGeom prst="rect">
+            <a:avLst/>
+          </a:prstGeom>
+          <a:noFill/>
+        </p:spPr>
+        <p:txBody>
+          <a:bodyPr wrap="square">
+            <a:spAutoFit/>
+          </a:bodyPr>
+          <a:lstStyle/>
+          <a:p>
+            <a:r>
+              <a:rPr sz="2600" b="1">
+                <a:solidFill>
+                  <a:srgbClr val="F8FAFC"/>
+                </a:solidFill>
+                <a:latin typeface="Segoe UI"/>
+              </a:rPr>
+              <a:t>Safety by Construction: Model Outside the Decision Loop</a:t>
+            </a:r>
+          </a:p>
+          <a:p>
+            <a:r>
+              <a:rPr sz="1300">
+                <a:solidFill>
+                  <a:srgbClr val="94A3B8"/>
+                </a:solidFill>
+                <a:latin typeface="Segoe UI"/>
+              </a:rPr>
+              <a:t>Eliminating AI hallucination risk through structural isolation</a:t>
+            </a:r>
+          </a:p>
+        </p:txBody>
+      </p:sp>
+      <p:sp>
+        <p:nvSpPr>
+          <p:cNvPr id="5" name="Rounded Rectangle 4"/>
+          <p:cNvSpPr/>
+          <p:nvPr/>
+        </p:nvSpPr>
+        <p:spPr>
+          <a:xfrm>
+            <a:off x="731520" y="1645920"/>
+            <a:ext cx="5120640" cy="4572000"/>
+          </a:xfrm>
+          <a:prstGeom prst="roundRect">
+            <a:avLst/>
+          </a:prstGeom>
+          <a:solidFill>
+            <a:srgbClr val="161E2E"/>
+          </a:solidFill>
+          <a:ln w="12700">
+            <a:solidFill>
+              <a:srgbClr val="2D3B55"/>
+            </a:solidFill>
+          </a:ln>
+        </p:spPr>
+        <p:style>
+          <a:lnRef idx="1">
+            <a:schemeClr val="accent1"/>
+          </a:lnRef>
+          <a:fillRef idx="3">
+            <a:schemeClr val="accent1"/>
+          </a:fillRef>
+          <a:effectRef idx="2">
+            <a:schemeClr val="accent1"/>
+          </a:effectRef>
+          <a:fontRef idx="minor">
+            <a:schemeClr val="lt1"/>
+          </a:fontRef>
+        </p:style>
+        <p:txBody>
+          <a:bodyPr rtlCol="0" anchor="ctr"/>
+          <a:lstStyle/>
+          <a:p>
+            <a:pPr algn="ctr"/>
+          </a:p>
+        </p:txBody>
+      </p:sp>
+      <p:sp>
+        <p:nvSpPr>
+          <p:cNvPr id="6" name="TextBox 5"/>
+          <p:cNvSpPr txBox="1"/>
+          <p:nvPr/>
+        </p:nvSpPr>
+        <p:spPr>
+          <a:xfrm>
+            <a:off x="914400" y="1783080"/>
+            <a:ext cx="4754879" cy="4297680"/>
           </a:xfrm>
           <a:prstGeom prst="rect">
             <a:avLst/>
@@ -4147,27 +4513,147 @@
               </a:spcAft>
             </a:pPr>
             <a:r>
-              <a:rPr sz="1200" b="1" i="0">
-                <a:solidFill>
-                  <a:srgbClr val="DC2626"/>
-                </a:solidFill>
-                <a:latin typeface="Segoe UI"/>
-              </a:rPr>
-              <a:t>SAFETY BY CONSTRUCTION</a:t>
-            </a:r>
-          </a:p>
-        </p:txBody>
-      </p:sp>
-      <p:sp>
-        <p:nvSpPr>
-          <p:cNvPr id="3" name="TextBox 2"/>
+              <a:rPr sz="1700" b="1">
+                <a:solidFill>
+                  <a:srgbClr val="F87171"/>
+                </a:solidFill>
+                <a:latin typeface="Segoe UI"/>
+              </a:rPr>
+              <a:t>Traditional 'Prompt-Only' AI (Dangerous)</a:t>
+            </a:r>
+          </a:p>
+          <a:p>
+            <a:pPr>
+              <a:spcAft>
+                <a:spcPts val="600"/>
+              </a:spcAft>
+            </a:pPr>
+            <a:r>
+              <a:rPr sz="1300" b="1">
+                <a:solidFill>
+                  <a:srgbClr val="F87171"/>
+                </a:solidFill>
+                <a:latin typeface="Segoe UI"/>
+              </a:rPr>
+              <a:t>Approach: </a:t>
+            </a:r>
+            <a:r>
+              <a:rPr sz="1300">
+                <a:solidFill>
+                  <a:srgbClr val="F8FAFC"/>
+                </a:solidFill>
+                <a:latin typeface="Segoe UI"/>
+              </a:rPr>
+              <a:t>Prompt an LLM with disk contents and tell it 'please be careful not to delete important files'.</a:t>
+            </a:r>
+          </a:p>
+          <a:p>
+            <a:pPr>
+              <a:spcAft>
+                <a:spcPts val="600"/>
+              </a:spcAft>
+            </a:pPr>
+            <a:r>
+              <a:rPr sz="1300" b="1">
+                <a:solidFill>
+                  <a:srgbClr val="F87171"/>
+                </a:solidFill>
+                <a:latin typeface="Segoe UI"/>
+              </a:rPr>
+              <a:t>Risk: </a:t>
+            </a:r>
+            <a:r>
+              <a:rPr sz="1300">
+                <a:solidFill>
+                  <a:srgbClr val="F8FAFC"/>
+                </a:solidFill>
+                <a:latin typeface="Segoe UI"/>
+              </a:rPr>
+              <a:t>LLM hallucinations or parsing failures can misclassify user documents as temporary files.</a:t>
+            </a:r>
+          </a:p>
+          <a:p>
+            <a:pPr>
+              <a:spcAft>
+                <a:spcPts val="600"/>
+              </a:spcAft>
+            </a:pPr>
+            <a:r>
+              <a:rPr sz="1300" b="1">
+                <a:solidFill>
+                  <a:srgbClr val="F87171"/>
+                </a:solidFill>
+                <a:latin typeface="Segoe UI"/>
+              </a:rPr>
+              <a:t>Catastrophic Failure: </a:t>
+            </a:r>
+            <a:r>
+              <a:rPr sz="1300">
+                <a:solidFill>
+                  <a:srgbClr val="F8FAFC"/>
+                </a:solidFill>
+                <a:latin typeface="Segoe UI"/>
+              </a:rPr>
+              <a:t>One incorrect decision leads to permanent, irreversible data loss.</a:t>
+            </a:r>
+          </a:p>
+        </p:txBody>
+      </p:sp>
+      <p:sp>
+        <p:nvSpPr>
+          <p:cNvPr id="7" name="Rounded Rectangle 6"/>
+          <p:cNvSpPr/>
+          <p:nvPr/>
+        </p:nvSpPr>
+        <p:spPr>
+          <a:xfrm>
+            <a:off x="6217920" y="1645920"/>
+            <a:ext cx="5120640" cy="4572000"/>
+          </a:xfrm>
+          <a:prstGeom prst="roundRect">
+            <a:avLst/>
+          </a:prstGeom>
+          <a:solidFill>
+            <a:srgbClr val="161E2E"/>
+          </a:solidFill>
+          <a:ln w="12700">
+            <a:solidFill>
+              <a:srgbClr val="2D3B55"/>
+            </a:solidFill>
+          </a:ln>
+        </p:spPr>
+        <p:style>
+          <a:lnRef idx="1">
+            <a:schemeClr val="accent1"/>
+          </a:lnRef>
+          <a:fillRef idx="3">
+            <a:schemeClr val="accent1"/>
+          </a:fillRef>
+          <a:effectRef idx="2">
+            <a:schemeClr val="accent1"/>
+          </a:effectRef>
+          <a:fontRef idx="minor">
+            <a:schemeClr val="lt1"/>
+          </a:fontRef>
+        </p:style>
+        <p:txBody>
+          <a:bodyPr rtlCol="0" anchor="ctr"/>
+          <a:lstStyle/>
+          <a:p>
+            <a:pPr algn="ctr"/>
+          </a:p>
+        </p:txBody>
+      </p:sp>
+      <p:sp>
+        <p:nvSpPr>
+          <p:cNvPr id="8" name="TextBox 7"/>
           <p:cNvSpPr txBox="1"/>
           <p:nvPr/>
         </p:nvSpPr>
         <p:spPr>
           <a:xfrm>
-            <a:off x="822960" y="914400"/>
-            <a:ext cx="10515600" cy="822960"/>
+            <a:off x="6400800" y="1783080"/>
+            <a:ext cx="4754879" cy="4297680"/>
           </a:xfrm>
           <a:prstGeom prst="rect">
             <a:avLst/>
@@ -4186,148 +4672,113 @@
               </a:spcAft>
             </a:pPr>
             <a:r>
-              <a:rPr sz="3200" b="1" i="0">
-                <a:solidFill>
-                  <a:srgbClr val="0F172A"/>
-                </a:solidFill>
-                <a:latin typeface="Segoe UI"/>
-              </a:rPr>
-              <a:t>The model is outside the decision</a:t>
-            </a:r>
-          </a:p>
-        </p:txBody>
-      </p:sp>
-      <p:sp>
-        <p:nvSpPr>
-          <p:cNvPr id="4" name="TextBox 3"/>
-          <p:cNvSpPr txBox="1"/>
-          <p:nvPr/>
-        </p:nvSpPr>
-        <p:spPr>
-          <a:xfrm>
-            <a:off x="822960" y="1920240"/>
-            <a:ext cx="10515600" cy="3108960"/>
-          </a:xfrm>
-          <a:prstGeom prst="rect">
-            <a:avLst/>
-          </a:prstGeom>
-          <a:noFill/>
-        </p:spPr>
-        <p:txBody>
-          <a:bodyPr wrap="square">
-            <a:spAutoFit/>
-          </a:bodyPr>
-          <a:lstStyle/>
+              <a:rPr sz="1700" b="1">
+                <a:solidFill>
+                  <a:srgbClr val="34D399"/>
+                </a:solidFill>
+                <a:latin typeface="Segoe UI"/>
+              </a:rPr>
+              <a:t>SANCHAY's Isolated Architecture (Safe)</a:t>
+            </a:r>
+          </a:p>
           <a:p>
             <a:pPr>
               <a:spcAft>
-                <a:spcPts val="1000"/>
+                <a:spcPts val="600"/>
               </a:spcAft>
             </a:pPr>
             <a:r>
-              <a:rPr sz="1900" b="0" i="0">
-                <a:solidFill>
-                  <a:srgbClr val="0F172A"/>
-                </a:solidFill>
-                <a:latin typeface="Segoe UI"/>
-              </a:rPr>
-              <a:t>Most AI system tools try to make the model behave safely through careful prompting.</a:t>
+              <a:rPr sz="1300" b="1">
+                <a:solidFill>
+                  <a:srgbClr val="34D399"/>
+                </a:solidFill>
+                <a:latin typeface="Segoe UI"/>
+              </a:rPr>
+              <a:t>Pre-Classification: </a:t>
+            </a:r>
+            <a:r>
+              <a:rPr sz="1300">
+                <a:solidFill>
+                  <a:srgbClr val="F8FAFC"/>
+                </a:solidFill>
+                <a:latin typeface="Segoe UI"/>
+              </a:rPr>
+              <a:t>Deterministic algorithm filters out unique files before any ranking.</a:t>
             </a:r>
           </a:p>
           <a:p>
             <a:pPr>
               <a:spcAft>
-                <a:spcPts val="1000"/>
+                <a:spcPts val="600"/>
               </a:spcAft>
             </a:pPr>
             <a:r>
-              <a:rPr sz="1900" b="0" i="0">
-                <a:solidFill>
-                  <a:srgbClr val="0F172A"/>
-                </a:solidFill>
-                <a:latin typeface="Segoe UI"/>
-              </a:rPr>
-              <a:t>We gave the model no structural way to cause harm instead.</a:t>
+              <a:rPr sz="1300" b="1">
+                <a:solidFill>
+                  <a:srgbClr val="34D399"/>
+                </a:solidFill>
+                <a:latin typeface="Segoe UI"/>
+              </a:rPr>
+              <a:t>Restricted Context: </a:t>
+            </a:r>
+            <a:r>
+              <a:rPr sz="1300">
+                <a:solidFill>
+                  <a:srgbClr val="F8FAFC"/>
+                </a:solidFill>
+                <a:latin typeface="Segoe UI"/>
+              </a:rPr>
+              <a:t>The LLM receives only files already verified as 100% regenerable.</a:t>
             </a:r>
           </a:p>
           <a:p>
             <a:pPr>
               <a:spcAft>
-                <a:spcPts val="1000"/>
+                <a:spcPts val="600"/>
               </a:spcAft>
             </a:pPr>
             <a:r>
-              <a:rPr sz="1900" b="0" i="0">
-                <a:solidFill>
-                  <a:srgbClr val="0F172A"/>
-                </a:solidFill>
-                <a:latin typeface="Segoe UI"/>
-              </a:rPr>
-              <a:t/>
+              <a:rPr sz="1300" b="1">
+                <a:solidFill>
+                  <a:srgbClr val="34D399"/>
+                </a:solidFill>
+                <a:latin typeface="Segoe UI"/>
+              </a:rPr>
+              <a:t>Zero Mutation Power: </a:t>
+            </a:r>
+            <a:r>
+              <a:rPr sz="1300">
+                <a:solidFill>
+                  <a:srgbClr val="F8FAFC"/>
+                </a:solidFill>
+                <a:latin typeface="Segoe UI"/>
+              </a:rPr>
+              <a:t>The LLM cannot add files, delete files, or alter the candidate priority list.</a:t>
             </a:r>
           </a:p>
           <a:p>
             <a:pPr>
               <a:spcAft>
-                <a:spcPts val="1000"/>
+                <a:spcPts val="600"/>
               </a:spcAft>
             </a:pPr>
             <a:r>
-              <a:rPr sz="1900" b="0" i="0">
-                <a:solidFill>
-                  <a:srgbClr val="0F172A"/>
-                </a:solidFill>
-                <a:latin typeface="Segoe UI"/>
-              </a:rPr>
-              <a:t>Ranking completes before the LLM is called. The model receives only files already</a:t>
-            </a:r>
-          </a:p>
-          <a:p>
-            <a:pPr>
-              <a:spcAft>
-                <a:spcPts val="1000"/>
-              </a:spcAft>
-            </a:pPr>
-            <a:r>
-              <a:rPr sz="1900" b="0" i="0">
-                <a:solidFill>
-                  <a:srgbClr val="0F172A"/>
-                </a:solidFill>
-                <a:latin typeface="Segoe UI"/>
-              </a:rPr>
-              <a:t>judged recoverable. It cannot add a file, delete a file, or modify priority.</a:t>
-            </a:r>
-          </a:p>
-          <a:p>
-            <a:pPr>
-              <a:spcAft>
-                <a:spcPts val="1000"/>
-              </a:spcAft>
-            </a:pPr>
-            <a:r>
-              <a:rPr sz="1900" b="0" i="0">
-                <a:solidFill>
-                  <a:srgbClr val="0F172A"/>
-                </a:solidFill>
-                <a:latin typeface="Segoe UI"/>
-              </a:rPr>
-              <a:t/>
-            </a:r>
-          </a:p>
-          <a:p>
-            <a:pPr>
-              <a:spcAft>
-                <a:spcPts val="1000"/>
-              </a:spcAft>
-            </a:pPr>
-            <a:r>
-              <a:rPr sz="1900" b="0" i="0">
-                <a:solidFill>
-                  <a:srgbClr val="0F172A"/>
-                </a:solidFill>
-                <a:latin typeface="Segoe UI"/>
-              </a:rPr>
-              <a:t>If the LLM hallucinates, the worst outcome is an awkward description — never data loss.</a:t>
+              <a:rPr sz="1300" b="1">
+                <a:solidFill>
+                  <a:srgbClr val="38BDF8"/>
+                </a:solidFill>
+                <a:latin typeface="Segoe UI"/>
+              </a:rPr>
+              <a:t>Worst Case: </a:t>
+            </a:r>
+            <a:r>
+              <a:rPr sz="1300">
+                <a:solidFill>
+                  <a:srgbClr val="F8FAFC"/>
+                </a:solidFill>
+                <a:latin typeface="Segoe UI"/>
+              </a:rPr>
+              <a:t>An awkward descriptive sentence — NEVER a lost file.</a:t>
             </a:r>
           </a:p>
         </p:txBody>
@@ -4352,14 +4803,57 @@
       <p:grpSpPr/>
       <p:sp>
         <p:nvSpPr>
-          <p:cNvPr id="2" name="TextBox 1"/>
+          <p:cNvPr id="2" name="Rectangle 1"/>
+          <p:cNvSpPr/>
+          <p:nvPr/>
+        </p:nvSpPr>
+        <p:spPr>
+          <a:xfrm>
+            <a:off x="0" y="0"/>
+            <a:ext cx="12191695" cy="6858000"/>
+          </a:xfrm>
+          <a:prstGeom prst="rect">
+            <a:avLst/>
+          </a:prstGeom>
+          <a:solidFill>
+            <a:srgbClr val="0B1120"/>
+          </a:solidFill>
+          <a:ln>
+            <a:noFill/>
+          </a:ln>
+        </p:spPr>
+        <p:style>
+          <a:lnRef idx="1">
+            <a:schemeClr val="accent1"/>
+          </a:lnRef>
+          <a:fillRef idx="3">
+            <a:schemeClr val="accent1"/>
+          </a:fillRef>
+          <a:effectRef idx="2">
+            <a:schemeClr val="accent1"/>
+          </a:effectRef>
+          <a:fontRef idx="minor">
+            <a:schemeClr val="lt1"/>
+          </a:fontRef>
+        </p:style>
+        <p:txBody>
+          <a:bodyPr rtlCol="0" anchor="ctr"/>
+          <a:lstStyle/>
+          <a:p>
+            <a:pPr algn="ctr"/>
+          </a:p>
+        </p:txBody>
+      </p:sp>
+      <p:sp>
+        <p:nvSpPr>
+          <p:cNvPr id="3" name="TextBox 2"/>
           <p:cNvSpPr txBox="1"/>
           <p:nvPr/>
         </p:nvSpPr>
         <p:spPr>
           <a:xfrm>
-            <a:off x="822960" y="502920"/>
-            <a:ext cx="10515600" cy="365760"/>
+            <a:off x="731520" y="365760"/>
+            <a:ext cx="10698480" cy="365760"/>
           </a:xfrm>
           <a:prstGeom prst="rect">
             <a:avLst/>
@@ -4372,33 +4866,28 @@
           </a:bodyPr>
           <a:lstStyle/>
           <a:p>
-            <a:pPr>
-              <a:spcAft>
-                <a:spcPts val="800"/>
-              </a:spcAft>
-            </a:pPr>
-            <a:r>
-              <a:rPr sz="1200" b="1" i="0">
-                <a:solidFill>
-                  <a:srgbClr val="DC2626"/>
-                </a:solidFill>
-                <a:latin typeface="Segoe UI"/>
-              </a:rPr>
-              <a:t>FORECASTING</a:t>
-            </a:r>
-          </a:p>
-        </p:txBody>
-      </p:sp>
-      <p:sp>
-        <p:nvSpPr>
-          <p:cNvPr id="3" name="TextBox 2"/>
+            <a:r>
+              <a:rPr sz="1100" b="1">
+                <a:solidFill>
+                  <a:srgbClr val="38BDF8"/>
+                </a:solidFill>
+                <a:latin typeface="Segoe UI"/>
+              </a:rPr>
+              <a:t>SYSTEM ARCHITECTURE</a:t>
+            </a:r>
+          </a:p>
+        </p:txBody>
+      </p:sp>
+      <p:sp>
+        <p:nvSpPr>
+          <p:cNvPr id="4" name="TextBox 3"/>
           <p:cNvSpPr txBox="1"/>
           <p:nvPr/>
         </p:nvSpPr>
         <p:spPr>
           <a:xfrm>
-            <a:off x="822960" y="914400"/>
-            <a:ext cx="10515600" cy="822960"/>
+            <a:off x="731520" y="685800"/>
+            <a:ext cx="10698480" cy="640080"/>
           </a:xfrm>
           <a:prstGeom prst="rect">
             <a:avLst/>
@@ -4411,181 +4900,42 @@
           </a:bodyPr>
           <a:lstStyle/>
           <a:p>
-            <a:pPr>
-              <a:spcAft>
-                <a:spcPts val="800"/>
-              </a:spcAft>
-            </a:pPr>
-            <a:r>
-              <a:rPr sz="3200" b="1" i="0">
-                <a:solidFill>
-                  <a:srgbClr val="0F172A"/>
-                </a:solidFill>
-                <a:latin typeface="Segoe UI"/>
-              </a:rPr>
-              <a:t>You do not need weeks of snapshots</a:t>
-            </a:r>
-          </a:p>
-        </p:txBody>
-      </p:sp>
-      <p:sp>
-        <p:nvSpPr>
-          <p:cNvPr id="4" name="TextBox 3"/>
-          <p:cNvSpPr txBox="1"/>
+            <a:r>
+              <a:rPr sz="2600" b="1">
+                <a:solidFill>
+                  <a:srgbClr val="F8FAFC"/>
+                </a:solidFill>
+                <a:latin typeface="Segoe UI"/>
+              </a:rPr>
+              <a:t>Metadata Traversal -&gt; Tiered Content Hasher -&gt; Regret Ranker -&gt; Forecaster</a:t>
+            </a:r>
+          </a:p>
+        </p:txBody>
+      </p:sp>
+      <p:pic>
+        <p:nvPicPr>
+          <p:cNvPr id="5" name="Picture 4" descr="s_arch_slide.jpg"/>
+          <p:cNvPicPr>
+            <a:picLocks noChangeAspect="1"/>
+          </p:cNvPicPr>
           <p:nvPr/>
-        </p:nvSpPr>
-        <p:spPr>
-          <a:xfrm>
-            <a:off x="822960" y="1920240"/>
-            <a:ext cx="10515600" cy="2743200"/>
+        </p:nvPicPr>
+        <p:blipFill>
+          <a:blip r:embed="rId2"/>
+          <a:stretch>
+            <a:fillRect/>
+          </a:stretch>
+        </p:blipFill>
+        <p:spPr>
+          <a:xfrm>
+            <a:off x="731520" y="1645920"/>
+            <a:ext cx="10698480" cy="5359938"/>
           </a:xfrm>
           <a:prstGeom prst="rect">
             <a:avLst/>
           </a:prstGeom>
-          <a:noFill/>
-        </p:spPr>
-        <p:txBody>
-          <a:bodyPr wrap="square">
-            <a:spAutoFit/>
-          </a:bodyPr>
-          <a:lstStyle/>
-          <a:p>
-            <a:pPr>
-              <a:spcAft>
-                <a:spcPts val="1000"/>
-              </a:spcAft>
-            </a:pPr>
-            <a:r>
-              <a:rPr sz="1900" b="0" i="0">
-                <a:solidFill>
-                  <a:srgbClr val="0F172A"/>
-                </a:solidFill>
-                <a:latin typeface="Segoe UI"/>
-              </a:rPr>
-              <a:t>Predicting disk exhaustion usually requires running a daemon for weeks.</a:t>
-            </a:r>
-          </a:p>
-          <a:p>
-            <a:pPr>
-              <a:spcAft>
-                <a:spcPts val="1000"/>
-              </a:spcAft>
-            </a:pPr>
-            <a:r>
-              <a:rPr sz="1900" b="0" i="0">
-                <a:solidFill>
-                  <a:srgbClr val="0F172A"/>
-                </a:solidFill>
-                <a:latin typeface="Segoe UI"/>
-              </a:rPr>
-              <a:t/>
-            </a:r>
-          </a:p>
-          <a:p>
-            <a:pPr>
-              <a:spcAft>
-                <a:spcPts val="1000"/>
-              </a:spcAft>
-            </a:pPr>
-            <a:r>
-              <a:rPr sz="1900" b="0" i="0">
-                <a:solidFill>
-                  <a:srgbClr val="0F172A"/>
-                </a:solidFill>
-                <a:latin typeface="Segoe UI"/>
-              </a:rPr>
-              <a:t>It does not have to. Every filesystem already stores file modification timestamps,</a:t>
-            </a:r>
-          </a:p>
-          <a:p>
-            <a:pPr>
-              <a:spcAft>
-                <a:spcPts val="1000"/>
-              </a:spcAft>
-            </a:pPr>
-            <a:r>
-              <a:rPr sz="1900" b="0" i="0">
-                <a:solidFill>
-                  <a:srgbClr val="0F172A"/>
-                </a:solidFill>
-                <a:latin typeface="Segoe UI"/>
-              </a:rPr>
-              <a:t>so the mtime distribution across a single scan gives bytes-added-per-day directly.</a:t>
-            </a:r>
-          </a:p>
-          <a:p>
-            <a:pPr>
-              <a:spcAft>
-                <a:spcPts val="1000"/>
-              </a:spcAft>
-            </a:pPr>
-            <a:r>
-              <a:rPr sz="1900" b="0" i="0">
-                <a:solidFill>
-                  <a:srgbClr val="0F172A"/>
-                </a:solidFill>
-                <a:latin typeface="Segoe UI"/>
-              </a:rPr>
-              <a:t/>
-            </a:r>
-          </a:p>
-          <a:p>
-            <a:pPr>
-              <a:spcAft>
-                <a:spcPts val="1000"/>
-              </a:spcAft>
-            </a:pPr>
-            <a:r>
-              <a:rPr sz="1900" b="0" i="0">
-                <a:solidFill>
-                  <a:srgbClr val="0F172A"/>
-                </a:solidFill>
-                <a:latin typeface="Segoe UI"/>
-              </a:rPr>
-              <a:t>Compared against free space, that yields an immediate runway forecast on run #1.</a:t>
-            </a:r>
-          </a:p>
-        </p:txBody>
-      </p:sp>
-      <p:sp>
-        <p:nvSpPr>
-          <p:cNvPr id="5" name="TextBox 4"/>
-          <p:cNvSpPr txBox="1"/>
-          <p:nvPr/>
-        </p:nvSpPr>
-        <p:spPr>
-          <a:xfrm>
-            <a:off x="822960" y="4937760"/>
-            <a:ext cx="10515600" cy="548640"/>
-          </a:xfrm>
-          <a:prstGeom prst="rect">
-            <a:avLst/>
-          </a:prstGeom>
-          <a:noFill/>
-        </p:spPr>
-        <p:txBody>
-          <a:bodyPr wrap="square">
-            <a:spAutoFit/>
-          </a:bodyPr>
-          <a:lstStyle/>
-          <a:p>
-            <a:pPr>
-              <a:spcAft>
-                <a:spcPts val="800"/>
-              </a:spcAft>
-            </a:pPr>
-            <a:r>
-              <a:rPr sz="2000" b="1" i="0">
-                <a:solidFill>
-                  <a:srgbClr val="DC2626"/>
-                </a:solidFill>
-                <a:latin typeface="Segoe UI"/>
-              </a:rPr>
-              <a:t>growth:  33.9 KB/day  |  immediate exhaustion date projection</a:t>
-            </a:r>
-          </a:p>
-        </p:txBody>
-      </p:sp>
+        </p:spPr>
+      </p:pic>
     </p:spTree>
   </p:cSld>
   <p:clrMapOvr>
@@ -4606,14 +4956,57 @@
       <p:grpSpPr/>
       <p:sp>
         <p:nvSpPr>
-          <p:cNvPr id="2" name="TextBox 1"/>
+          <p:cNvPr id="2" name="Rectangle 1"/>
+          <p:cNvSpPr/>
+          <p:nvPr/>
+        </p:nvSpPr>
+        <p:spPr>
+          <a:xfrm>
+            <a:off x="0" y="0"/>
+            <a:ext cx="12191695" cy="6858000"/>
+          </a:xfrm>
+          <a:prstGeom prst="rect">
+            <a:avLst/>
+          </a:prstGeom>
+          <a:solidFill>
+            <a:srgbClr val="0B1120"/>
+          </a:solidFill>
+          <a:ln>
+            <a:noFill/>
+          </a:ln>
+        </p:spPr>
+        <p:style>
+          <a:lnRef idx="1">
+            <a:schemeClr val="accent1"/>
+          </a:lnRef>
+          <a:fillRef idx="3">
+            <a:schemeClr val="accent1"/>
+          </a:fillRef>
+          <a:effectRef idx="2">
+            <a:schemeClr val="accent1"/>
+          </a:effectRef>
+          <a:fontRef idx="minor">
+            <a:schemeClr val="lt1"/>
+          </a:fontRef>
+        </p:style>
+        <p:txBody>
+          <a:bodyPr rtlCol="0" anchor="ctr"/>
+          <a:lstStyle/>
+          <a:p>
+            <a:pPr algn="ctr"/>
+          </a:p>
+        </p:txBody>
+      </p:sp>
+      <p:sp>
+        <p:nvSpPr>
+          <p:cNvPr id="3" name="TextBox 2"/>
           <p:cNvSpPr txBox="1"/>
           <p:nvPr/>
         </p:nvSpPr>
         <p:spPr>
           <a:xfrm>
-            <a:off x="822960" y="502920"/>
-            <a:ext cx="10515600" cy="365760"/>
+            <a:off x="731520" y="365760"/>
+            <a:ext cx="10698480" cy="365760"/>
           </a:xfrm>
           <a:prstGeom prst="rect">
             <a:avLst/>
@@ -4626,33 +5019,28 @@
           </a:bodyPr>
           <a:lstStyle/>
           <a:p>
-            <a:pPr>
-              <a:spcAft>
-                <a:spcPts val="800"/>
-              </a:spcAft>
-            </a:pPr>
-            <a:r>
-              <a:rPr sz="1200" b="1" i="0">
-                <a:solidFill>
-                  <a:srgbClr val="DC2626"/>
-                </a:solidFill>
-                <a:latin typeface="Segoe UI"/>
-              </a:rPr>
-              <a:t>THE TOOL</a:t>
-            </a:r>
-          </a:p>
-        </p:txBody>
-      </p:sp>
-      <p:sp>
-        <p:nvSpPr>
-          <p:cNvPr id="3" name="TextBox 2"/>
+            <a:r>
+              <a:rPr sz="1100" b="1">
+                <a:solidFill>
+                  <a:srgbClr val="38BDF8"/>
+                </a:solidFill>
+                <a:latin typeface="Segoe UI"/>
+              </a:rPr>
+              <a:t>INTERACTIVE TERMINAL UI</a:t>
+            </a:r>
+          </a:p>
+        </p:txBody>
+      </p:sp>
+      <p:sp>
+        <p:nvSpPr>
+          <p:cNvPr id="4" name="TextBox 3"/>
           <p:cNvSpPr txBox="1"/>
           <p:nvPr/>
         </p:nvSpPr>
         <p:spPr>
           <a:xfrm>
-            <a:off x="822960" y="914400"/>
-            <a:ext cx="10515600" cy="822960"/>
+            <a:off x="731520" y="685800"/>
+            <a:ext cx="10698480" cy="640080"/>
           </a:xfrm>
           <a:prstGeom prst="rect">
             <a:avLst/>
@@ -4665,26 +5053,21 @@
           </a:bodyPr>
           <a:lstStyle/>
           <a:p>
-            <a:pPr>
-              <a:spcAft>
-                <a:spcPts val="800"/>
-              </a:spcAft>
-            </a:pPr>
-            <a:r>
-              <a:rPr sz="3200" b="1" i="0">
-                <a:solidFill>
-                  <a:srgbClr val="0F172A"/>
-                </a:solidFill>
-                <a:latin typeface="Segoe UI"/>
-              </a:rPr>
-              <a:t/>
+            <a:r>
+              <a:rPr sz="2600" b="1">
+                <a:solidFill>
+                  <a:srgbClr val="F8FAFC"/>
+                </a:solidFill>
+                <a:latin typeface="Segoe UI"/>
+              </a:rPr>
+              <a:t>Responsive Textual Interface with Live Category Filtering</a:t>
             </a:r>
           </a:p>
         </p:txBody>
       </p:sp>
       <p:pic>
         <p:nvPicPr>
-          <p:cNvPr id="4" name="Picture 3" descr="tui_s.jpg"/>
+          <p:cNvPr id="5" name="Picture 4" descr="s_tui_slide.jpg"/>
           <p:cNvPicPr>
             <a:picLocks noChangeAspect="1"/>
           </p:cNvPicPr>
@@ -4698,8 +5081,8 @@
         </p:blipFill>
         <p:spPr>
           <a:xfrm>
-            <a:off x="1463040" y="1691640"/>
-            <a:ext cx="9235440" cy="5777062"/>
+            <a:off x="1371600" y="1645920"/>
+            <a:ext cx="9418320" cy="5891255"/>
           </a:xfrm>
           <a:prstGeom prst="rect">
             <a:avLst/>
@@ -4726,14 +5109,170 @@
       <p:grpSpPr/>
       <p:sp>
         <p:nvSpPr>
-          <p:cNvPr id="2" name="TextBox 1"/>
+          <p:cNvPr id="2" name="Rectangle 1"/>
+          <p:cNvSpPr/>
+          <p:nvPr/>
+        </p:nvSpPr>
+        <p:spPr>
+          <a:xfrm>
+            <a:off x="0" y="0"/>
+            <a:ext cx="12191695" cy="6858000"/>
+          </a:xfrm>
+          <a:prstGeom prst="rect">
+            <a:avLst/>
+          </a:prstGeom>
+          <a:solidFill>
+            <a:srgbClr val="0B1120"/>
+          </a:solidFill>
+          <a:ln>
+            <a:noFill/>
+          </a:ln>
+        </p:spPr>
+        <p:style>
+          <a:lnRef idx="1">
+            <a:schemeClr val="accent1"/>
+          </a:lnRef>
+          <a:fillRef idx="3">
+            <a:schemeClr val="accent1"/>
+          </a:fillRef>
+          <a:effectRef idx="2">
+            <a:schemeClr val="accent1"/>
+          </a:effectRef>
+          <a:fontRef idx="minor">
+            <a:schemeClr val="lt1"/>
+          </a:fontRef>
+        </p:style>
+        <p:txBody>
+          <a:bodyPr rtlCol="0" anchor="ctr"/>
+          <a:lstStyle/>
+          <a:p>
+            <a:pPr algn="ctr"/>
+          </a:p>
+        </p:txBody>
+      </p:sp>
+      <p:sp>
+        <p:nvSpPr>
+          <p:cNvPr id="3" name="TextBox 2"/>
           <p:cNvSpPr txBox="1"/>
           <p:nvPr/>
         </p:nvSpPr>
         <p:spPr>
           <a:xfrm>
-            <a:off x="822960" y="502920"/>
-            <a:ext cx="10515600" cy="365760"/>
+            <a:off x="731520" y="365760"/>
+            <a:ext cx="10698480" cy="365760"/>
+          </a:xfrm>
+          <a:prstGeom prst="rect">
+            <a:avLst/>
+          </a:prstGeom>
+          <a:noFill/>
+        </p:spPr>
+        <p:txBody>
+          <a:bodyPr wrap="square">
+            <a:spAutoFit/>
+          </a:bodyPr>
+          <a:lstStyle/>
+          <a:p>
+            <a:r>
+              <a:rPr sz="1100" b="1">
+                <a:solidFill>
+                  <a:srgbClr val="38BDF8"/>
+                </a:solidFill>
+                <a:latin typeface="Segoe UI"/>
+              </a:rPr>
+              <a:t>OPEN SOURCE TECH STACK &amp; COMPLIANCE</a:t>
+            </a:r>
+          </a:p>
+        </p:txBody>
+      </p:sp>
+      <p:sp>
+        <p:nvSpPr>
+          <p:cNvPr id="4" name="TextBox 3"/>
+          <p:cNvSpPr txBox="1"/>
+          <p:nvPr/>
+        </p:nvSpPr>
+        <p:spPr>
+          <a:xfrm>
+            <a:off x="731520" y="685800"/>
+            <a:ext cx="10698480" cy="640080"/>
+          </a:xfrm>
+          <a:prstGeom prst="rect">
+            <a:avLst/>
+          </a:prstGeom>
+          <a:noFill/>
+        </p:spPr>
+        <p:txBody>
+          <a:bodyPr wrap="square">
+            <a:spAutoFit/>
+          </a:bodyPr>
+          <a:lstStyle/>
+          <a:p>
+            <a:r>
+              <a:rPr sz="2600" b="1">
+                <a:solidFill>
+                  <a:srgbClr val="F8FAFC"/>
+                </a:solidFill>
+                <a:latin typeface="Segoe UI"/>
+              </a:rPr>
+              <a:t>Zero-Dependency Core, Fast Blake2b Hashing, DPDP Act 2023 Compliant</a:t>
+            </a:r>
+          </a:p>
+        </p:txBody>
+      </p:sp>
+      <p:sp>
+        <p:nvSpPr>
+          <p:cNvPr id="5" name="Rounded Rectangle 4"/>
+          <p:cNvSpPr/>
+          <p:nvPr/>
+        </p:nvSpPr>
+        <p:spPr>
+          <a:xfrm>
+            <a:off x="731520" y="1645920"/>
+            <a:ext cx="5120640" cy="4572000"/>
+          </a:xfrm>
+          <a:prstGeom prst="roundRect">
+            <a:avLst/>
+          </a:prstGeom>
+          <a:solidFill>
+            <a:srgbClr val="161E2E"/>
+          </a:solidFill>
+          <a:ln w="12700">
+            <a:solidFill>
+              <a:srgbClr val="2D3B55"/>
+            </a:solidFill>
+          </a:ln>
+        </p:spPr>
+        <p:style>
+          <a:lnRef idx="1">
+            <a:schemeClr val="accent1"/>
+          </a:lnRef>
+          <a:fillRef idx="3">
+            <a:schemeClr val="accent1"/>
+          </a:fillRef>
+          <a:effectRef idx="2">
+            <a:schemeClr val="accent1"/>
+          </a:effectRef>
+          <a:fontRef idx="minor">
+            <a:schemeClr val="lt1"/>
+          </a:fontRef>
+        </p:style>
+        <p:txBody>
+          <a:bodyPr rtlCol="0" anchor="ctr"/>
+          <a:lstStyle/>
+          <a:p>
+            <a:pPr algn="ctr"/>
+          </a:p>
+        </p:txBody>
+      </p:sp>
+      <p:sp>
+        <p:nvSpPr>
+          <p:cNvPr id="6" name="TextBox 5"/>
+          <p:cNvSpPr txBox="1"/>
+          <p:nvPr/>
+        </p:nvSpPr>
+        <p:spPr>
+          <a:xfrm>
+            <a:off x="914400" y="1783080"/>
+            <a:ext cx="4754879" cy="4297680"/>
           </a:xfrm>
           <a:prstGeom prst="rect">
             <a:avLst/>
@@ -4752,27 +5291,172 @@
               </a:spcAft>
             </a:pPr>
             <a:r>
-              <a:rPr sz="1200" b="1" i="0">
-                <a:solidFill>
-                  <a:srgbClr val="DC2626"/>
-                </a:solidFill>
-                <a:latin typeface="Segoe UI"/>
-              </a:rPr>
-              <a:t>ARCHITECTURE</a:t>
-            </a:r>
-          </a:p>
-        </p:txBody>
-      </p:sp>
-      <p:sp>
-        <p:nvSpPr>
-          <p:cNvPr id="3" name="TextBox 2"/>
+              <a:rPr sz="1700" b="1">
+                <a:solidFill>
+                  <a:srgbClr val="38BDF8"/>
+                </a:solidFill>
+                <a:latin typeface="Segoe UI"/>
+              </a:rPr>
+              <a:t>Tech Stack &amp; Optimization</a:t>
+            </a:r>
+          </a:p>
+          <a:p>
+            <a:pPr>
+              <a:spcAft>
+                <a:spcPts val="600"/>
+              </a:spcAft>
+            </a:pPr>
+            <a:r>
+              <a:rPr sz="1300" b="1">
+                <a:solidFill>
+                  <a:srgbClr val="34D399"/>
+                </a:solidFill>
+                <a:latin typeface="Segoe UI"/>
+              </a:rPr>
+              <a:t>Zero Dependency Core: </a:t>
+            </a:r>
+            <a:r>
+              <a:rPr sz="1300">
+                <a:solidFill>
+                  <a:srgbClr val="F8FAFC"/>
+                </a:solidFill>
+                <a:latin typeface="Segoe UI"/>
+              </a:rPr>
+              <a:t>Standard library os, hashlib, time. Core installs and runs anywhere.</a:t>
+            </a:r>
+          </a:p>
+          <a:p>
+            <a:pPr>
+              <a:spcAft>
+                <a:spcPts val="600"/>
+              </a:spcAft>
+            </a:pPr>
+            <a:r>
+              <a:rPr sz="1300" b="1">
+                <a:solidFill>
+                  <a:srgbClr val="38BDF8"/>
+                </a:solidFill>
+                <a:latin typeface="Segoe UI"/>
+              </a:rPr>
+              <a:t>Tiered Hashing: </a:t>
+            </a:r>
+            <a:r>
+              <a:rPr sz="1300">
+                <a:solidFill>
+                  <a:srgbClr val="F8FAFC"/>
+                </a:solidFill>
+                <a:latin typeface="Segoe UI"/>
+              </a:rPr>
+              <a:t>Size collision check -&gt; 64 KB header hash -&gt; Full Blake2b only when needed.</a:t>
+            </a:r>
+          </a:p>
+          <a:p>
+            <a:pPr>
+              <a:spcAft>
+                <a:spcPts val="600"/>
+              </a:spcAft>
+            </a:pPr>
+            <a:r>
+              <a:rPr sz="1300" b="1">
+                <a:solidFill>
+                  <a:srgbClr val="F8FAFC"/>
+                </a:solidFill>
+                <a:latin typeface="Segoe UI"/>
+              </a:rPr>
+              <a:t>Terminal TUI: </a:t>
+            </a:r>
+            <a:r>
+              <a:rPr sz="1300">
+                <a:solidFill>
+                  <a:srgbClr val="F8FAFC"/>
+                </a:solidFill>
+                <a:latin typeface="Segoe UI"/>
+              </a:rPr>
+              <a:t>Textual (MIT) — interactive category keys [d]isposable, [u]duplicates, [t]racked.</a:t>
+            </a:r>
+          </a:p>
+          <a:p>
+            <a:pPr>
+              <a:spcAft>
+                <a:spcPts val="600"/>
+              </a:spcAft>
+            </a:pPr>
+            <a:r>
+              <a:rPr sz="1300" b="1">
+                <a:solidFill>
+                  <a:srgbClr val="94A3B8"/>
+                </a:solidFill>
+                <a:latin typeface="Segoe UI"/>
+              </a:rPr>
+              <a:t>Treemap Viz: </a:t>
+            </a:r>
+            <a:r>
+              <a:rPr sz="1300">
+                <a:solidFill>
+                  <a:srgbClr val="F8FAFC"/>
+                </a:solidFill>
+                <a:latin typeface="Segoe UI"/>
+              </a:rPr>
+              <a:t>Plotly (MIT) and Pandas (BSD-3) recoverability treemap.</a:t>
+            </a:r>
+          </a:p>
+        </p:txBody>
+      </p:sp>
+      <p:sp>
+        <p:nvSpPr>
+          <p:cNvPr id="7" name="Rounded Rectangle 6"/>
+          <p:cNvSpPr/>
+          <p:nvPr/>
+        </p:nvSpPr>
+        <p:spPr>
+          <a:xfrm>
+            <a:off x="6217920" y="1645920"/>
+            <a:ext cx="5120640" cy="4572000"/>
+          </a:xfrm>
+          <a:prstGeom prst="roundRect">
+            <a:avLst/>
+          </a:prstGeom>
+          <a:solidFill>
+            <a:srgbClr val="161E2E"/>
+          </a:solidFill>
+          <a:ln w="12700">
+            <a:solidFill>
+              <a:srgbClr val="2D3B55"/>
+            </a:solidFill>
+          </a:ln>
+        </p:spPr>
+        <p:style>
+          <a:lnRef idx="1">
+            <a:schemeClr val="accent1"/>
+          </a:lnRef>
+          <a:fillRef idx="3">
+            <a:schemeClr val="accent1"/>
+          </a:fillRef>
+          <a:effectRef idx="2">
+            <a:schemeClr val="accent1"/>
+          </a:effectRef>
+          <a:fontRef idx="minor">
+            <a:schemeClr val="lt1"/>
+          </a:fontRef>
+        </p:style>
+        <p:txBody>
+          <a:bodyPr rtlCol="0" anchor="ctr"/>
+          <a:lstStyle/>
+          <a:p>
+            <a:pPr algn="ctr"/>
+          </a:p>
+        </p:txBody>
+      </p:sp>
+      <p:sp>
+        <p:nvSpPr>
+          <p:cNvPr id="8" name="TextBox 7"/>
           <p:cNvSpPr txBox="1"/>
           <p:nvPr/>
         </p:nvSpPr>
         <p:spPr>
           <a:xfrm>
-            <a:off x="822960" y="914400"/>
-            <a:ext cx="10515600" cy="822960"/>
+            <a:off x="6400800" y="1783080"/>
+            <a:ext cx="4754879" cy="4297680"/>
           </a:xfrm>
           <a:prstGeom prst="rect">
             <a:avLst/>
@@ -4791,284 +5475,113 @@
               </a:spcAft>
             </a:pPr>
             <a:r>
-              <a:rPr sz="3200" b="1" i="0">
-                <a:solidFill>
-                  <a:srgbClr val="0F172A"/>
-                </a:solidFill>
-                <a:latin typeface="Segoe UI"/>
-              </a:rPr>
-              <a:t/>
-            </a:r>
-          </a:p>
-        </p:txBody>
-      </p:sp>
-      <p:pic>
-        <p:nvPicPr>
-          <p:cNvPr id="4" name="Picture 3" descr="arch_s.jpg"/>
-          <p:cNvPicPr>
-            <a:picLocks noChangeAspect="1"/>
-          </p:cNvPicPr>
-          <p:nvPr/>
-        </p:nvPicPr>
-        <p:blipFill>
-          <a:blip r:embed="rId2"/>
-          <a:stretch>
-            <a:fillRect/>
-          </a:stretch>
-        </p:blipFill>
-        <p:spPr>
-          <a:xfrm>
-            <a:off x="640080" y="1737360"/>
-            <a:ext cx="10881360" cy="5451561"/>
-          </a:xfrm>
-          <a:prstGeom prst="rect">
-            <a:avLst/>
-          </a:prstGeom>
-        </p:spPr>
-      </p:pic>
-    </p:spTree>
-  </p:cSld>
-  <p:clrMapOvr>
-    <a:masterClrMapping/>
-  </p:clrMapOvr>
-</p:sld>
-</file>
-
-<file path=ppt/slides/slide8.xml><?xml version="1.0" encoding="utf-8"?>
-<p:sld xmlns:a="http://schemas.openxmlformats.org/drawingml/2006/main" xmlns:p="http://schemas.openxmlformats.org/presentationml/2006/main" xmlns:r="http://schemas.openxmlformats.org/officeDocument/2006/relationships">
-  <p:cSld>
-    <p:spTree>
-      <p:nvGrpSpPr>
-        <p:cNvPr id="1" name=""/>
-        <p:cNvGrpSpPr/>
-        <p:nvPr/>
-      </p:nvGrpSpPr>
-      <p:grpSpPr/>
-      <p:sp>
-        <p:nvSpPr>
-          <p:cNvPr id="2" name="TextBox 1"/>
-          <p:cNvSpPr txBox="1"/>
-          <p:nvPr/>
-        </p:nvSpPr>
-        <p:spPr>
-          <a:xfrm>
-            <a:off x="822960" y="502920"/>
-            <a:ext cx="10515600" cy="365760"/>
-          </a:xfrm>
-          <a:prstGeom prst="rect">
-            <a:avLst/>
-          </a:prstGeom>
-          <a:noFill/>
-        </p:spPr>
-        <p:txBody>
-          <a:bodyPr wrap="square">
-            <a:spAutoFit/>
-          </a:bodyPr>
-          <a:lstStyle/>
+              <a:rPr sz="1700" b="1">
+                <a:solidFill>
+                  <a:srgbClr val="34D399"/>
+                </a:solidFill>
+                <a:latin typeface="Segoe UI"/>
+              </a:rPr>
+              <a:t>Privacy &amp; Data Protection</a:t>
+            </a:r>
+          </a:p>
           <a:p>
             <a:pPr>
               <a:spcAft>
-                <a:spcPts val="800"/>
+                <a:spcPts val="600"/>
               </a:spcAft>
             </a:pPr>
             <a:r>
-              <a:rPr sz="1200" b="1" i="0">
-                <a:solidFill>
-                  <a:srgbClr val="DC2626"/>
-                </a:solidFill>
-                <a:latin typeface="Segoe UI"/>
-              </a:rPr>
-              <a:t>TECHNICAL STACK &amp; TRANSPARENCY</a:t>
-            </a:r>
-          </a:p>
-        </p:txBody>
-      </p:sp>
-      <p:sp>
-        <p:nvSpPr>
-          <p:cNvPr id="3" name="TextBox 2"/>
-          <p:cNvSpPr txBox="1"/>
-          <p:nvPr/>
-        </p:nvSpPr>
-        <p:spPr>
-          <a:xfrm>
-            <a:off x="822960" y="914400"/>
-            <a:ext cx="10515600" cy="822960"/>
-          </a:xfrm>
-          <a:prstGeom prst="rect">
-            <a:avLst/>
-          </a:prstGeom>
-          <a:noFill/>
-        </p:spPr>
-        <p:txBody>
-          <a:bodyPr wrap="square">
-            <a:spAutoFit/>
-          </a:bodyPr>
-          <a:lstStyle/>
+              <a:rPr sz="1300" b="1">
+                <a:solidFill>
+                  <a:srgbClr val="34D399"/>
+                </a:solidFill>
+                <a:latin typeface="Segoe UI"/>
+              </a:rPr>
+              <a:t>DPDP Act 2023: </a:t>
+            </a:r>
+            <a:r>
+              <a:rPr sz="1300">
+                <a:solidFill>
+                  <a:srgbClr val="F8FAFC"/>
+                </a:solidFill>
+                <a:latin typeface="Segoe UI"/>
+              </a:rPr>
+              <a:t>Zero file contents transmitted or retained. Only metadata is processed locally.</a:t>
+            </a:r>
+          </a:p>
           <a:p>
             <a:pPr>
               <a:spcAft>
-                <a:spcPts val="800"/>
+                <a:spcPts val="600"/>
               </a:spcAft>
             </a:pPr>
             <a:r>
-              <a:rPr sz="3200" b="1" i="0">
-                <a:solidFill>
-                  <a:srgbClr val="0F172A"/>
-                </a:solidFill>
-                <a:latin typeface="Segoe UI"/>
-              </a:rPr>
-              <a:t>What we wrote and what we borrowed</a:t>
-            </a:r>
-          </a:p>
-        </p:txBody>
-      </p:sp>
-      <p:sp>
-        <p:nvSpPr>
-          <p:cNvPr id="4" name="TextBox 3"/>
-          <p:cNvSpPr txBox="1"/>
-          <p:nvPr/>
-        </p:nvSpPr>
-        <p:spPr>
-          <a:xfrm>
-            <a:off x="822960" y="1920240"/>
-            <a:ext cx="10515600" cy="3291840"/>
-          </a:xfrm>
-          <a:prstGeom prst="rect">
-            <a:avLst/>
-          </a:prstGeom>
-          <a:noFill/>
-        </p:spPr>
-        <p:txBody>
-          <a:bodyPr wrap="square">
-            <a:spAutoFit/>
-          </a:bodyPr>
-          <a:lstStyle/>
+              <a:rPr sz="1300" b="1">
+                <a:solidFill>
+                  <a:srgbClr val="34D399"/>
+                </a:solidFill>
+                <a:latin typeface="Segoe UI"/>
+              </a:rPr>
+              <a:t>Git Tracked Precision: </a:t>
+            </a:r>
+            <a:r>
+              <a:rPr sz="1300">
+                <a:solidFill>
+                  <a:srgbClr val="F8FAFC"/>
+                </a:solidFill>
+                <a:latin typeface="Segoe UI"/>
+              </a:rPr>
+              <a:t>Queries git index directly to ensure untracked workspace files remain protected.</a:t>
+            </a:r>
+          </a:p>
           <a:p>
             <a:pPr>
               <a:spcAft>
-                <a:spcPts val="900"/>
+                <a:spcPts val="600"/>
               </a:spcAft>
             </a:pPr>
             <a:r>
-              <a:rPr sz="1800" b="0" i="0">
-                <a:solidFill>
-                  <a:srgbClr val="0F172A"/>
-                </a:solidFill>
-                <a:latin typeface="Segoe UI"/>
-              </a:rPr>
-              <a:t>Built by us: fast metadata scanner, tiered content hasher, regret classifier, and forecaster.</a:t>
+              <a:rPr sz="1300" b="1">
+                <a:solidFill>
+                  <a:srgbClr val="38BDF8"/>
+                </a:solidFill>
+                <a:latin typeface="Segoe UI"/>
+              </a:rPr>
+              <a:t>Hardlink Awareness: </a:t>
+            </a:r>
+            <a:r>
+              <a:rPr sz="1300">
+                <a:solidFill>
+                  <a:srgbClr val="F8FAFC"/>
+                </a:solidFill>
+                <a:latin typeface="Segoe UI"/>
+              </a:rPr>
+              <a:t>Hardlinks sharing identical inodes are not double-counted as duplicates.</a:t>
             </a:r>
           </a:p>
           <a:p>
             <a:pPr>
               <a:spcAft>
-                <a:spcPts val="900"/>
+                <a:spcPts val="600"/>
               </a:spcAft>
             </a:pPr>
             <a:r>
-              <a:rPr sz="1800" b="0" i="0">
-                <a:solidFill>
-                  <a:srgbClr val="0F172A"/>
-                </a:solidFill>
-                <a:latin typeface="Segoe UI"/>
-              </a:rPr>
-              <a:t/>
-            </a:r>
-          </a:p>
-          <a:p>
-            <a:pPr>
-              <a:spcAft>
-                <a:spcPts val="900"/>
-              </a:spcAft>
-            </a:pPr>
-            <a:r>
-              <a:rPr sz="1800" b="0" i="0">
-                <a:solidFill>
-                  <a:srgbClr val="0F172A"/>
-                </a:solidFill>
-                <a:latin typeface="Segoe UI"/>
-              </a:rPr>
-              <a:t>Libraries: Textual (MIT) for TUI • Plotly &amp; Pandas for interactive treemap •</a:t>
-            </a:r>
-          </a:p>
-          <a:p>
-            <a:pPr>
-              <a:spcAft>
-                <a:spcPts val="900"/>
-              </a:spcAft>
-            </a:pPr>
-            <a:r>
-              <a:rPr sz="1800" b="0" i="0">
-                <a:solidFill>
-                  <a:srgbClr val="0F172A"/>
-                </a:solidFill>
-                <a:latin typeface="Segoe UI"/>
-              </a:rPr>
-              <a:t>Anthropic API (MIT) for natural-language narration. Core runs with zero 3rd-party deps.</a:t>
-            </a:r>
-          </a:p>
-          <a:p>
-            <a:pPr>
-              <a:spcAft>
-                <a:spcPts val="900"/>
-              </a:spcAft>
-            </a:pPr>
-            <a:r>
-              <a:rPr sz="1800" b="0" i="0">
-                <a:solidFill>
-                  <a:srgbClr val="0F172A"/>
-                </a:solidFill>
-                <a:latin typeface="Segoe UI"/>
-              </a:rPr>
-              <a:t/>
-            </a:r>
-          </a:p>
-          <a:p>
-            <a:pPr>
-              <a:spcAft>
-                <a:spcPts val="900"/>
-              </a:spcAft>
-            </a:pPr>
-            <a:r>
-              <a:rPr sz="1800" b="0" i="0">
-                <a:solidFill>
-                  <a:srgbClr val="0F172A"/>
-                </a:solidFill>
-                <a:latin typeface="Segoe UI"/>
-              </a:rPr>
-              <a:t>Real refinement: initial version treated all files in a git repo as safe. Git cannot</a:t>
-            </a:r>
-          </a:p>
-          <a:p>
-            <a:pPr>
-              <a:spcAft>
-                <a:spcPts val="900"/>
-              </a:spcAft>
-            </a:pPr>
-            <a:r>
-              <a:rPr sz="1800" b="0" i="0">
-                <a:solidFill>
-                  <a:srgbClr val="0F172A"/>
-                </a:solidFill>
-                <a:latin typeface="Segoe UI"/>
-              </a:rPr>
-              <a:t>restore untracked files, so we now query git index status directly to strictly protect</a:t>
-            </a:r>
-          </a:p>
-          <a:p>
-            <a:pPr>
-              <a:spcAft>
-                <a:spcPts val="900"/>
-              </a:spcAft>
-            </a:pPr>
-            <a:r>
-              <a:rPr sz="1800" b="0" i="0">
-                <a:solidFill>
-                  <a:srgbClr val="0F172A"/>
-                </a:solidFill>
-                <a:latin typeface="Segoe UI"/>
-              </a:rPr>
-              <a:t>untracked files.</a:t>
+              <a:rPr sz="1300" b="1">
+                <a:solidFill>
+                  <a:srgbClr val="34D399"/>
+                </a:solidFill>
+                <a:latin typeface="Segoe UI"/>
+              </a:rPr>
+              <a:t>Indigenous Utility: </a:t>
+            </a:r>
+            <a:r>
+              <a:rPr sz="1300">
+                <a:solidFill>
+                  <a:srgbClr val="F8FAFC"/>
+                </a:solidFill>
+                <a:latin typeface="Segoe UI"/>
+              </a:rPr>
+              <a:t>Lightweight, sovereign Linux storage optimizer for Indian enterprise &amp; desktops.</a:t>
             </a:r>
           </a:p>
         </p:txBody>

--- a/docs/SANCHAY.pptx
+++ b/docs/SANCHAY.pptx
@@ -3109,7 +3109,7 @@
             <a:avLst/>
           </a:prstGeom>
           <a:solidFill>
-            <a:srgbClr val="0B1120"/>
+            <a:srgbClr val="0A0F1D"/>
           </a:solidFill>
           <a:ln>
             <a:noFill/>
@@ -3139,14 +3139,57 @@
       </p:sp>
       <p:sp>
         <p:nvSpPr>
-          <p:cNvPr id="3" name="TextBox 2"/>
+          <p:cNvPr id="3" name="Rectangle 2"/>
+          <p:cNvSpPr/>
+          <p:nvPr/>
+        </p:nvSpPr>
+        <p:spPr>
+          <a:xfrm>
+            <a:off x="0" y="0"/>
+            <a:ext cx="12191695" cy="54864"/>
+          </a:xfrm>
+          <a:prstGeom prst="rect">
+            <a:avLst/>
+          </a:prstGeom>
+          <a:solidFill>
+            <a:srgbClr val="38BDF8"/>
+          </a:solidFill>
+          <a:ln>
+            <a:noFill/>
+          </a:ln>
+        </p:spPr>
+        <p:style>
+          <a:lnRef idx="1">
+            <a:schemeClr val="accent1"/>
+          </a:lnRef>
+          <a:fillRef idx="3">
+            <a:schemeClr val="accent1"/>
+          </a:fillRef>
+          <a:effectRef idx="2">
+            <a:schemeClr val="accent1"/>
+          </a:effectRef>
+          <a:fontRef idx="minor">
+            <a:schemeClr val="lt1"/>
+          </a:fontRef>
+        </p:style>
+        <p:txBody>
+          <a:bodyPr rtlCol="0" anchor="ctr"/>
+          <a:lstStyle/>
+          <a:p>
+            <a:pPr algn="ctr"/>
+          </a:p>
+        </p:txBody>
+      </p:sp>
+      <p:sp>
+        <p:nvSpPr>
+          <p:cNvPr id="4" name="TextBox 3"/>
           <p:cNvSpPr txBox="1"/>
           <p:nvPr/>
         </p:nvSpPr>
         <p:spPr>
           <a:xfrm>
-            <a:off x="914400" y="1645920"/>
-            <a:ext cx="10332720" cy="457200"/>
+            <a:off x="914400" y="1371600"/>
+            <a:ext cx="10332720" cy="365760"/>
           </a:xfrm>
           <a:prstGeom prst="rect">
             <a:avLst/>
@@ -3173,14 +3216,14 @@
       </p:sp>
       <p:sp>
         <p:nvSpPr>
-          <p:cNvPr id="4" name="TextBox 3"/>
+          <p:cNvPr id="5" name="TextBox 4"/>
           <p:cNvSpPr txBox="1"/>
           <p:nvPr/>
         </p:nvSpPr>
         <p:spPr>
           <a:xfrm>
-            <a:off x="914400" y="2103120"/>
-            <a:ext cx="10332720" cy="1371600"/>
+            <a:off x="914400" y="1828800"/>
+            <a:ext cx="10332720" cy="1280160"/>
           </a:xfrm>
           <a:prstGeom prst="rect">
             <a:avLst/>
@@ -3194,7 +3237,7 @@
           <a:lstStyle/>
           <a:p>
             <a:r>
-              <a:rPr sz="5400" b="1">
+              <a:rPr sz="5600" b="1">
                 <a:solidFill>
                   <a:srgbClr val="F8FAFC"/>
                 </a:solidFill>
@@ -3205,7 +3248,7 @@
           </a:p>
           <a:p>
             <a:r>
-              <a:rPr sz="2200">
+              <a:rPr sz="2200" b="1">
                 <a:solidFill>
                   <a:srgbClr val="34D399"/>
                 </a:solidFill>
@@ -3218,14 +3261,14 @@
       </p:sp>
       <p:sp>
         <p:nvSpPr>
-          <p:cNvPr id="5" name="TextBox 4"/>
+          <p:cNvPr id="6" name="TextBox 5"/>
           <p:cNvSpPr txBox="1"/>
           <p:nvPr/>
         </p:nvSpPr>
         <p:spPr>
           <a:xfrm>
-            <a:off x="914400" y="3931920"/>
-            <a:ext cx="10332720" cy="1097280"/>
+            <a:off x="914400" y="3657600"/>
+            <a:ext cx="10332720" cy="914400"/>
           </a:xfrm>
           <a:prstGeom prst="rect">
             <a:avLst/>
@@ -3245,21 +3288,66 @@
                 </a:solidFill>
                 <a:latin typeface="Segoe UI"/>
               </a:rPr>
-              <a:t>Safe automatic disk cleanup that ranks files by recoverability, not just raw byte count.</a:t>
-            </a:r>
-          </a:p>
-        </p:txBody>
-      </p:sp>
-      <p:sp>
-        <p:nvSpPr>
-          <p:cNvPr id="6" name="TextBox 5"/>
+              <a:t>Safe automatic disk cleanup that ranks files by recoverability, not just raw byte size.</a:t>
+            </a:r>
+          </a:p>
+        </p:txBody>
+      </p:sp>
+      <p:sp>
+        <p:nvSpPr>
+          <p:cNvPr id="7" name="Rounded Rectangle 6"/>
+          <p:cNvSpPr/>
+          <p:nvPr/>
+        </p:nvSpPr>
+        <p:spPr>
+          <a:xfrm>
+            <a:off x="914400" y="5029200"/>
+            <a:ext cx="10360152" cy="1097280"/>
+          </a:xfrm>
+          <a:prstGeom prst="roundRect">
+            <a:avLst/>
+          </a:prstGeom>
+          <a:solidFill>
+            <a:srgbClr val="131B2C"/>
+          </a:solidFill>
+          <a:ln w="12700">
+            <a:solidFill>
+              <a:srgbClr val="26334D"/>
+            </a:solidFill>
+          </a:ln>
+        </p:spPr>
+        <p:style>
+          <a:lnRef idx="1">
+            <a:schemeClr val="accent1"/>
+          </a:lnRef>
+          <a:fillRef idx="3">
+            <a:schemeClr val="accent1"/>
+          </a:fillRef>
+          <a:effectRef idx="2">
+            <a:schemeClr val="accent1"/>
+          </a:effectRef>
+          <a:fontRef idx="minor">
+            <a:schemeClr val="lt1"/>
+          </a:fontRef>
+        </p:style>
+        <p:txBody>
+          <a:bodyPr rtlCol="0" anchor="ctr"/>
+          <a:lstStyle/>
+          <a:p>
+            <a:pPr algn="ctr"/>
+          </a:p>
+        </p:txBody>
+      </p:sp>
+      <p:sp>
+        <p:nvSpPr>
+          <p:cNvPr id="8" name="TextBox 7"/>
           <p:cNvSpPr txBox="1"/>
           <p:nvPr/>
         </p:nvSpPr>
         <p:spPr>
           <a:xfrm>
-            <a:off x="914400" y="5486400"/>
-            <a:ext cx="10332720" cy="731520"/>
+            <a:off x="1097280" y="5166360"/>
+            <a:ext cx="9966960" cy="822960"/>
           </a:xfrm>
           <a:prstGeom prst="rect">
             <a:avLst/>
@@ -3273,13 +3361,24 @@
           <a:lstStyle/>
           <a:p>
             <a:r>
-              <a:rPr sz="1300">
+              <a:rPr sz="1300" b="1">
+                <a:solidFill>
+                  <a:srgbClr val="38BDF8"/>
+                </a:solidFill>
+                <a:latin typeface="Segoe UI"/>
+              </a:rPr>
+              <a:t>Problem Statement 2: AI-Powered Intelligent Storage Optimizer for Linux OS  |  Inbuilt Regret Objective Model</a:t>
+            </a:r>
+          </a:p>
+          <a:p>
+            <a:r>
+              <a:rPr sz="1200">
                 <a:solidFill>
                   <a:srgbClr val="94A3B8"/>
                 </a:solidFill>
                 <a:latin typeface="Segoe UI"/>
               </a:rPr>
-              <a:t>Team: Shaik Abdul Basith, Shaik Awaiz, Shaik Abdul Muqeeth  |  Repo: github.com/basithladdu/sanchay</a:t>
+              <a:t>Team: Shaik Abdul Basith, Shaik Awaiz, Shaik Abdul Muqeeth  •  GitHub: github.com/basithladdu/sanchay</a:t>
             </a:r>
           </a:p>
         </p:txBody>
@@ -3317,7 +3416,7 @@
             <a:avLst/>
           </a:prstGeom>
           <a:solidFill>
-            <a:srgbClr val="0B1120"/>
+            <a:srgbClr val="0A0F1D"/>
           </a:solidFill>
           <a:ln>
             <a:noFill/>
@@ -3347,104 +3446,23 @@
       </p:sp>
       <p:sp>
         <p:nvSpPr>
-          <p:cNvPr id="3" name="TextBox 2"/>
-          <p:cNvSpPr txBox="1"/>
+          <p:cNvPr id="3" name="Rectangle 2"/>
+          <p:cNvSpPr/>
           <p:nvPr/>
         </p:nvSpPr>
         <p:spPr>
           <a:xfrm>
-            <a:off x="731520" y="365760"/>
-            <a:ext cx="10698480" cy="365760"/>
+            <a:off x="0" y="0"/>
+            <a:ext cx="12191695" cy="54864"/>
           </a:xfrm>
           <a:prstGeom prst="rect">
             <a:avLst/>
           </a:prstGeom>
-          <a:noFill/>
-        </p:spPr>
-        <p:txBody>
-          <a:bodyPr wrap="square">
-            <a:spAutoFit/>
-          </a:bodyPr>
-          <a:lstStyle/>
-          <a:p>
-            <a:r>
-              <a:rPr sz="1100" b="1">
-                <a:solidFill>
-                  <a:srgbClr val="38BDF8"/>
-                </a:solidFill>
-                <a:latin typeface="Segoe UI"/>
-              </a:rPr>
-              <a:t>THE PROBLEM</a:t>
-            </a:r>
-          </a:p>
-        </p:txBody>
-      </p:sp>
-      <p:sp>
-        <p:nvSpPr>
-          <p:cNvPr id="4" name="TextBox 3"/>
-          <p:cNvSpPr txBox="1"/>
-          <p:nvPr/>
-        </p:nvSpPr>
-        <p:spPr>
-          <a:xfrm>
-            <a:off x="731520" y="685800"/>
-            <a:ext cx="10698480" cy="640080"/>
-          </a:xfrm>
-          <a:prstGeom prst="rect">
-            <a:avLst/>
-          </a:prstGeom>
-          <a:noFill/>
-        </p:spPr>
-        <p:txBody>
-          <a:bodyPr wrap="square">
-            <a:spAutoFit/>
-          </a:bodyPr>
-          <a:lstStyle/>
-          <a:p>
-            <a:r>
-              <a:rPr sz="2600" b="1">
-                <a:solidFill>
-                  <a:srgbClr val="F8FAFC"/>
-                </a:solidFill>
-                <a:latin typeface="Segoe UI"/>
-              </a:rPr>
-              <a:t>Every Disk Cleaner Today Asks the Wrong Question</a:t>
-            </a:r>
-          </a:p>
-          <a:p>
-            <a:r>
-              <a:rPr sz="1300">
-                <a:solidFill>
-                  <a:srgbClr val="94A3B8"/>
-                </a:solidFill>
-                <a:latin typeface="Segoe UI"/>
-              </a:rPr>
-              <a:t>Sorting by size alone treats regenerable caches and irreplaceable work as identical</a:t>
-            </a:r>
-          </a:p>
-        </p:txBody>
-      </p:sp>
-      <p:sp>
-        <p:nvSpPr>
-          <p:cNvPr id="5" name="Rounded Rectangle 4"/>
-          <p:cNvSpPr/>
-          <p:nvPr/>
-        </p:nvSpPr>
-        <p:spPr>
-          <a:xfrm>
-            <a:off x="731520" y="1645920"/>
-            <a:ext cx="5120640" cy="4572000"/>
-          </a:xfrm>
-          <a:prstGeom prst="roundRect">
-            <a:avLst/>
-          </a:prstGeom>
           <a:solidFill>
-            <a:srgbClr val="161E2E"/>
+            <a:srgbClr val="38BDF8"/>
           </a:solidFill>
-          <a:ln w="12700">
-            <a:solidFill>
-              <a:srgbClr val="2D3B55"/>
-            </a:solidFill>
+          <a:ln>
+            <a:noFill/>
           </a:ln>
         </p:spPr>
         <p:style>
@@ -3471,14 +3489,14 @@
       </p:sp>
       <p:sp>
         <p:nvSpPr>
-          <p:cNvPr id="6" name="TextBox 5"/>
+          <p:cNvPr id="4" name="TextBox 3"/>
           <p:cNvSpPr txBox="1"/>
           <p:nvPr/>
         </p:nvSpPr>
         <p:spPr>
           <a:xfrm>
-            <a:off x="914400" y="1783080"/>
-            <a:ext cx="4754879" cy="4297680"/>
+            <a:off x="731520" y="365760"/>
+            <a:ext cx="10698480" cy="320040"/>
           </a:xfrm>
           <a:prstGeom prst="rect">
             <a:avLst/>
@@ -3491,19 +3509,152 @@
           </a:bodyPr>
           <a:lstStyle/>
           <a:p>
+            <a:r>
+              <a:rPr sz="1100" b="1">
+                <a:solidFill>
+                  <a:srgbClr val="38BDF8"/>
+                </a:solidFill>
+                <a:latin typeface="Segoe UI"/>
+              </a:rPr>
+              <a:t>THE PROBLEM</a:t>
+            </a:r>
+          </a:p>
+        </p:txBody>
+      </p:sp>
+      <p:sp>
+        <p:nvSpPr>
+          <p:cNvPr id="5" name="TextBox 4"/>
+          <p:cNvSpPr txBox="1"/>
+          <p:nvPr/>
+        </p:nvSpPr>
+        <p:spPr>
+          <a:xfrm>
+            <a:off x="731520" y="640080"/>
+            <a:ext cx="10698480" cy="548640"/>
+          </a:xfrm>
+          <a:prstGeom prst="rect">
+            <a:avLst/>
+          </a:prstGeom>
+          <a:noFill/>
+        </p:spPr>
+        <p:txBody>
+          <a:bodyPr wrap="square">
+            <a:spAutoFit/>
+          </a:bodyPr>
+          <a:lstStyle/>
+          <a:p>
+            <a:r>
+              <a:rPr sz="2400" b="1">
+                <a:solidFill>
+                  <a:srgbClr val="F8FAFC"/>
+                </a:solidFill>
+                <a:latin typeface="Segoe UI"/>
+              </a:rPr>
+              <a:t>Every Disk Cleaner Today Asks the Wrong Question</a:t>
+            </a:r>
+          </a:p>
+          <a:p>
+            <a:r>
+              <a:rPr sz="1200">
+                <a:solidFill>
+                  <a:srgbClr val="94A3B8"/>
+                </a:solidFill>
+                <a:latin typeface="Segoe UI"/>
+              </a:rPr>
+              <a:t>Sorting by size alone treats regenerable caches and irreplaceable work as identical.</a:t>
+            </a:r>
+          </a:p>
+        </p:txBody>
+      </p:sp>
+      <p:sp>
+        <p:nvSpPr>
+          <p:cNvPr id="6" name="Rounded Rectangle 5"/>
+          <p:cNvSpPr/>
+          <p:nvPr/>
+        </p:nvSpPr>
+        <p:spPr>
+          <a:xfrm>
+            <a:off x="731520" y="1554480"/>
+            <a:ext cx="5120640" cy="4023360"/>
+          </a:xfrm>
+          <a:prstGeom prst="roundRect">
+            <a:avLst/>
+          </a:prstGeom>
+          <a:solidFill>
+            <a:srgbClr val="131B2C"/>
+          </a:solidFill>
+          <a:ln w="12700">
+            <a:solidFill>
+              <a:srgbClr val="EF4444"/>
+            </a:solidFill>
+          </a:ln>
+        </p:spPr>
+        <p:style>
+          <a:lnRef idx="1">
+            <a:schemeClr val="accent1"/>
+          </a:lnRef>
+          <a:fillRef idx="3">
+            <a:schemeClr val="accent1"/>
+          </a:fillRef>
+          <a:effectRef idx="2">
+            <a:schemeClr val="accent1"/>
+          </a:effectRef>
+          <a:fontRef idx="minor">
+            <a:schemeClr val="lt1"/>
+          </a:fontRef>
+        </p:style>
+        <p:txBody>
+          <a:bodyPr rtlCol="0" anchor="ctr"/>
+          <a:lstStyle/>
+          <a:p>
+            <a:pPr algn="ctr"/>
+          </a:p>
+        </p:txBody>
+      </p:sp>
+      <p:sp>
+        <p:nvSpPr>
+          <p:cNvPr id="7" name="TextBox 6"/>
+          <p:cNvSpPr txBox="1"/>
+          <p:nvPr/>
+        </p:nvSpPr>
+        <p:spPr>
+          <a:xfrm>
+            <a:off x="932688" y="1719072"/>
+            <a:ext cx="4718303" cy="3694176"/>
+          </a:xfrm>
+          <a:prstGeom prst="rect">
+            <a:avLst/>
+          </a:prstGeom>
+          <a:noFill/>
+        </p:spPr>
+        <p:txBody>
+          <a:bodyPr wrap="square">
+            <a:spAutoFit/>
+          </a:bodyPr>
+          <a:lstStyle/>
+          <a:p>
             <a:pPr>
               <a:spcAft>
-                <a:spcPts val="800"/>
+                <a:spcPts val="1000"/>
               </a:spcAft>
             </a:pPr>
             <a:r>
-              <a:rPr sz="1700" b="1">
+              <a:rPr sz="1100" b="1">
                 <a:solidFill>
                   <a:srgbClr val="F87171"/>
                 </a:solidFill>
                 <a:latin typeface="Segoe UI"/>
               </a:rPr>
-              <a:t>The 2 GB Dilemma</a:t>
+              <a:t>[THE 2 GB DILEMMA] </a:t>
+            </a:r>
+            <a:r>
+              <a:rPr sz="1600" b="1">
+                <a:solidFill>
+                  <a:srgbClr val="F8FAFC"/>
+                </a:solidFill>
+                <a:latin typeface="Segoe UI"/>
+              </a:rPr>
+              <a:t>Traditional Cleanup Tools (ncdu, Baobab)</a:t>
             </a:r>
           </a:p>
           <a:p>
@@ -3513,16 +3664,16 @@
               </a:spcAft>
             </a:pPr>
             <a:r>
-              <a:rPr sz="1300" b="1">
-                <a:solidFill>
-                  <a:srgbClr val="F8FAFC"/>
-                </a:solidFill>
-                <a:latin typeface="Segoe UI"/>
-              </a:rPr>
-              <a:t>Scenario: </a:t>
-            </a:r>
-            <a:r>
-              <a:rPr sz="1300">
+              <a:rPr sz="1250" b="1">
+                <a:solidFill>
+                  <a:srgbClr val="94A3B8"/>
+                </a:solidFill>
+                <a:latin typeface="Segoe UI"/>
+              </a:rPr>
+              <a:t>The Scenario: </a:t>
+            </a:r>
+            <a:r>
+              <a:rPr sz="1250">
                 <a:solidFill>
                   <a:srgbClr val="F8FAFC"/>
                 </a:solidFill>
@@ -3538,22 +3689,22 @@
               </a:spcAft>
             </a:pPr>
             <a:r>
-              <a:rPr sz="1300" b="1">
+              <a:rPr sz="1250" b="1">
                 <a:solidFill>
                   <a:srgbClr val="F87171"/>
                 </a:solidFill>
                 <a:latin typeface="Segoe UI"/>
               </a:rPr>
-              <a:t>Traditional Tools: </a:t>
-            </a:r>
-            <a:r>
-              <a:rPr sz="1300">
+              <a:t>Traditional Ranking: </a:t>
+            </a:r>
+            <a:r>
+              <a:rPr sz="1250">
                 <a:solidFill>
                   <a:srgbClr val="F8FAFC"/>
                 </a:solidFill>
                 <a:latin typeface="Segoe UI"/>
               </a:rPr>
-              <a:t>Baobab, ncdu, QDirStat, rmlint rank both identically — '2 GB to delete'.</a:t>
+              <a:t>Baobab, QDirStat, ncdu, rmlint rank both identically — '2 GB to delete'.</a:t>
             </a:r>
           </a:p>
           <a:p>
@@ -3563,7 +3714,7 @@
               </a:spcAft>
             </a:pPr>
             <a:r>
-              <a:rPr sz="1300" b="1">
+              <a:rPr sz="1250" b="1">
                 <a:solidFill>
                   <a:srgbClr val="F87171"/>
                 </a:solidFill>
@@ -3572,13 +3723,13 @@
               <a:t>The Asymmetry: </a:t>
             </a:r>
             <a:r>
-              <a:rPr sz="1300">
+              <a:rPr sz="1250">
                 <a:solidFill>
                   <a:srgbClr val="F8FAFC"/>
                 </a:solidFill>
                 <a:latin typeface="Segoe UI"/>
               </a:rPr>
-              <a:t>One rebuilds in 30 seconds with npm install / cargo build. The other is gone forever.</a:t>
+              <a:t>One rebuilds in 30 seconds via npm install / cargo build. The other is lost forever.</a:t>
             </a:r>
           </a:p>
           <a:p>
@@ -3588,46 +3739,46 @@
               </a:spcAft>
             </a:pPr>
             <a:r>
-              <a:rPr sz="1300" b="1">
+              <a:rPr sz="1250" b="1">
                 <a:solidFill>
                   <a:srgbClr val="FBBF24"/>
                 </a:solidFill>
                 <a:latin typeface="Segoe UI"/>
               </a:rPr>
-              <a:t>User Reluctance: </a:t>
-            </a:r>
-            <a:r>
-              <a:rPr sz="1300">
+              <a:t>User Friction: </a:t>
+            </a:r>
+            <a:r>
+              <a:rPr sz="1250">
                 <a:solidFill>
                   <a:srgbClr val="F8FAFC"/>
                 </a:solidFill>
                 <a:latin typeface="Segoe UI"/>
               </a:rPr>
-              <a:t>Users avoid automatic cleanup tools because they cannot trust what will be deleted.</a:t>
-            </a:r>
-          </a:p>
-        </p:txBody>
-      </p:sp>
-      <p:sp>
-        <p:nvSpPr>
-          <p:cNvPr id="7" name="Rounded Rectangle 6"/>
+              <a:t>Users avoid automated cleanup tools because they cannot trust what will be deleted.</a:t>
+            </a:r>
+          </a:p>
+        </p:txBody>
+      </p:sp>
+      <p:sp>
+        <p:nvSpPr>
+          <p:cNvPr id="8" name="Rounded Rectangle 7"/>
           <p:cNvSpPr/>
           <p:nvPr/>
         </p:nvSpPr>
         <p:spPr>
           <a:xfrm>
-            <a:off x="6217920" y="1645920"/>
-            <a:ext cx="5120640" cy="4572000"/>
+            <a:off x="6217920" y="1554480"/>
+            <a:ext cx="5120640" cy="4023360"/>
           </a:xfrm>
           <a:prstGeom prst="roundRect">
             <a:avLst/>
           </a:prstGeom>
           <a:solidFill>
-            <a:srgbClr val="161E2E"/>
+            <a:srgbClr val="131B2C"/>
           </a:solidFill>
           <a:ln w="12700">
             <a:solidFill>
-              <a:srgbClr val="2D3B55"/>
+              <a:srgbClr val="10B981"/>
             </a:solidFill>
           </a:ln>
         </p:spPr>
@@ -3655,14 +3806,14 @@
       </p:sp>
       <p:sp>
         <p:nvSpPr>
-          <p:cNvPr id="8" name="TextBox 7"/>
+          <p:cNvPr id="9" name="TextBox 8"/>
           <p:cNvSpPr txBox="1"/>
           <p:nvPr/>
         </p:nvSpPr>
         <p:spPr>
           <a:xfrm>
-            <a:off x="6400800" y="1783080"/>
-            <a:ext cx="4754879" cy="4297680"/>
+            <a:off x="6419088" y="1719072"/>
+            <a:ext cx="4718303" cy="3694176"/>
           </a:xfrm>
           <a:prstGeom prst="rect">
             <a:avLst/>
@@ -3677,17 +3828,26 @@
           <a:p>
             <a:pPr>
               <a:spcAft>
-                <a:spcPts val="800"/>
+                <a:spcPts val="1000"/>
               </a:spcAft>
             </a:pPr>
             <a:r>
-              <a:rPr sz="1700" b="1">
+              <a:rPr sz="1100" b="1">
                 <a:solidFill>
                   <a:srgbClr val="34D399"/>
                 </a:solidFill>
                 <a:latin typeface="Segoe UI"/>
               </a:rPr>
-              <a:t>SANCHAY's Shift: Regret Modeling</a:t>
+              <a:t>[SANCHAY'S SHIFT] </a:t>
+            </a:r>
+            <a:r>
+              <a:rPr sz="1600" b="1">
+                <a:solidFill>
+                  <a:srgbClr val="F8FAFC"/>
+                </a:solidFill>
+                <a:latin typeface="Segoe UI"/>
+              </a:rPr>
+              <a:t>The Regret Modeling Paradigm</a:t>
             </a:r>
           </a:p>
           <a:p>
@@ -3697,22 +3857,22 @@
               </a:spcAft>
             </a:pPr>
             <a:r>
-              <a:rPr sz="1300" b="1">
+              <a:rPr sz="1250" b="1">
                 <a:solidFill>
                   <a:srgbClr val="34D399"/>
                 </a:solidFill>
                 <a:latin typeface="Segoe UI"/>
               </a:rPr>
-              <a:t>The Right Question: </a:t>
-            </a:r>
-            <a:r>
-              <a:rPr sz="1300">
+              <a:t>The Core Question: </a:t>
+            </a:r>
+            <a:r>
+              <a:rPr sz="1250">
                 <a:solidFill>
                   <a:srgbClr val="F8FAFC"/>
                 </a:solidFill>
                 <a:latin typeface="Segoe UI"/>
               </a:rPr>
-              <a:t>'If the system is wrong about deleting this file, what is the cost to recover it?'</a:t>
+              <a:t>'If the system is wrong about deleting this file, what does it cost to get back?'</a:t>
             </a:r>
           </a:p>
           <a:p>
@@ -3722,22 +3882,22 @@
               </a:spcAft>
             </a:pPr>
             <a:r>
-              <a:rPr sz="1300" b="1">
+              <a:rPr sz="1250" b="1">
                 <a:solidFill>
                   <a:srgbClr val="38BDF8"/>
                 </a:solidFill>
                 <a:latin typeface="Segoe UI"/>
               </a:rPr>
-              <a:t>Reproducibility Basis: </a:t>
-            </a:r>
-            <a:r>
-              <a:rPr sz="1300">
+              <a:t>Reproducibility Metric: </a:t>
+            </a:r>
+            <a:r>
+              <a:rPr sz="1250">
                 <a:solidFill>
                   <a:srgbClr val="F8FAFC"/>
                 </a:solidFill>
                 <a:latin typeface="Segoe UI"/>
               </a:rPr>
-              <a:t>Files are categorized by how they can be reconstructed.</a:t>
+              <a:t>Files are scored by their reconstruction cost, not raw disk footprint.</a:t>
             </a:r>
           </a:p>
           <a:p>
@@ -3747,7 +3907,7 @@
               </a:spcAft>
             </a:pPr>
             <a:r>
-              <a:rPr sz="1300" b="1">
+              <a:rPr sz="1250" b="1">
                 <a:solidFill>
                   <a:srgbClr val="34D399"/>
                 </a:solidFill>
@@ -3756,13 +3916,13 @@
               <a:t>Hard Guarantee: </a:t>
             </a:r>
             <a:r>
-              <a:rPr sz="1300">
+              <a:rPr sz="1250">
                 <a:solidFill>
                   <a:srgbClr val="F8FAFC"/>
                 </a:solidFill>
                 <a:latin typeface="Segoe UI"/>
               </a:rPr>
-              <a:t>Irreplaceable unique files are structurally locked and never presented as candidates.</a:t>
+              <a:t>Irreplaceable unique files are permanently excluded before any ranking occurs.</a:t>
             </a:r>
           </a:p>
           <a:p>
@@ -3772,22 +3932,101 @@
               </a:spcAft>
             </a:pPr>
             <a:r>
+              <a:rPr sz="1250" b="1">
+                <a:solidFill>
+                  <a:srgbClr val="F8FAFC"/>
+                </a:solidFill>
+                <a:latin typeface="Segoe UI"/>
+              </a:rPr>
+              <a:t>Practical Utility: </a:t>
+            </a:r>
+            <a:r>
+              <a:rPr sz="1250">
+                <a:solidFill>
+                  <a:srgbClr val="F8FAFC"/>
+                </a:solidFill>
+                <a:latin typeface="Segoe UI"/>
+              </a:rPr>
+              <a:t>A cleanup tool users can trust without manual inspection of thousands of log rows.</a:t>
+            </a:r>
+          </a:p>
+        </p:txBody>
+      </p:sp>
+      <p:sp>
+        <p:nvSpPr>
+          <p:cNvPr id="10" name="Rounded Rectangle 9"/>
+          <p:cNvSpPr/>
+          <p:nvPr/>
+        </p:nvSpPr>
+        <p:spPr>
+          <a:xfrm>
+            <a:off x="731520" y="5715000"/>
+            <a:ext cx="10607040" cy="685800"/>
+          </a:xfrm>
+          <a:prstGeom prst="roundRect">
+            <a:avLst/>
+          </a:prstGeom>
+          <a:solidFill>
+            <a:srgbClr val="131B2C"/>
+          </a:solidFill>
+          <a:ln w="12700">
+            <a:solidFill>
+              <a:srgbClr val="10B981"/>
+            </a:solidFill>
+          </a:ln>
+        </p:spPr>
+        <p:style>
+          <a:lnRef idx="1">
+            <a:schemeClr val="accent1"/>
+          </a:lnRef>
+          <a:fillRef idx="3">
+            <a:schemeClr val="accent1"/>
+          </a:fillRef>
+          <a:effectRef idx="2">
+            <a:schemeClr val="accent1"/>
+          </a:effectRef>
+          <a:fontRef idx="minor">
+            <a:schemeClr val="lt1"/>
+          </a:fontRef>
+        </p:style>
+        <p:txBody>
+          <a:bodyPr rtlCol="0" anchor="ctr"/>
+          <a:lstStyle/>
+          <a:p>
+            <a:pPr algn="ctr"/>
+          </a:p>
+        </p:txBody>
+      </p:sp>
+      <p:sp>
+        <p:nvSpPr>
+          <p:cNvPr id="11" name="TextBox 10"/>
+          <p:cNvSpPr txBox="1"/>
+          <p:nvPr/>
+        </p:nvSpPr>
+        <p:spPr>
+          <a:xfrm>
+            <a:off x="914400" y="5760720"/>
+            <a:ext cx="10241280" cy="594360"/>
+          </a:xfrm>
+          <a:prstGeom prst="rect">
+            <a:avLst/>
+          </a:prstGeom>
+          <a:noFill/>
+        </p:spPr>
+        <p:txBody>
+          <a:bodyPr wrap="none">
+            <a:spAutoFit/>
+          </a:bodyPr>
+          <a:lstStyle/>
+          <a:p>
+            <a:r>
               <a:rPr sz="1300" b="1">
                 <a:solidFill>
-                  <a:srgbClr val="F8FAFC"/>
-                </a:solidFill>
-                <a:latin typeface="Segoe UI"/>
-              </a:rPr>
-              <a:t>Practical Impact: </a:t>
-            </a:r>
-            <a:r>
-              <a:rPr sz="1300">
-                <a:solidFill>
-                  <a:srgbClr val="F8FAFC"/>
-                </a:solidFill>
-                <a:latin typeface="Segoe UI"/>
-              </a:rPr>
-              <a:t>Cleanup people can execute safely without inspecting thousands of log lines.</a:t>
+                  <a:srgbClr val="34D399"/>
+                </a:solidFill>
+                <a:latin typeface="Segoe UI"/>
+              </a:rPr>
+              <a:t>💡 SANCHAY Principle: Priority = Size × Staleness × (1 - Regret). Unique files have Regret = 1.0 (Zero Priority).</a:t>
             </a:r>
           </a:p>
         </p:txBody>
@@ -3825,7 +4064,7 @@
             <a:avLst/>
           </a:prstGeom>
           <a:solidFill>
-            <a:srgbClr val="0B1120"/>
+            <a:srgbClr val="0A0F1D"/>
           </a:solidFill>
           <a:ln>
             <a:noFill/>
@@ -3855,104 +4094,23 @@
       </p:sp>
       <p:sp>
         <p:nvSpPr>
-          <p:cNvPr id="3" name="TextBox 2"/>
-          <p:cNvSpPr txBox="1"/>
+          <p:cNvPr id="3" name="Rectangle 2"/>
+          <p:cNvSpPr/>
           <p:nvPr/>
         </p:nvSpPr>
         <p:spPr>
           <a:xfrm>
-            <a:off x="731520" y="365760"/>
-            <a:ext cx="10698480" cy="365760"/>
+            <a:off x="0" y="0"/>
+            <a:ext cx="12191695" cy="54864"/>
           </a:xfrm>
           <a:prstGeom prst="rect">
             <a:avLst/>
           </a:prstGeom>
-          <a:noFill/>
-        </p:spPr>
-        <p:txBody>
-          <a:bodyPr wrap="square">
-            <a:spAutoFit/>
-          </a:bodyPr>
-          <a:lstStyle/>
-          <a:p>
-            <a:r>
-              <a:rPr sz="1100" b="1">
-                <a:solidFill>
-                  <a:srgbClr val="38BDF8"/>
-                </a:solidFill>
-                <a:latin typeface="Segoe UI"/>
-              </a:rPr>
-              <a:t>CORE INNOVATION</a:t>
-            </a:r>
-          </a:p>
-        </p:txBody>
-      </p:sp>
-      <p:sp>
-        <p:nvSpPr>
-          <p:cNvPr id="4" name="TextBox 3"/>
-          <p:cNvSpPr txBox="1"/>
-          <p:nvPr/>
-        </p:nvSpPr>
-        <p:spPr>
-          <a:xfrm>
-            <a:off x="731520" y="685800"/>
-            <a:ext cx="10698480" cy="640080"/>
-          </a:xfrm>
-          <a:prstGeom prst="rect">
-            <a:avLst/>
-          </a:prstGeom>
-          <a:noFill/>
-        </p:spPr>
-        <p:txBody>
-          <a:bodyPr wrap="square">
-            <a:spAutoFit/>
-          </a:bodyPr>
-          <a:lstStyle/>
-          <a:p>
-            <a:r>
-              <a:rPr sz="2600" b="1">
-                <a:solidFill>
-                  <a:srgbClr val="F8FAFC"/>
-                </a:solidFill>
-                <a:latin typeface="Segoe UI"/>
-              </a:rPr>
-              <a:t>Regret Objective Function &amp; Mathematical Safety Guarantee</a:t>
-            </a:r>
-          </a:p>
-          <a:p>
-            <a:r>
-              <a:rPr sz="1300">
-                <a:solidFill>
-                  <a:srgbClr val="94A3B8"/>
-                </a:solidFill>
-                <a:latin typeface="Segoe UI"/>
-              </a:rPr>
-              <a:t>Priority = Size × Staleness × (1 - Regret)</a:t>
-            </a:r>
-          </a:p>
-        </p:txBody>
-      </p:sp>
-      <p:sp>
-        <p:nvSpPr>
-          <p:cNvPr id="5" name="Rounded Rectangle 4"/>
-          <p:cNvSpPr/>
-          <p:nvPr/>
-        </p:nvSpPr>
-        <p:spPr>
-          <a:xfrm>
-            <a:off x="731520" y="1645920"/>
-            <a:ext cx="5120640" cy="4572000"/>
-          </a:xfrm>
-          <a:prstGeom prst="roundRect">
-            <a:avLst/>
-          </a:prstGeom>
           <a:solidFill>
-            <a:srgbClr val="161E2E"/>
+            <a:srgbClr val="38BDF8"/>
           </a:solidFill>
-          <a:ln w="12700">
-            <a:solidFill>
-              <a:srgbClr val="2D3B55"/>
-            </a:solidFill>
+          <a:ln>
+            <a:noFill/>
           </a:ln>
         </p:spPr>
         <p:style>
@@ -3979,14 +4137,14 @@
       </p:sp>
       <p:sp>
         <p:nvSpPr>
-          <p:cNvPr id="6" name="TextBox 5"/>
+          <p:cNvPr id="4" name="TextBox 3"/>
           <p:cNvSpPr txBox="1"/>
           <p:nvPr/>
         </p:nvSpPr>
         <p:spPr>
           <a:xfrm>
-            <a:off x="914400" y="1783080"/>
-            <a:ext cx="4754879" cy="4297680"/>
+            <a:off x="731520" y="365760"/>
+            <a:ext cx="10698480" cy="320040"/>
           </a:xfrm>
           <a:prstGeom prst="rect">
             <a:avLst/>
@@ -3999,19 +4157,152 @@
           </a:bodyPr>
           <a:lstStyle/>
           <a:p>
+            <a:r>
+              <a:rPr sz="1100" b="1">
+                <a:solidFill>
+                  <a:srgbClr val="38BDF8"/>
+                </a:solidFill>
+                <a:latin typeface="Segoe UI"/>
+              </a:rPr>
+              <a:t>TAXONOMY &amp; FORECASTING</a:t>
+            </a:r>
+          </a:p>
+        </p:txBody>
+      </p:sp>
+      <p:sp>
+        <p:nvSpPr>
+          <p:cNvPr id="5" name="TextBox 4"/>
+          <p:cNvSpPr txBox="1"/>
+          <p:nvPr/>
+        </p:nvSpPr>
+        <p:spPr>
+          <a:xfrm>
+            <a:off x="731520" y="640080"/>
+            <a:ext cx="10698480" cy="548640"/>
+          </a:xfrm>
+          <a:prstGeom prst="rect">
+            <a:avLst/>
+          </a:prstGeom>
+          <a:noFill/>
+        </p:spPr>
+        <p:txBody>
+          <a:bodyPr wrap="square">
+            <a:spAutoFit/>
+          </a:bodyPr>
+          <a:lstStyle/>
+          <a:p>
+            <a:r>
+              <a:rPr sz="2400" b="1">
+                <a:solidFill>
+                  <a:srgbClr val="F8FAFC"/>
+                </a:solidFill>
+                <a:latin typeface="Segoe UI"/>
+              </a:rPr>
+              <a:t>4-Tier Recoverability Model &amp; Single-Scan Runway Forecasting</a:t>
+            </a:r>
+          </a:p>
+          <a:p>
+            <a:r>
+              <a:rPr sz="1200">
+                <a:solidFill>
+                  <a:srgbClr val="94A3B8"/>
+                </a:solidFill>
+                <a:latin typeface="Segoe UI"/>
+              </a:rPr>
+              <a:t>Predicts disk exhaustion dates from inode metadata distribution without running weeks of daemons.</a:t>
+            </a:r>
+          </a:p>
+        </p:txBody>
+      </p:sp>
+      <p:sp>
+        <p:nvSpPr>
+          <p:cNvPr id="6" name="Rounded Rectangle 5"/>
+          <p:cNvSpPr/>
+          <p:nvPr/>
+        </p:nvSpPr>
+        <p:spPr>
+          <a:xfrm>
+            <a:off x="731520" y="1554480"/>
+            <a:ext cx="5120640" cy="4846320"/>
+          </a:xfrm>
+          <a:prstGeom prst="roundRect">
+            <a:avLst/>
+          </a:prstGeom>
+          <a:solidFill>
+            <a:srgbClr val="131B2C"/>
+          </a:solidFill>
+          <a:ln w="12700">
+            <a:solidFill>
+              <a:srgbClr val="26334D"/>
+            </a:solidFill>
+          </a:ln>
+        </p:spPr>
+        <p:style>
+          <a:lnRef idx="1">
+            <a:schemeClr val="accent1"/>
+          </a:lnRef>
+          <a:fillRef idx="3">
+            <a:schemeClr val="accent1"/>
+          </a:fillRef>
+          <a:effectRef idx="2">
+            <a:schemeClr val="accent1"/>
+          </a:effectRef>
+          <a:fontRef idx="minor">
+            <a:schemeClr val="lt1"/>
+          </a:fontRef>
+        </p:style>
+        <p:txBody>
+          <a:bodyPr rtlCol="0" anchor="ctr"/>
+          <a:lstStyle/>
+          <a:p>
+            <a:pPr algn="ctr"/>
+          </a:p>
+        </p:txBody>
+      </p:sp>
+      <p:sp>
+        <p:nvSpPr>
+          <p:cNvPr id="7" name="TextBox 6"/>
+          <p:cNvSpPr txBox="1"/>
+          <p:nvPr/>
+        </p:nvSpPr>
+        <p:spPr>
+          <a:xfrm>
+            <a:off x="932688" y="1719072"/>
+            <a:ext cx="4718303" cy="4517136"/>
+          </a:xfrm>
+          <a:prstGeom prst="rect">
+            <a:avLst/>
+          </a:prstGeom>
+          <a:noFill/>
+        </p:spPr>
+        <p:txBody>
+          <a:bodyPr wrap="square">
+            <a:spAutoFit/>
+          </a:bodyPr>
+          <a:lstStyle/>
+          <a:p>
             <a:pPr>
               <a:spcAft>
-                <a:spcPts val="800"/>
+                <a:spcPts val="1000"/>
               </a:spcAft>
             </a:pPr>
             <a:r>
-              <a:rPr sz="1700" b="1">
+              <a:rPr sz="1100" b="1">
                 <a:solidFill>
                   <a:srgbClr val="38BDF8"/>
                 </a:solidFill>
                 <a:latin typeface="Segoe UI"/>
               </a:rPr>
-              <a:t>4-Tier Recoverability Taxonomy</a:t>
+              <a:t>[4-TIER TAXONOMY] </a:t>
+            </a:r>
+            <a:r>
+              <a:rPr sz="1600" b="1">
+                <a:solidFill>
+                  <a:srgbClr val="F8FAFC"/>
+                </a:solidFill>
+                <a:latin typeface="Segoe UI"/>
+              </a:rPr>
+              <a:t>Regret Objective Weights</a:t>
             </a:r>
           </a:p>
           <a:p>
@@ -4021,7 +4312,7 @@
               </a:spcAft>
             </a:pPr>
             <a:r>
-              <a:rPr sz="1300" b="1">
+              <a:rPr sz="1250" b="1">
                 <a:solidFill>
                   <a:srgbClr val="34D399"/>
                 </a:solidFill>
@@ -4030,7 +4321,7 @@
               <a:t>1. Disposable (Regret 0.02): </a:t>
             </a:r>
             <a:r>
-              <a:rPr sz="1300">
+              <a:rPr sz="1250">
                 <a:solidFill>
                   <a:srgbClr val="F8FAFC"/>
                 </a:solidFill>
@@ -4046,7 +4337,7 @@
               </a:spcAft>
             </a:pPr>
             <a:r>
-              <a:rPr sz="1300" b="1">
+              <a:rPr sz="1250" b="1">
                 <a:solidFill>
                   <a:srgbClr val="38BDF8"/>
                 </a:solidFill>
@@ -4055,7 +4346,7 @@
               <a:t>2. Duplicate (Regret 0.10): </a:t>
             </a:r>
             <a:r>
-              <a:rPr sz="1300">
+              <a:rPr sz="1250">
                 <a:solidFill>
                   <a:srgbClr val="F8FAFC"/>
                 </a:solidFill>
@@ -4071,7 +4362,7 @@
               </a:spcAft>
             </a:pPr>
             <a:r>
-              <a:rPr sz="1300" b="1">
+              <a:rPr sz="1250" b="1">
                 <a:solidFill>
                   <a:srgbClr val="FBBF24"/>
                 </a:solidFill>
@@ -4080,7 +4371,7 @@
               <a:t>3. Tracked Git (Regret 0.20): </a:t>
             </a:r>
             <a:r>
-              <a:rPr sz="1300">
+              <a:rPr sz="1250">
                 <a:solidFill>
                   <a:srgbClr val="F8FAFC"/>
                 </a:solidFill>
@@ -4096,7 +4387,7 @@
               </a:spcAft>
             </a:pPr>
             <a:r>
-              <a:rPr sz="1300" b="1">
+              <a:rPr sz="1250" b="1">
                 <a:solidFill>
                   <a:srgbClr val="F87171"/>
                 </a:solidFill>
@@ -4105,7 +4396,7 @@
               <a:t>4. Unique (Regret 1.00): </a:t>
             </a:r>
             <a:r>
-              <a:rPr sz="1300">
+              <a:rPr sz="1250">
                 <a:solidFill>
                   <a:srgbClr val="F8FAFC"/>
                 </a:solidFill>
@@ -4114,28 +4405,53 @@
               <a:t>Uncached, untracked, single-copy files. PERMANENTLY EXCLUDED.</a:t>
             </a:r>
           </a:p>
-        </p:txBody>
-      </p:sp>
-      <p:sp>
-        <p:nvSpPr>
-          <p:cNvPr id="7" name="Rounded Rectangle 6"/>
+          <a:p>
+            <a:pPr>
+              <a:spcAft>
+                <a:spcPts val="600"/>
+              </a:spcAft>
+            </a:pPr>
+            <a:r>
+              <a:rPr sz="1250" b="1">
+                <a:solidFill>
+                  <a:srgbClr val="94A3B8"/>
+                </a:solidFill>
+                <a:latin typeface="Segoe UI"/>
+              </a:rPr>
+              <a:t>Git Index Verification: </a:t>
+            </a:r>
+            <a:r>
+              <a:rPr sz="1250">
+                <a:solidFill>
+                  <a:srgbClr val="F8FAFC"/>
+                </a:solidFill>
+                <a:latin typeface="Segoe UI"/>
+              </a:rPr>
+              <a:t>Queries git index directly so untracked files are never misclassified.</a:t>
+            </a:r>
+          </a:p>
+        </p:txBody>
+      </p:sp>
+      <p:sp>
+        <p:nvSpPr>
+          <p:cNvPr id="8" name="Rounded Rectangle 7"/>
           <p:cNvSpPr/>
           <p:nvPr/>
         </p:nvSpPr>
         <p:spPr>
           <a:xfrm>
-            <a:off x="6217920" y="1645920"/>
-            <a:ext cx="5120640" cy="4572000"/>
+            <a:off x="6217920" y="1554480"/>
+            <a:ext cx="5120640" cy="4846320"/>
           </a:xfrm>
           <a:prstGeom prst="roundRect">
             <a:avLst/>
           </a:prstGeom>
           <a:solidFill>
-            <a:srgbClr val="161E2E"/>
+            <a:srgbClr val="131B2C"/>
           </a:solidFill>
           <a:ln w="12700">
             <a:solidFill>
-              <a:srgbClr val="2D3B55"/>
+              <a:srgbClr val="10B981"/>
             </a:solidFill>
           </a:ln>
         </p:spPr>
@@ -4163,14 +4479,14 @@
       </p:sp>
       <p:sp>
         <p:nvSpPr>
-          <p:cNvPr id="8" name="TextBox 7"/>
+          <p:cNvPr id="9" name="TextBox 8"/>
           <p:cNvSpPr txBox="1"/>
           <p:nvPr/>
         </p:nvSpPr>
         <p:spPr>
           <a:xfrm>
-            <a:off x="6400800" y="1783080"/>
-            <a:ext cx="4754879" cy="4297680"/>
+            <a:off x="6419088" y="1719072"/>
+            <a:ext cx="4718303" cy="4517136"/>
           </a:xfrm>
           <a:prstGeom prst="rect">
             <a:avLst/>
@@ -4185,17 +4501,26 @@
           <a:p>
             <a:pPr>
               <a:spcAft>
-                <a:spcPts val="800"/>
+                <a:spcPts val="1000"/>
               </a:spcAft>
             </a:pPr>
             <a:r>
-              <a:rPr sz="1700" b="1">
+              <a:rPr sz="1100" b="1">
                 <a:solidFill>
                   <a:srgbClr val="34D399"/>
                 </a:solidFill>
                 <a:latin typeface="Segoe UI"/>
               </a:rPr>
-              <a:t>Instant Single-Scan Runway Forecasting</a:t>
+              <a:t>[RUNWAY FORECASTING] </a:t>
+            </a:r>
+            <a:r>
+              <a:rPr sz="1600" b="1">
+                <a:solidFill>
+                  <a:srgbClr val="F8FAFC"/>
+                </a:solidFill>
+                <a:latin typeface="Segoe UI"/>
+              </a:rPr>
+              <a:t>Single-Scan Timestamp Distribution</a:t>
             </a:r>
           </a:p>
           <a:p>
@@ -4205,22 +4530,22 @@
               </a:spcAft>
             </a:pPr>
             <a:r>
-              <a:rPr sz="1300" b="1">
+              <a:rPr sz="1250" b="1">
                 <a:solidFill>
                   <a:srgbClr val="94A3B8"/>
                 </a:solidFill>
                 <a:latin typeface="Segoe UI"/>
               </a:rPr>
-              <a:t>The Limitation: </a:t>
-            </a:r>
-            <a:r>
-              <a:rPr sz="1300">
+              <a:t>The Problem: </a:t>
+            </a:r>
+            <a:r>
+              <a:rPr sz="1250">
                 <a:solidFill>
                   <a:srgbClr val="F8FAFC"/>
                 </a:solidFill>
                 <a:latin typeface="Segoe UI"/>
               </a:rPr>
-              <a:t>Standard forecast daemons require weeks of periodic snapshots to compute growth.</a:t>
+              <a:t>Standard tools require running an active monitoring daemon for weeks to measure growth.</a:t>
             </a:r>
           </a:p>
           <a:p>
@@ -4230,7 +4555,7 @@
               </a:spcAft>
             </a:pPr>
             <a:r>
-              <a:rPr sz="1300" b="1">
+              <a:rPr sz="1250" b="1">
                 <a:solidFill>
                   <a:srgbClr val="34D399"/>
                 </a:solidFill>
@@ -4239,13 +4564,13 @@
               <a:t>SANCHAY's Insight: </a:t>
             </a:r>
             <a:r>
-              <a:rPr sz="1300">
+              <a:rPr sz="1250">
                 <a:solidFill>
                   <a:srgbClr val="F8FAFC"/>
                 </a:solidFill>
                 <a:latin typeface="Segoe UI"/>
               </a:rPr>
-              <a:t>Every filesystem inode already stores file modification times (mtime).</a:t>
+              <a:t>Every filesystem inode already records file modification timestamps (mtime).</a:t>
             </a:r>
           </a:p>
           <a:p>
@@ -4255,22 +4580,22 @@
               </a:spcAft>
             </a:pPr>
             <a:r>
-              <a:rPr sz="1300" b="1">
+              <a:rPr sz="1250" b="1">
                 <a:solidFill>
                   <a:srgbClr val="38BDF8"/>
                 </a:solidFill>
                 <a:latin typeface="Segoe UI"/>
               </a:rPr>
-              <a:t>Zero Overhead: </a:t>
-            </a:r>
-            <a:r>
-              <a:rPr sz="1300">
+              <a:t>Instant Rate: </a:t>
+            </a:r>
+            <a:r>
+              <a:rPr sz="1250">
                 <a:solidFill>
                   <a:srgbClr val="F8FAFC"/>
                 </a:solidFill>
                 <a:latin typeface="Segoe UI"/>
               </a:rPr>
-              <a:t>The modification-time distribution across a single scan provides bytes-added-per-day immediately.</a:t>
+              <a:t>The mtime distribution across a single scan provides bytes-added-per-day immediately.</a:t>
             </a:r>
           </a:p>
           <a:p>
@@ -4280,22 +4605,47 @@
               </a:spcAft>
             </a:pPr>
             <a:r>
-              <a:rPr sz="1300" b="1">
+              <a:rPr sz="1250" b="1">
                 <a:solidFill>
                   <a:srgbClr val="34D399"/>
                 </a:solidFill>
                 <a:latin typeface="Segoe UI"/>
               </a:rPr>
-              <a:t>Runway Projection: </a:t>
-            </a:r>
-            <a:r>
-              <a:rPr sz="1300">
+              <a:t>Exhaustion Date: </a:t>
+            </a:r>
+            <a:r>
+              <a:rPr sz="1250">
                 <a:solidFill>
                   <a:srgbClr val="F8FAFC"/>
                 </a:solidFill>
                 <a:latin typeface="Segoe UI"/>
               </a:rPr>
-              <a:t>Compared against current filesystem free space, delivers an instant disk exhaustion date.</a:t>
+              <a:t>Compared against filesystem free space, yields an instant disk full date on run #1.</a:t>
+            </a:r>
+          </a:p>
+          <a:p>
+            <a:pPr>
+              <a:spcAft>
+                <a:spcPts val="600"/>
+              </a:spcAft>
+            </a:pPr>
+            <a:r>
+              <a:rPr sz="1250" b="1">
+                <a:solidFill>
+                  <a:srgbClr val="F8FAFC"/>
+                </a:solidFill>
+                <a:latin typeface="Segoe UI"/>
+              </a:rPr>
+              <a:t>Linux Relatime Aware: </a:t>
+            </a:r>
+            <a:r>
+              <a:rPr sz="1250">
+                <a:solidFill>
+                  <a:srgbClr val="F8FAFC"/>
+                </a:solidFill>
+                <a:latin typeface="Segoe UI"/>
+              </a:rPr>
+              <a:t>Accounts for relatime and noatime mount options using max(atime, mtime).</a:t>
             </a:r>
           </a:p>
         </p:txBody>
@@ -4333,7 +4683,7 @@
             <a:avLst/>
           </a:prstGeom>
           <a:solidFill>
-            <a:srgbClr val="0B1120"/>
+            <a:srgbClr val="0A0F1D"/>
           </a:solidFill>
           <a:ln>
             <a:noFill/>
@@ -4363,104 +4713,23 @@
       </p:sp>
       <p:sp>
         <p:nvSpPr>
-          <p:cNvPr id="3" name="TextBox 2"/>
-          <p:cNvSpPr txBox="1"/>
+          <p:cNvPr id="3" name="Rectangle 2"/>
+          <p:cNvSpPr/>
           <p:nvPr/>
         </p:nvSpPr>
         <p:spPr>
           <a:xfrm>
-            <a:off x="731520" y="365760"/>
-            <a:ext cx="10698480" cy="365760"/>
+            <a:off x="0" y="0"/>
+            <a:ext cx="12191695" cy="54864"/>
           </a:xfrm>
           <a:prstGeom prst="rect">
             <a:avLst/>
           </a:prstGeom>
-          <a:noFill/>
-        </p:spPr>
-        <p:txBody>
-          <a:bodyPr wrap="square">
-            <a:spAutoFit/>
-          </a:bodyPr>
-          <a:lstStyle/>
-          <a:p>
-            <a:r>
-              <a:rPr sz="1100" b="1">
-                <a:solidFill>
-                  <a:srgbClr val="38BDF8"/>
-                </a:solidFill>
-                <a:latin typeface="Segoe UI"/>
-              </a:rPr>
-              <a:t>AI ARCHITECTURE</a:t>
-            </a:r>
-          </a:p>
-        </p:txBody>
-      </p:sp>
-      <p:sp>
-        <p:nvSpPr>
-          <p:cNvPr id="4" name="TextBox 3"/>
-          <p:cNvSpPr txBox="1"/>
-          <p:nvPr/>
-        </p:nvSpPr>
-        <p:spPr>
-          <a:xfrm>
-            <a:off x="731520" y="685800"/>
-            <a:ext cx="10698480" cy="640080"/>
-          </a:xfrm>
-          <a:prstGeom prst="rect">
-            <a:avLst/>
-          </a:prstGeom>
-          <a:noFill/>
-        </p:spPr>
-        <p:txBody>
-          <a:bodyPr wrap="square">
-            <a:spAutoFit/>
-          </a:bodyPr>
-          <a:lstStyle/>
-          <a:p>
-            <a:r>
-              <a:rPr sz="2600" b="1">
-                <a:solidFill>
-                  <a:srgbClr val="F8FAFC"/>
-                </a:solidFill>
-                <a:latin typeface="Segoe UI"/>
-              </a:rPr>
-              <a:t>Safety by Construction: Model Outside the Decision Loop</a:t>
-            </a:r>
-          </a:p>
-          <a:p>
-            <a:r>
-              <a:rPr sz="1300">
-                <a:solidFill>
-                  <a:srgbClr val="94A3B8"/>
-                </a:solidFill>
-                <a:latin typeface="Segoe UI"/>
-              </a:rPr>
-              <a:t>Eliminating AI hallucination risk through structural isolation</a:t>
-            </a:r>
-          </a:p>
-        </p:txBody>
-      </p:sp>
-      <p:sp>
-        <p:nvSpPr>
-          <p:cNvPr id="5" name="Rounded Rectangle 4"/>
-          <p:cNvSpPr/>
-          <p:nvPr/>
-        </p:nvSpPr>
-        <p:spPr>
-          <a:xfrm>
-            <a:off x="731520" y="1645920"/>
-            <a:ext cx="5120640" cy="4572000"/>
-          </a:xfrm>
-          <a:prstGeom prst="roundRect">
-            <a:avLst/>
-          </a:prstGeom>
           <a:solidFill>
-            <a:srgbClr val="161E2E"/>
+            <a:srgbClr val="38BDF8"/>
           </a:solidFill>
-          <a:ln w="12700">
-            <a:solidFill>
-              <a:srgbClr val="2D3B55"/>
-            </a:solidFill>
+          <a:ln>
+            <a:noFill/>
           </a:ln>
         </p:spPr>
         <p:style>
@@ -4487,14 +4756,14 @@
       </p:sp>
       <p:sp>
         <p:nvSpPr>
-          <p:cNvPr id="6" name="TextBox 5"/>
+          <p:cNvPr id="4" name="TextBox 3"/>
           <p:cNvSpPr txBox="1"/>
           <p:nvPr/>
         </p:nvSpPr>
         <p:spPr>
           <a:xfrm>
-            <a:off x="914400" y="1783080"/>
-            <a:ext cx="4754879" cy="4297680"/>
+            <a:off x="731520" y="365760"/>
+            <a:ext cx="10698480" cy="320040"/>
           </a:xfrm>
           <a:prstGeom prst="rect">
             <a:avLst/>
@@ -4507,19 +4776,152 @@
           </a:bodyPr>
           <a:lstStyle/>
           <a:p>
+            <a:r>
+              <a:rPr sz="1100" b="1">
+                <a:solidFill>
+                  <a:srgbClr val="38BDF8"/>
+                </a:solidFill>
+                <a:latin typeface="Segoe UI"/>
+              </a:rPr>
+              <a:t>AI ARCHITECTURE</a:t>
+            </a:r>
+          </a:p>
+        </p:txBody>
+      </p:sp>
+      <p:sp>
+        <p:nvSpPr>
+          <p:cNvPr id="5" name="TextBox 4"/>
+          <p:cNvSpPr txBox="1"/>
+          <p:nvPr/>
+        </p:nvSpPr>
+        <p:spPr>
+          <a:xfrm>
+            <a:off x="731520" y="640080"/>
+            <a:ext cx="10698480" cy="548640"/>
+          </a:xfrm>
+          <a:prstGeom prst="rect">
+            <a:avLst/>
+          </a:prstGeom>
+          <a:noFill/>
+        </p:spPr>
+        <p:txBody>
+          <a:bodyPr wrap="square">
+            <a:spAutoFit/>
+          </a:bodyPr>
+          <a:lstStyle/>
+          <a:p>
+            <a:r>
+              <a:rPr sz="2400" b="1">
+                <a:solidFill>
+                  <a:srgbClr val="F8FAFC"/>
+                </a:solidFill>
+                <a:latin typeface="Segoe UI"/>
+              </a:rPr>
+              <a:t>Safety by Construction: Eliminating Hallucination Risk</a:t>
+            </a:r>
+          </a:p>
+          <a:p>
+            <a:r>
+              <a:rPr sz="1200">
+                <a:solidFill>
+                  <a:srgbClr val="94A3B8"/>
+                </a:solidFill>
+                <a:latin typeface="Segoe UI"/>
+              </a:rPr>
+              <a:t>Placing the AI model completely outside the mutation and deletion decision path.</a:t>
+            </a:r>
+          </a:p>
+        </p:txBody>
+      </p:sp>
+      <p:sp>
+        <p:nvSpPr>
+          <p:cNvPr id="6" name="Rounded Rectangle 5"/>
+          <p:cNvSpPr/>
+          <p:nvPr/>
+        </p:nvSpPr>
+        <p:spPr>
+          <a:xfrm>
+            <a:off x="731520" y="1554480"/>
+            <a:ext cx="5120640" cy="4846320"/>
+          </a:xfrm>
+          <a:prstGeom prst="roundRect">
+            <a:avLst/>
+          </a:prstGeom>
+          <a:solidFill>
+            <a:srgbClr val="131B2C"/>
+          </a:solidFill>
+          <a:ln w="12700">
+            <a:solidFill>
+              <a:srgbClr val="EF4444"/>
+            </a:solidFill>
+          </a:ln>
+        </p:spPr>
+        <p:style>
+          <a:lnRef idx="1">
+            <a:schemeClr val="accent1"/>
+          </a:lnRef>
+          <a:fillRef idx="3">
+            <a:schemeClr val="accent1"/>
+          </a:fillRef>
+          <a:effectRef idx="2">
+            <a:schemeClr val="accent1"/>
+          </a:effectRef>
+          <a:fontRef idx="minor">
+            <a:schemeClr val="lt1"/>
+          </a:fontRef>
+        </p:style>
+        <p:txBody>
+          <a:bodyPr rtlCol="0" anchor="ctr"/>
+          <a:lstStyle/>
+          <a:p>
+            <a:pPr algn="ctr"/>
+          </a:p>
+        </p:txBody>
+      </p:sp>
+      <p:sp>
+        <p:nvSpPr>
+          <p:cNvPr id="7" name="TextBox 6"/>
+          <p:cNvSpPr txBox="1"/>
+          <p:nvPr/>
+        </p:nvSpPr>
+        <p:spPr>
+          <a:xfrm>
+            <a:off x="932688" y="1719072"/>
+            <a:ext cx="4718303" cy="4517136"/>
+          </a:xfrm>
+          <a:prstGeom prst="rect">
+            <a:avLst/>
+          </a:prstGeom>
+          <a:noFill/>
+        </p:spPr>
+        <p:txBody>
+          <a:bodyPr wrap="square">
+            <a:spAutoFit/>
+          </a:bodyPr>
+          <a:lstStyle/>
+          <a:p>
             <a:pPr>
               <a:spcAft>
-                <a:spcPts val="800"/>
+                <a:spcPts val="1000"/>
               </a:spcAft>
             </a:pPr>
             <a:r>
-              <a:rPr sz="1700" b="1">
+              <a:rPr sz="1100" b="1">
                 <a:solidFill>
                   <a:srgbClr val="F87171"/>
                 </a:solidFill>
                 <a:latin typeface="Segoe UI"/>
               </a:rPr>
-              <a:t>Traditional 'Prompt-Only' AI (Dangerous)</a:t>
+              <a:t>[TRADITIONAL PROMPT-ONLY AI] </a:t>
+            </a:r>
+            <a:r>
+              <a:rPr sz="1600" b="1">
+                <a:solidFill>
+                  <a:srgbClr val="F8FAFC"/>
+                </a:solidFill>
+                <a:latin typeface="Segoe UI"/>
+              </a:rPr>
+              <a:t>High Risk of Catastrophic Data Loss</a:t>
             </a:r>
           </a:p>
           <a:p>
@@ -4529,7 +4931,7 @@
               </a:spcAft>
             </a:pPr>
             <a:r>
-              <a:rPr sz="1300" b="1">
+              <a:rPr sz="1250" b="1">
                 <a:solidFill>
                   <a:srgbClr val="F87171"/>
                 </a:solidFill>
@@ -4538,13 +4940,13 @@
               <a:t>Approach: </a:t>
             </a:r>
             <a:r>
-              <a:rPr sz="1300">
+              <a:rPr sz="1250">
                 <a:solidFill>
                   <a:srgbClr val="F8FAFC"/>
                 </a:solidFill>
                 <a:latin typeface="Segoe UI"/>
               </a:rPr>
-              <a:t>Prompt an LLM with disk contents and tell it 'please be careful not to delete important files'.</a:t>
+              <a:t>Prompt an LLM with directory trees and ask it 'please select safe files to delete'.</a:t>
             </a:r>
           </a:p>
           <a:p>
@@ -4554,22 +4956,22 @@
               </a:spcAft>
             </a:pPr>
             <a:r>
-              <a:rPr sz="1300" b="1">
+              <a:rPr sz="1250" b="1">
                 <a:solidFill>
                   <a:srgbClr val="F87171"/>
                 </a:solidFill>
                 <a:latin typeface="Segoe UI"/>
               </a:rPr>
-              <a:t>Risk: </a:t>
-            </a:r>
-            <a:r>
-              <a:rPr sz="1300">
+              <a:t>The Hazard: </a:t>
+            </a:r>
+            <a:r>
+              <a:rPr sz="1250">
                 <a:solidFill>
                   <a:srgbClr val="F8FAFC"/>
                 </a:solidFill>
                 <a:latin typeface="Segoe UI"/>
               </a:rPr>
-              <a:t>LLM hallucinations or parsing failures can misclassify user documents as temporary files.</a:t>
+              <a:t>LLM hallucinations, prompt injection, or parsing errors can misjudge critical files.</a:t>
             </a:r>
           </a:p>
           <a:p>
@@ -4579,46 +4981,71 @@
               </a:spcAft>
             </a:pPr>
             <a:r>
-              <a:rPr sz="1300" b="1">
+              <a:rPr sz="1250" b="1">
                 <a:solidFill>
                   <a:srgbClr val="F87171"/>
                 </a:solidFill>
                 <a:latin typeface="Segoe UI"/>
               </a:rPr>
-              <a:t>Catastrophic Failure: </a:t>
-            </a:r>
-            <a:r>
-              <a:rPr sz="1300">
+              <a:t>Failure Mode: </a:t>
+            </a:r>
+            <a:r>
+              <a:rPr sz="1250">
                 <a:solidFill>
                   <a:srgbClr val="F8FAFC"/>
                 </a:solidFill>
                 <a:latin typeface="Segoe UI"/>
               </a:rPr>
-              <a:t>One incorrect decision leads to permanent, irreversible data loss.</a:t>
-            </a:r>
-          </a:p>
-        </p:txBody>
-      </p:sp>
-      <p:sp>
-        <p:nvSpPr>
-          <p:cNvPr id="7" name="Rounded Rectangle 6"/>
+              <a:t>Irreversible deletion of unique user documents or code.</a:t>
+            </a:r>
+          </a:p>
+          <a:p>
+            <a:pPr>
+              <a:spcAft>
+                <a:spcPts val="600"/>
+              </a:spcAft>
+            </a:pPr>
+            <a:r>
+              <a:rPr sz="1250" b="1">
+                <a:solidFill>
+                  <a:srgbClr val="94A3B8"/>
+                </a:solidFill>
+                <a:latin typeface="Segoe UI"/>
+              </a:rPr>
+              <a:t>Core Weakness: </a:t>
+            </a:r>
+            <a:r>
+              <a:rPr sz="1250">
+                <a:solidFill>
+                  <a:srgbClr val="F8FAFC"/>
+                </a:solidFill>
+                <a:latin typeface="Segoe UI"/>
+              </a:rPr>
+              <a:t>'Prompting the model to be careful' is a weak safety guarantee.</a:t>
+            </a:r>
+          </a:p>
+        </p:txBody>
+      </p:sp>
+      <p:sp>
+        <p:nvSpPr>
+          <p:cNvPr id="8" name="Rounded Rectangle 7"/>
           <p:cNvSpPr/>
           <p:nvPr/>
         </p:nvSpPr>
         <p:spPr>
           <a:xfrm>
-            <a:off x="6217920" y="1645920"/>
-            <a:ext cx="5120640" cy="4572000"/>
+            <a:off x="6217920" y="1554480"/>
+            <a:ext cx="5120640" cy="4846320"/>
           </a:xfrm>
           <a:prstGeom prst="roundRect">
             <a:avLst/>
           </a:prstGeom>
           <a:solidFill>
-            <a:srgbClr val="161E2E"/>
+            <a:srgbClr val="131B2C"/>
           </a:solidFill>
           <a:ln w="12700">
             <a:solidFill>
-              <a:srgbClr val="2D3B55"/>
+              <a:srgbClr val="10B981"/>
             </a:solidFill>
           </a:ln>
         </p:spPr>
@@ -4646,14 +5073,14 @@
       </p:sp>
       <p:sp>
         <p:nvSpPr>
-          <p:cNvPr id="8" name="TextBox 7"/>
+          <p:cNvPr id="9" name="TextBox 8"/>
           <p:cNvSpPr txBox="1"/>
           <p:nvPr/>
         </p:nvSpPr>
         <p:spPr>
           <a:xfrm>
-            <a:off x="6400800" y="1783080"/>
-            <a:ext cx="4754879" cy="4297680"/>
+            <a:off x="6419088" y="1719072"/>
+            <a:ext cx="4718303" cy="4517136"/>
           </a:xfrm>
           <a:prstGeom prst="rect">
             <a:avLst/>
@@ -4668,17 +5095,26 @@
           <a:p>
             <a:pPr>
               <a:spcAft>
-                <a:spcPts val="800"/>
+                <a:spcPts val="1000"/>
               </a:spcAft>
             </a:pPr>
             <a:r>
-              <a:rPr sz="1700" b="1">
+              <a:rPr sz="1100" b="1">
                 <a:solidFill>
                   <a:srgbClr val="34D399"/>
                 </a:solidFill>
                 <a:latin typeface="Segoe UI"/>
               </a:rPr>
-              <a:t>SANCHAY's Isolated Architecture (Safe)</a:t>
+              <a:t>[SANCHAY ISOLATED ARCHITECTURE] </a:t>
+            </a:r>
+            <a:r>
+              <a:rPr sz="1600" b="1">
+                <a:solidFill>
+                  <a:srgbClr val="F8FAFC"/>
+                </a:solidFill>
+                <a:latin typeface="Segoe UI"/>
+              </a:rPr>
+              <a:t>Structural Mathematical Guarantee</a:t>
             </a:r>
           </a:p>
           <a:p>
@@ -4688,7 +5124,7 @@
               </a:spcAft>
             </a:pPr>
             <a:r>
-              <a:rPr sz="1300" b="1">
+              <a:rPr sz="1250" b="1">
                 <a:solidFill>
                   <a:srgbClr val="34D399"/>
                 </a:solidFill>
@@ -4697,13 +5133,13 @@
               <a:t>Pre-Classification: </a:t>
             </a:r>
             <a:r>
-              <a:rPr sz="1300">
+              <a:rPr sz="1250">
                 <a:solidFill>
                   <a:srgbClr val="F8FAFC"/>
                 </a:solidFill>
                 <a:latin typeface="Segoe UI"/>
               </a:rPr>
-              <a:t>Deterministic algorithm filters out unique files before any ranking.</a:t>
+              <a:t>Deterministic algorithm filters out unique files before any ranking happens.</a:t>
             </a:r>
           </a:p>
           <a:p>
@@ -4713,16 +5149,16 @@
               </a:spcAft>
             </a:pPr>
             <a:r>
-              <a:rPr sz="1300" b="1">
-                <a:solidFill>
-                  <a:srgbClr val="34D399"/>
+              <a:rPr sz="1250" b="1">
+                <a:solidFill>
+                  <a:srgbClr val="38BDF8"/>
                 </a:solidFill>
                 <a:latin typeface="Segoe UI"/>
               </a:rPr>
               <a:t>Restricted Context: </a:t>
             </a:r>
             <a:r>
-              <a:rPr sz="1300">
+              <a:rPr sz="1250">
                 <a:solidFill>
                   <a:srgbClr val="F8FAFC"/>
                 </a:solidFill>
@@ -4738,7 +5174,7 @@
               </a:spcAft>
             </a:pPr>
             <a:r>
-              <a:rPr sz="1300" b="1">
+              <a:rPr sz="1250" b="1">
                 <a:solidFill>
                   <a:srgbClr val="34D399"/>
                 </a:solidFill>
@@ -4747,13 +5183,13 @@
               <a:t>Zero Mutation Power: </a:t>
             </a:r>
             <a:r>
-              <a:rPr sz="1300">
+              <a:rPr sz="1250">
                 <a:solidFill>
                   <a:srgbClr val="F8FAFC"/>
                 </a:solidFill>
                 <a:latin typeface="Segoe UI"/>
               </a:rPr>
-              <a:t>The LLM cannot add files, delete files, or alter the candidate priority list.</a:t>
+              <a:t>The LLM cannot add files, delete files, or reorder the priority queue.</a:t>
             </a:r>
           </a:p>
           <a:p>
@@ -4763,22 +5199,22 @@
               </a:spcAft>
             </a:pPr>
             <a:r>
-              <a:rPr sz="1300" b="1">
-                <a:solidFill>
-                  <a:srgbClr val="38BDF8"/>
-                </a:solidFill>
-                <a:latin typeface="Segoe UI"/>
-              </a:rPr>
-              <a:t>Worst Case: </a:t>
-            </a:r>
-            <a:r>
-              <a:rPr sz="1300">
+              <a:rPr sz="1250" b="1">
+                <a:solidFill>
+                  <a:srgbClr val="34D399"/>
+                </a:solidFill>
+                <a:latin typeface="Segoe UI"/>
+              </a:rPr>
+              <a:t>Worst-Case Bound: </a:t>
+            </a:r>
+            <a:r>
+              <a:rPr sz="1250">
                 <a:solidFill>
                   <a:srgbClr val="F8FAFC"/>
                 </a:solidFill>
                 <a:latin typeface="Segoe UI"/>
               </a:rPr>
-              <a:t>An awkward descriptive sentence — NEVER a lost file.</a:t>
+              <a:t>An awkward descriptive summary — NEVER a lost file.</a:t>
             </a:r>
           </a:p>
         </p:txBody>
@@ -4816,7 +5252,7 @@
             <a:avLst/>
           </a:prstGeom>
           <a:solidFill>
-            <a:srgbClr val="0B1120"/>
+            <a:srgbClr val="0A0F1D"/>
           </a:solidFill>
           <a:ln>
             <a:noFill/>
@@ -4846,14 +5282,57 @@
       </p:sp>
       <p:sp>
         <p:nvSpPr>
-          <p:cNvPr id="3" name="TextBox 2"/>
+          <p:cNvPr id="3" name="Rectangle 2"/>
+          <p:cNvSpPr/>
+          <p:nvPr/>
+        </p:nvSpPr>
+        <p:spPr>
+          <a:xfrm>
+            <a:off x="0" y="0"/>
+            <a:ext cx="12191695" cy="54864"/>
+          </a:xfrm>
+          <a:prstGeom prst="rect">
+            <a:avLst/>
+          </a:prstGeom>
+          <a:solidFill>
+            <a:srgbClr val="38BDF8"/>
+          </a:solidFill>
+          <a:ln>
+            <a:noFill/>
+          </a:ln>
+        </p:spPr>
+        <p:style>
+          <a:lnRef idx="1">
+            <a:schemeClr val="accent1"/>
+          </a:lnRef>
+          <a:fillRef idx="3">
+            <a:schemeClr val="accent1"/>
+          </a:fillRef>
+          <a:effectRef idx="2">
+            <a:schemeClr val="accent1"/>
+          </a:effectRef>
+          <a:fontRef idx="minor">
+            <a:schemeClr val="lt1"/>
+          </a:fontRef>
+        </p:style>
+        <p:txBody>
+          <a:bodyPr rtlCol="0" anchor="ctr"/>
+          <a:lstStyle/>
+          <a:p>
+            <a:pPr algn="ctr"/>
+          </a:p>
+        </p:txBody>
+      </p:sp>
+      <p:sp>
+        <p:nvSpPr>
+          <p:cNvPr id="4" name="TextBox 3"/>
           <p:cNvSpPr txBox="1"/>
           <p:nvPr/>
         </p:nvSpPr>
         <p:spPr>
           <a:xfrm>
             <a:off x="731520" y="365760"/>
-            <a:ext cx="10698480" cy="365760"/>
+            <a:ext cx="10698480" cy="320040"/>
           </a:xfrm>
           <a:prstGeom prst="rect">
             <a:avLst/>
@@ -4873,21 +5352,21 @@
                 </a:solidFill>
                 <a:latin typeface="Segoe UI"/>
               </a:rPr>
-              <a:t>SYSTEM ARCHITECTURE</a:t>
-            </a:r>
-          </a:p>
-        </p:txBody>
-      </p:sp>
-      <p:sp>
-        <p:nvSpPr>
-          <p:cNvPr id="4" name="TextBox 3"/>
+              <a:t>ARCHITECTURE</a:t>
+            </a:r>
+          </a:p>
+        </p:txBody>
+      </p:sp>
+      <p:sp>
+        <p:nvSpPr>
+          <p:cNvPr id="5" name="TextBox 4"/>
           <p:cNvSpPr txBox="1"/>
           <p:nvPr/>
         </p:nvSpPr>
         <p:spPr>
           <a:xfrm>
-            <a:off x="731520" y="685800"/>
-            <a:ext cx="10698480" cy="640080"/>
+            <a:off x="731520" y="640080"/>
+            <a:ext cx="10698480" cy="548640"/>
           </a:xfrm>
           <a:prstGeom prst="rect">
             <a:avLst/>
@@ -4901,20 +5380,76 @@
           <a:lstStyle/>
           <a:p>
             <a:r>
-              <a:rPr sz="2600" b="1">
+              <a:rPr sz="2400" b="1">
                 <a:solidFill>
                   <a:srgbClr val="F8FAFC"/>
                 </a:solidFill>
                 <a:latin typeface="Segoe UI"/>
               </a:rPr>
-              <a:t>Metadata Traversal -&gt; Tiered Content Hasher -&gt; Regret Ranker -&gt; Forecaster</a:t>
-            </a:r>
+              <a:t>Fast Traversal &amp; Multi-Stage Processing Pipeline</a:t>
+            </a:r>
+          </a:p>
+          <a:p>
+            <a:r>
+              <a:rPr sz="1200">
+                <a:solidFill>
+                  <a:srgbClr val="94A3B8"/>
+                </a:solidFill>
+                <a:latin typeface="Segoe UI"/>
+              </a:rPr>
+              <a:t>Metadata Scan -&gt; Tiered Hasher -&gt; Regret Classifier -&gt; Runway Forecaster</a:t>
+            </a:r>
+          </a:p>
+        </p:txBody>
+      </p:sp>
+      <p:sp>
+        <p:nvSpPr>
+          <p:cNvPr id="6" name="Rounded Rectangle 5"/>
+          <p:cNvSpPr/>
+          <p:nvPr/>
+        </p:nvSpPr>
+        <p:spPr>
+          <a:xfrm>
+            <a:off x="731520" y="1463040"/>
+            <a:ext cx="10698480" cy="4937760"/>
+          </a:xfrm>
+          <a:prstGeom prst="roundRect">
+            <a:avLst/>
+          </a:prstGeom>
+          <a:solidFill>
+            <a:srgbClr val="131B2C"/>
+          </a:solidFill>
+          <a:ln w="12700">
+            <a:solidFill>
+              <a:srgbClr val="06B6D4"/>
+            </a:solidFill>
+          </a:ln>
+        </p:spPr>
+        <p:style>
+          <a:lnRef idx="1">
+            <a:schemeClr val="accent1"/>
+          </a:lnRef>
+          <a:fillRef idx="3">
+            <a:schemeClr val="accent1"/>
+          </a:fillRef>
+          <a:effectRef idx="2">
+            <a:schemeClr val="accent1"/>
+          </a:effectRef>
+          <a:fontRef idx="minor">
+            <a:schemeClr val="lt1"/>
+          </a:fontRef>
+        </p:style>
+        <p:txBody>
+          <a:bodyPr rtlCol="0" anchor="ctr"/>
+          <a:lstStyle/>
+          <a:p>
+            <a:pPr algn="ctr"/>
           </a:p>
         </p:txBody>
       </p:sp>
       <p:pic>
         <p:nvPicPr>
-          <p:cNvPr id="5" name="Picture 4" descr="s_arch_slide.jpg"/>
+          <p:cNvPr id="7" name="Picture 6" descr="s_arch_hi.jpg"/>
           <p:cNvPicPr>
             <a:picLocks noChangeAspect="1"/>
           </p:cNvPicPr>
@@ -4928,8 +5463,8 @@
         </p:blipFill>
         <p:spPr>
           <a:xfrm>
-            <a:off x="731520" y="1645920"/>
-            <a:ext cx="10698480" cy="5359938"/>
+            <a:off x="914400" y="1645920"/>
+            <a:ext cx="10332720" cy="5175927"/>
           </a:xfrm>
           <a:prstGeom prst="rect">
             <a:avLst/>
@@ -4969,7 +5504,7 @@
             <a:avLst/>
           </a:prstGeom>
           <a:solidFill>
-            <a:srgbClr val="0B1120"/>
+            <a:srgbClr val="0A0F1D"/>
           </a:solidFill>
           <a:ln>
             <a:noFill/>
@@ -4999,14 +5534,57 @@
       </p:sp>
       <p:sp>
         <p:nvSpPr>
-          <p:cNvPr id="3" name="TextBox 2"/>
+          <p:cNvPr id="3" name="Rectangle 2"/>
+          <p:cNvSpPr/>
+          <p:nvPr/>
+        </p:nvSpPr>
+        <p:spPr>
+          <a:xfrm>
+            <a:off x="0" y="0"/>
+            <a:ext cx="12191695" cy="54864"/>
+          </a:xfrm>
+          <a:prstGeom prst="rect">
+            <a:avLst/>
+          </a:prstGeom>
+          <a:solidFill>
+            <a:srgbClr val="38BDF8"/>
+          </a:solidFill>
+          <a:ln>
+            <a:noFill/>
+          </a:ln>
+        </p:spPr>
+        <p:style>
+          <a:lnRef idx="1">
+            <a:schemeClr val="accent1"/>
+          </a:lnRef>
+          <a:fillRef idx="3">
+            <a:schemeClr val="accent1"/>
+          </a:fillRef>
+          <a:effectRef idx="2">
+            <a:schemeClr val="accent1"/>
+          </a:effectRef>
+          <a:fontRef idx="minor">
+            <a:schemeClr val="lt1"/>
+          </a:fontRef>
+        </p:style>
+        <p:txBody>
+          <a:bodyPr rtlCol="0" anchor="ctr"/>
+          <a:lstStyle/>
+          <a:p>
+            <a:pPr algn="ctr"/>
+          </a:p>
+        </p:txBody>
+      </p:sp>
+      <p:sp>
+        <p:nvSpPr>
+          <p:cNvPr id="4" name="TextBox 3"/>
           <p:cNvSpPr txBox="1"/>
           <p:nvPr/>
         </p:nvSpPr>
         <p:spPr>
           <a:xfrm>
             <a:off x="731520" y="365760"/>
-            <a:ext cx="10698480" cy="365760"/>
+            <a:ext cx="10698480" cy="320040"/>
           </a:xfrm>
           <a:prstGeom prst="rect">
             <a:avLst/>
@@ -5026,21 +5604,21 @@
                 </a:solidFill>
                 <a:latin typeface="Segoe UI"/>
               </a:rPr>
-              <a:t>INTERACTIVE TERMINAL UI</a:t>
-            </a:r>
-          </a:p>
-        </p:txBody>
-      </p:sp>
-      <p:sp>
-        <p:nvSpPr>
-          <p:cNvPr id="4" name="TextBox 3"/>
+              <a:t>INTERFACE</a:t>
+            </a:r>
+          </a:p>
+        </p:txBody>
+      </p:sp>
+      <p:sp>
+        <p:nvSpPr>
+          <p:cNvPr id="5" name="TextBox 4"/>
           <p:cNvSpPr txBox="1"/>
           <p:nvPr/>
         </p:nvSpPr>
         <p:spPr>
           <a:xfrm>
-            <a:off x="731520" y="685800"/>
-            <a:ext cx="10698480" cy="640080"/>
+            <a:off x="731520" y="640080"/>
+            <a:ext cx="10698480" cy="548640"/>
           </a:xfrm>
           <a:prstGeom prst="rect">
             <a:avLst/>
@@ -5054,20 +5632,76 @@
           <a:lstStyle/>
           <a:p>
             <a:r>
-              <a:rPr sz="2600" b="1">
+              <a:rPr sz="2400" b="1">
                 <a:solidFill>
                   <a:srgbClr val="F8FAFC"/>
                 </a:solidFill>
                 <a:latin typeface="Segoe UI"/>
               </a:rPr>
-              <a:t>Responsive Textual Interface with Live Category Filtering</a:t>
-            </a:r>
+              <a:t>Live Operator Terminal UI &amp; HTML Treemap Portal</a:t>
+            </a:r>
+          </a:p>
+          <a:p>
+            <a:r>
+              <a:rPr sz="1200">
+                <a:solidFill>
+                  <a:srgbClr val="94A3B8"/>
+                </a:solidFill>
+                <a:latin typeface="Segoe UI"/>
+              </a:rPr>
+              <a:t>Built with Textual — live category filters, color-coded recoverability rows, and interactive Plotly report.</a:t>
+            </a:r>
+          </a:p>
+        </p:txBody>
+      </p:sp>
+      <p:sp>
+        <p:nvSpPr>
+          <p:cNvPr id="6" name="Rounded Rectangle 5"/>
+          <p:cNvSpPr/>
+          <p:nvPr/>
+        </p:nvSpPr>
+        <p:spPr>
+          <a:xfrm>
+            <a:off x="731520" y="1463040"/>
+            <a:ext cx="10698480" cy="4937760"/>
+          </a:xfrm>
+          <a:prstGeom prst="roundRect">
+            <a:avLst/>
+          </a:prstGeom>
+          <a:solidFill>
+            <a:srgbClr val="131B2C"/>
+          </a:solidFill>
+          <a:ln w="12700">
+            <a:solidFill>
+              <a:srgbClr val="10B981"/>
+            </a:solidFill>
+          </a:ln>
+        </p:spPr>
+        <p:style>
+          <a:lnRef idx="1">
+            <a:schemeClr val="accent1"/>
+          </a:lnRef>
+          <a:fillRef idx="3">
+            <a:schemeClr val="accent1"/>
+          </a:fillRef>
+          <a:effectRef idx="2">
+            <a:schemeClr val="accent1"/>
+          </a:effectRef>
+          <a:fontRef idx="minor">
+            <a:schemeClr val="lt1"/>
+          </a:fontRef>
+        </p:style>
+        <p:txBody>
+          <a:bodyPr rtlCol="0" anchor="ctr"/>
+          <a:lstStyle/>
+          <a:p>
+            <a:pPr algn="ctr"/>
           </a:p>
         </p:txBody>
       </p:sp>
       <p:pic>
         <p:nvPicPr>
-          <p:cNvPr id="5" name="Picture 4" descr="s_tui_slide.jpg"/>
+          <p:cNvPr id="7" name="Picture 6" descr="s_tui_hi.jpg"/>
           <p:cNvPicPr>
             <a:picLocks noChangeAspect="1"/>
           </p:cNvPicPr>
@@ -5081,8 +5715,8 @@
         </p:blipFill>
         <p:spPr>
           <a:xfrm>
-            <a:off x="1371600" y="1645920"/>
-            <a:ext cx="9418320" cy="5891255"/>
+            <a:off x="1280160" y="1600200"/>
+            <a:ext cx="9601200" cy="6005456"/>
           </a:xfrm>
           <a:prstGeom prst="rect">
             <a:avLst/>
@@ -5122,7 +5756,7 @@
             <a:avLst/>
           </a:prstGeom>
           <a:solidFill>
-            <a:srgbClr val="0B1120"/>
+            <a:srgbClr val="0A0F1D"/>
           </a:solidFill>
           <a:ln>
             <a:noFill/>
@@ -5152,93 +5786,23 @@
       </p:sp>
       <p:sp>
         <p:nvSpPr>
-          <p:cNvPr id="3" name="TextBox 2"/>
-          <p:cNvSpPr txBox="1"/>
+          <p:cNvPr id="3" name="Rectangle 2"/>
+          <p:cNvSpPr/>
           <p:nvPr/>
         </p:nvSpPr>
         <p:spPr>
           <a:xfrm>
-            <a:off x="731520" y="365760"/>
-            <a:ext cx="10698480" cy="365760"/>
+            <a:off x="0" y="0"/>
+            <a:ext cx="12191695" cy="54864"/>
           </a:xfrm>
           <a:prstGeom prst="rect">
             <a:avLst/>
           </a:prstGeom>
-          <a:noFill/>
-        </p:spPr>
-        <p:txBody>
-          <a:bodyPr wrap="square">
-            <a:spAutoFit/>
-          </a:bodyPr>
-          <a:lstStyle/>
-          <a:p>
-            <a:r>
-              <a:rPr sz="1100" b="1">
-                <a:solidFill>
-                  <a:srgbClr val="38BDF8"/>
-                </a:solidFill>
-                <a:latin typeface="Segoe UI"/>
-              </a:rPr>
-              <a:t>OPEN SOURCE TECH STACK &amp; COMPLIANCE</a:t>
-            </a:r>
-          </a:p>
-        </p:txBody>
-      </p:sp>
-      <p:sp>
-        <p:nvSpPr>
-          <p:cNvPr id="4" name="TextBox 3"/>
-          <p:cNvSpPr txBox="1"/>
-          <p:nvPr/>
-        </p:nvSpPr>
-        <p:spPr>
-          <a:xfrm>
-            <a:off x="731520" y="685800"/>
-            <a:ext cx="10698480" cy="640080"/>
-          </a:xfrm>
-          <a:prstGeom prst="rect">
-            <a:avLst/>
-          </a:prstGeom>
-          <a:noFill/>
-        </p:spPr>
-        <p:txBody>
-          <a:bodyPr wrap="square">
-            <a:spAutoFit/>
-          </a:bodyPr>
-          <a:lstStyle/>
-          <a:p>
-            <a:r>
-              <a:rPr sz="2600" b="1">
-                <a:solidFill>
-                  <a:srgbClr val="F8FAFC"/>
-                </a:solidFill>
-                <a:latin typeface="Segoe UI"/>
-              </a:rPr>
-              <a:t>Zero-Dependency Core, Fast Blake2b Hashing, DPDP Act 2023 Compliant</a:t>
-            </a:r>
-          </a:p>
-        </p:txBody>
-      </p:sp>
-      <p:sp>
-        <p:nvSpPr>
-          <p:cNvPr id="5" name="Rounded Rectangle 4"/>
-          <p:cNvSpPr/>
-          <p:nvPr/>
-        </p:nvSpPr>
-        <p:spPr>
-          <a:xfrm>
-            <a:off x="731520" y="1645920"/>
-            <a:ext cx="5120640" cy="4572000"/>
-          </a:xfrm>
-          <a:prstGeom prst="roundRect">
-            <a:avLst/>
-          </a:prstGeom>
           <a:solidFill>
-            <a:srgbClr val="161E2E"/>
+            <a:srgbClr val="38BDF8"/>
           </a:solidFill>
-          <a:ln w="12700">
-            <a:solidFill>
-              <a:srgbClr val="2D3B55"/>
-            </a:solidFill>
+          <a:ln>
+            <a:noFill/>
           </a:ln>
         </p:spPr>
         <p:style>
@@ -5265,14 +5829,14 @@
       </p:sp>
       <p:sp>
         <p:nvSpPr>
-          <p:cNvPr id="6" name="TextBox 5"/>
+          <p:cNvPr id="4" name="TextBox 3"/>
           <p:cNvSpPr txBox="1"/>
           <p:nvPr/>
         </p:nvSpPr>
         <p:spPr>
           <a:xfrm>
-            <a:off x="914400" y="1783080"/>
-            <a:ext cx="4754879" cy="4297680"/>
+            <a:off x="731520" y="365760"/>
+            <a:ext cx="10698480" cy="320040"/>
           </a:xfrm>
           <a:prstGeom prst="rect">
             <a:avLst/>
@@ -5285,19 +5849,152 @@
           </a:bodyPr>
           <a:lstStyle/>
           <a:p>
+            <a:r>
+              <a:rPr sz="1100" b="1">
+                <a:solidFill>
+                  <a:srgbClr val="38BDF8"/>
+                </a:solidFill>
+                <a:latin typeface="Segoe UI"/>
+              </a:rPr>
+              <a:t>ENGINEERING &amp; SOVEREIGNTY</a:t>
+            </a:r>
+          </a:p>
+        </p:txBody>
+      </p:sp>
+      <p:sp>
+        <p:nvSpPr>
+          <p:cNvPr id="5" name="TextBox 4"/>
+          <p:cNvSpPr txBox="1"/>
+          <p:nvPr/>
+        </p:nvSpPr>
+        <p:spPr>
+          <a:xfrm>
+            <a:off x="731520" y="640080"/>
+            <a:ext cx="10698480" cy="548640"/>
+          </a:xfrm>
+          <a:prstGeom prst="rect">
+            <a:avLst/>
+          </a:prstGeom>
+          <a:noFill/>
+        </p:spPr>
+        <p:txBody>
+          <a:bodyPr wrap="square">
+            <a:spAutoFit/>
+          </a:bodyPr>
+          <a:lstStyle/>
+          <a:p>
+            <a:r>
+              <a:rPr sz="2400" b="1">
+                <a:solidFill>
+                  <a:srgbClr val="F8FAFC"/>
+                </a:solidFill>
+                <a:latin typeface="Segoe UI"/>
+              </a:rPr>
+              <a:t>Open Source Stack, DPDP Act 2023 &amp; Indigenous Utility</a:t>
+            </a:r>
+          </a:p>
+          <a:p>
+            <a:r>
+              <a:rPr sz="1200">
+                <a:solidFill>
+                  <a:srgbClr val="94A3B8"/>
+                </a:solidFill>
+                <a:latin typeface="Segoe UI"/>
+              </a:rPr>
+              <a:t>Zero-dependency core, tiered Blake2b hashing, and DPDP Act 2023 compliant storage optimization.</a:t>
+            </a:r>
+          </a:p>
+        </p:txBody>
+      </p:sp>
+      <p:sp>
+        <p:nvSpPr>
+          <p:cNvPr id="6" name="Rounded Rectangle 5"/>
+          <p:cNvSpPr/>
+          <p:nvPr/>
+        </p:nvSpPr>
+        <p:spPr>
+          <a:xfrm>
+            <a:off x="731520" y="1554480"/>
+            <a:ext cx="5120640" cy="4846320"/>
+          </a:xfrm>
+          <a:prstGeom prst="roundRect">
+            <a:avLst/>
+          </a:prstGeom>
+          <a:solidFill>
+            <a:srgbClr val="131B2C"/>
+          </a:solidFill>
+          <a:ln w="12700">
+            <a:solidFill>
+              <a:srgbClr val="26334D"/>
+            </a:solidFill>
+          </a:ln>
+        </p:spPr>
+        <p:style>
+          <a:lnRef idx="1">
+            <a:schemeClr val="accent1"/>
+          </a:lnRef>
+          <a:fillRef idx="3">
+            <a:schemeClr val="accent1"/>
+          </a:fillRef>
+          <a:effectRef idx="2">
+            <a:schemeClr val="accent1"/>
+          </a:effectRef>
+          <a:fontRef idx="minor">
+            <a:schemeClr val="lt1"/>
+          </a:fontRef>
+        </p:style>
+        <p:txBody>
+          <a:bodyPr rtlCol="0" anchor="ctr"/>
+          <a:lstStyle/>
+          <a:p>
+            <a:pPr algn="ctr"/>
+          </a:p>
+        </p:txBody>
+      </p:sp>
+      <p:sp>
+        <p:nvSpPr>
+          <p:cNvPr id="7" name="TextBox 6"/>
+          <p:cNvSpPr txBox="1"/>
+          <p:nvPr/>
+        </p:nvSpPr>
+        <p:spPr>
+          <a:xfrm>
+            <a:off x="932688" y="1719072"/>
+            <a:ext cx="4718303" cy="4517136"/>
+          </a:xfrm>
+          <a:prstGeom prst="rect">
+            <a:avLst/>
+          </a:prstGeom>
+          <a:noFill/>
+        </p:spPr>
+        <p:txBody>
+          <a:bodyPr wrap="square">
+            <a:spAutoFit/>
+          </a:bodyPr>
+          <a:lstStyle/>
+          <a:p>
             <a:pPr>
               <a:spcAft>
-                <a:spcPts val="800"/>
+                <a:spcPts val="1000"/>
               </a:spcAft>
             </a:pPr>
             <a:r>
-              <a:rPr sz="1700" b="1">
+              <a:rPr sz="1100" b="1">
                 <a:solidFill>
                   <a:srgbClr val="38BDF8"/>
                 </a:solidFill>
                 <a:latin typeface="Segoe UI"/>
               </a:rPr>
-              <a:t>Tech Stack &amp; Optimization</a:t>
+              <a:t>[OPEN SOURCE TECH STACK] </a:t>
+            </a:r>
+            <a:r>
+              <a:rPr sz="1600" b="1">
+                <a:solidFill>
+                  <a:srgbClr val="F8FAFC"/>
+                </a:solidFill>
+                <a:latin typeface="Segoe UI"/>
+              </a:rPr>
+              <a:t>Zero-Dependency Core</a:t>
             </a:r>
           </a:p>
           <a:p>
@@ -5307,22 +6004,22 @@
               </a:spcAft>
             </a:pPr>
             <a:r>
-              <a:rPr sz="1300" b="1">
-                <a:solidFill>
-                  <a:srgbClr val="34D399"/>
-                </a:solidFill>
-                <a:latin typeface="Segoe UI"/>
-              </a:rPr>
-              <a:t>Zero Dependency Core: </a:t>
-            </a:r>
-            <a:r>
-              <a:rPr sz="1300">
+              <a:rPr sz="1250" b="1">
+                <a:solidFill>
+                  <a:srgbClr val="38BDF8"/>
+                </a:solidFill>
+                <a:latin typeface="Segoe UI"/>
+              </a:rPr>
+              <a:t>Language &amp; Core: </a:t>
+            </a:r>
+            <a:r>
+              <a:rPr sz="1250">
                 <a:solidFill>
                   <a:srgbClr val="F8FAFC"/>
                 </a:solidFill>
                 <a:latin typeface="Segoe UI"/>
               </a:rPr>
-              <a:t>Standard library os, hashlib, time. Core installs and runs anywhere.</a:t>
+              <a:t>Python 3.9+ standard library (os, hashlib, time, dataclasses). Zero external dependencies required for core scanner.</a:t>
             </a:r>
           </a:p>
           <a:p>
@@ -5332,16 +6029,16 @@
               </a:spcAft>
             </a:pPr>
             <a:r>
-              <a:rPr sz="1300" b="1">
-                <a:solidFill>
-                  <a:srgbClr val="38BDF8"/>
+              <a:rPr sz="1250" b="1">
+                <a:solidFill>
+                  <a:srgbClr val="34D399"/>
                 </a:solidFill>
                 <a:latin typeface="Segoe UI"/>
               </a:rPr>
               <a:t>Tiered Hashing: </a:t>
             </a:r>
             <a:r>
-              <a:rPr sz="1300">
+              <a:rPr sz="1250">
                 <a:solidFill>
                   <a:srgbClr val="F8FAFC"/>
                 </a:solidFill>
@@ -5357,22 +6054,22 @@
               </a:spcAft>
             </a:pPr>
             <a:r>
-              <a:rPr sz="1300" b="1">
+              <a:rPr sz="1250" b="1">
                 <a:solidFill>
                   <a:srgbClr val="F8FAFC"/>
                 </a:solidFill>
                 <a:latin typeface="Segoe UI"/>
               </a:rPr>
-              <a:t>Terminal TUI: </a:t>
-            </a:r>
-            <a:r>
-              <a:rPr sz="1300">
+              <a:t>Operator Interface: </a:t>
+            </a:r>
+            <a:r>
+              <a:rPr sz="1250">
                 <a:solidFill>
                   <a:srgbClr val="F8FAFC"/>
                 </a:solidFill>
                 <a:latin typeface="Segoe UI"/>
               </a:rPr>
-              <a:t>Textual (MIT) — interactive category keys [d]isposable, [u]duplicates, [t]racked.</a:t>
+              <a:t>Textual (MIT) TUI with interactive category hotkeys [d],[u],[t],[a].</a:t>
             </a:r>
           </a:p>
           <a:p>
@@ -5382,46 +6079,96 @@
               </a:spcAft>
             </a:pPr>
             <a:r>
-              <a:rPr sz="1300" b="1">
+              <a:rPr sz="1250" b="1">
                 <a:solidFill>
                   <a:srgbClr val="94A3B8"/>
                 </a:solidFill>
                 <a:latin typeface="Segoe UI"/>
               </a:rPr>
-              <a:t>Treemap Viz: </a:t>
-            </a:r>
-            <a:r>
-              <a:rPr sz="1300">
+              <a:t>HTML Dashboard: </a:t>
+            </a:r>
+            <a:r>
+              <a:rPr sz="1250">
                 <a:solidFill>
                   <a:srgbClr val="F8FAFC"/>
                 </a:solidFill>
                 <a:latin typeface="Segoe UI"/>
               </a:rPr>
-              <a:t>Plotly (MIT) and Pandas (BSD-3) recoverability treemap.</a:t>
-            </a:r>
-          </a:p>
-        </p:txBody>
-      </p:sp>
-      <p:sp>
-        <p:nvSpPr>
-          <p:cNvPr id="7" name="Rounded Rectangle 6"/>
+              <a:t>Plotly &amp; Pandas interactive recoverability treemap (sanchay-report.html).</a:t>
+            </a:r>
+          </a:p>
+          <a:p>
+            <a:pPr>
+              <a:spcAft>
+                <a:spcPts val="600"/>
+              </a:spcAft>
+            </a:pPr>
+            <a:r>
+              <a:rPr sz="1250" b="1">
+                <a:solidFill>
+                  <a:srgbClr val="34D399"/>
+                </a:solidFill>
+                <a:latin typeface="Segoe UI"/>
+              </a:rPr>
+              <a:t>Automated Tests: </a:t>
+            </a:r>
+            <a:r>
+              <a:rPr sz="1250">
+                <a:solidFill>
+                  <a:srgbClr val="F8FAFC"/>
+                </a:solidFill>
+                <a:latin typeface="Segoe UI"/>
+              </a:rPr>
+              <a:t>100% test coverage with GitHub Actions CI workflow.</a:t>
+            </a:r>
+          </a:p>
+          <a:p>
+            <a:pPr>
+              <a:spcAft>
+                <a:spcPts val="600"/>
+              </a:spcAft>
+            </a:pPr>
+            <a:r>
+              <a:rPr sz="1250" b="1">
+                <a:solidFill>
+                  <a:srgbClr val="34D399"/>
+                </a:solidFill>
+                <a:latin typeface="Segoe UI"/>
+              </a:rPr>
+              <a:t>Licensing: </a:t>
+            </a:r>
+            <a:r>
+              <a:rPr sz="1250">
+                <a:solidFill>
+                  <a:srgbClr val="F8FAFC"/>
+                </a:solidFill>
+                <a:latin typeface="Segoe UI"/>
+              </a:rPr>
+              <a:t>100% Open Source under the MIT License.</a:t>
+            </a:r>
+          </a:p>
+        </p:txBody>
+      </p:sp>
+      <p:sp>
+        <p:nvSpPr>
+          <p:cNvPr id="8" name="Rounded Rectangle 7"/>
           <p:cNvSpPr/>
           <p:nvPr/>
         </p:nvSpPr>
         <p:spPr>
           <a:xfrm>
-            <a:off x="6217920" y="1645920"/>
-            <a:ext cx="5120640" cy="4572000"/>
+            <a:off x="6217920" y="1554480"/>
+            <a:ext cx="5120640" cy="4846320"/>
           </a:xfrm>
           <a:prstGeom prst="roundRect">
             <a:avLst/>
           </a:prstGeom>
           <a:solidFill>
-            <a:srgbClr val="161E2E"/>
+            <a:srgbClr val="131B2C"/>
           </a:solidFill>
           <a:ln w="12700">
             <a:solidFill>
-              <a:srgbClr val="2D3B55"/>
+              <a:srgbClr val="10B981"/>
             </a:solidFill>
           </a:ln>
         </p:spPr>
@@ -5449,14 +6196,14 @@
       </p:sp>
       <p:sp>
         <p:nvSpPr>
-          <p:cNvPr id="8" name="TextBox 7"/>
+          <p:cNvPr id="9" name="TextBox 8"/>
           <p:cNvSpPr txBox="1"/>
           <p:nvPr/>
         </p:nvSpPr>
         <p:spPr>
           <a:xfrm>
-            <a:off x="6400800" y="1783080"/>
-            <a:ext cx="4754879" cy="4297680"/>
+            <a:off x="6419088" y="1719072"/>
+            <a:ext cx="4718303" cy="4517136"/>
           </a:xfrm>
           <a:prstGeom prst="rect">
             <a:avLst/>
@@ -5471,17 +6218,26 @@
           <a:p>
             <a:pPr>
               <a:spcAft>
-                <a:spcPts val="800"/>
+                <a:spcPts val="1000"/>
               </a:spcAft>
             </a:pPr>
             <a:r>
-              <a:rPr sz="1700" b="1">
+              <a:rPr sz="1100" b="1">
                 <a:solidFill>
                   <a:srgbClr val="34D399"/>
                 </a:solidFill>
                 <a:latin typeface="Segoe UI"/>
               </a:rPr>
-              <a:t>Privacy &amp; Data Protection</a:t>
+              <a:t>[COMPLIANCE &amp; IMPACT] </a:t>
+            </a:r>
+            <a:r>
+              <a:rPr sz="1600" b="1">
+                <a:solidFill>
+                  <a:srgbClr val="F8FAFC"/>
+                </a:solidFill>
+                <a:latin typeface="Segoe UI"/>
+              </a:rPr>
+              <a:t>DPDP Act 2023 &amp; Sovereign Utility</a:t>
             </a:r>
           </a:p>
           <a:p>
@@ -5491,22 +6247,22 @@
               </a:spcAft>
             </a:pPr>
             <a:r>
-              <a:rPr sz="1300" b="1">
+              <a:rPr sz="1250" b="1">
                 <a:solidFill>
                   <a:srgbClr val="34D399"/>
                 </a:solidFill>
                 <a:latin typeface="Segoe UI"/>
               </a:rPr>
-              <a:t>DPDP Act 2023: </a:t>
-            </a:r>
-            <a:r>
-              <a:rPr sz="1300">
+              <a:t>DPDP Act 2023 Compliance: </a:t>
+            </a:r>
+            <a:r>
+              <a:rPr sz="1250">
                 <a:solidFill>
                   <a:srgbClr val="F8FAFC"/>
                 </a:solidFill>
                 <a:latin typeface="Segoe UI"/>
               </a:rPr>
-              <a:t>Zero file contents transmitted or retained. Only metadata is processed locally.</a:t>
+              <a:t>Zero file contents read or transmitted off-device. Operates strictly on local metadata, preserving complete privacy.</a:t>
             </a:r>
           </a:p>
           <a:p>
@@ -5516,22 +6272,22 @@
               </a:spcAft>
             </a:pPr>
             <a:r>
-              <a:rPr sz="1300" b="1">
-                <a:solidFill>
-                  <a:srgbClr val="34D399"/>
-                </a:solidFill>
-                <a:latin typeface="Segoe UI"/>
-              </a:rPr>
-              <a:t>Git Tracked Precision: </a:t>
-            </a:r>
-            <a:r>
-              <a:rPr sz="1300">
+              <a:rPr sz="1250" b="1">
+                <a:solidFill>
+                  <a:srgbClr val="38BDF8"/>
+                </a:solidFill>
+                <a:latin typeface="Segoe UI"/>
+              </a:rPr>
+              <a:t>Hardlink Awareness: </a:t>
+            </a:r>
+            <a:r>
+              <a:rPr sz="1250">
                 <a:solidFill>
                   <a:srgbClr val="F8FAFC"/>
                 </a:solidFill>
                 <a:latin typeface="Segoe UI"/>
               </a:rPr>
-              <a:t>Queries git index directly to ensure untracked workspace files remain protected.</a:t>
+              <a:t>Recognizes shared inodes so hardlinks are not falsely counted as reclaimable space.</a:t>
             </a:r>
           </a:p>
           <a:p>
@@ -5541,22 +6297,22 @@
               </a:spcAft>
             </a:pPr>
             <a:r>
-              <a:rPr sz="1300" b="1">
-                <a:solidFill>
-                  <a:srgbClr val="38BDF8"/>
-                </a:solidFill>
-                <a:latin typeface="Segoe UI"/>
-              </a:rPr>
-              <a:t>Hardlink Awareness: </a:t>
-            </a:r>
-            <a:r>
-              <a:rPr sz="1300">
+              <a:rPr sz="1250" b="1">
                 <a:solidFill>
                   <a:srgbClr val="F8FAFC"/>
                 </a:solidFill>
                 <a:latin typeface="Segoe UI"/>
               </a:rPr>
-              <a:t>Hardlinks sharing identical inodes are not double-counted as duplicates.</a:t>
+              <a:t>Server &amp; Desktop Utility: </a:t>
+            </a:r>
+            <a:r>
+              <a:rPr sz="1250">
+                <a:solidFill>
+                  <a:srgbClr val="F8FAFC"/>
+                </a:solidFill>
+                <a:latin typeface="Segoe UI"/>
+              </a:rPr>
+              <a:t>Works over SSH on headless Linux servers as well as desktop workstations.</a:t>
             </a:r>
           </a:p>
           <a:p>
@@ -5566,22 +6322,22 @@
               </a:spcAft>
             </a:pPr>
             <a:r>
-              <a:rPr sz="1300" b="1">
+              <a:rPr sz="1250" b="1">
                 <a:solidFill>
                   <a:srgbClr val="34D399"/>
                 </a:solidFill>
                 <a:latin typeface="Segoe UI"/>
               </a:rPr>
-              <a:t>Indigenous Utility: </a:t>
-            </a:r>
-            <a:r>
-              <a:rPr sz="1300">
+              <a:t>Indigenous Self-Reliance: </a:t>
+            </a:r>
+            <a:r>
+              <a:rPr sz="1250">
                 <a:solidFill>
                   <a:srgbClr val="F8FAFC"/>
                 </a:solidFill>
                 <a:latin typeface="Segoe UI"/>
               </a:rPr>
-              <a:t>Lightweight, sovereign Linux storage optimizer for Indian enterprise &amp; desktops.</a:t>
+              <a:t>Sovereign Linux storage intelligence framework tailored for Indian cloud and enterprise infrastructure.</a:t>
             </a:r>
           </a:p>
         </p:txBody>

--- a/docs/SANCHAY.pptx
+++ b/docs/SANCHAY.pptx
@@ -3152,7 +3152,7 @@
             <a:avLst/>
           </a:prstGeom>
           <a:solidFill>
-            <a:srgbClr val="38BDF8"/>
+            <a:srgbClr val="34D399"/>
           </a:solidFill>
           <a:ln>
             <a:noFill/>
@@ -3188,7 +3188,7 @@
         </p:nvSpPr>
         <p:spPr>
           <a:xfrm>
-            <a:off x="914400" y="1371600"/>
+            <a:off x="914400" y="1097280"/>
             <a:ext cx="10332720" cy="365760"/>
           </a:xfrm>
           <a:prstGeom prst="rect">
@@ -3209,7 +3209,7 @@
                 </a:solidFill>
                 <a:latin typeface="Segoe UI"/>
               </a:rPr>
-              <a:t>C-DAC / MEITY AI ENABLED OS HACKATHON 2026  •  TRACK 1 (APPLICATION LEVEL)</a:t>
+              <a:t>C-DAC / MEITY AI ENABLED OS HACKATHON 2026  •  TRACK 1: AI AT APPLICATION LEVEL</a:t>
             </a:r>
           </a:p>
         </p:txBody>
@@ -3222,7 +3222,7 @@
         </p:nvSpPr>
         <p:spPr>
           <a:xfrm>
-            <a:off x="914400" y="1828800"/>
+            <a:off x="914400" y="1554480"/>
             <a:ext cx="10332720" cy="1280160"/>
           </a:xfrm>
           <a:prstGeom prst="rect">
@@ -3248,7 +3248,7 @@
           </a:p>
           <a:p>
             <a:r>
-              <a:rPr sz="2200" b="1">
+              <a:rPr sz="2100" b="1">
                 <a:solidFill>
                   <a:srgbClr val="34D399"/>
                 </a:solidFill>
@@ -3261,14 +3261,59 @@
       </p:sp>
       <p:sp>
         <p:nvSpPr>
-          <p:cNvPr id="6" name="TextBox 5"/>
+          <p:cNvPr id="6" name="Rounded Rectangle 5"/>
+          <p:cNvSpPr/>
+          <p:nvPr/>
+        </p:nvSpPr>
+        <p:spPr>
+          <a:xfrm>
+            <a:off x="914400" y="3200400"/>
+            <a:ext cx="3291840" cy="1188720"/>
+          </a:xfrm>
+          <a:prstGeom prst="roundRect">
+            <a:avLst/>
+          </a:prstGeom>
+          <a:solidFill>
+            <a:srgbClr val="131B2C"/>
+          </a:solidFill>
+          <a:ln w="12700">
+            <a:solidFill>
+              <a:srgbClr val="34D399"/>
+            </a:solidFill>
+          </a:ln>
+        </p:spPr>
+        <p:style>
+          <a:lnRef idx="1">
+            <a:schemeClr val="accent1"/>
+          </a:lnRef>
+          <a:fillRef idx="3">
+            <a:schemeClr val="accent1"/>
+          </a:fillRef>
+          <a:effectRef idx="2">
+            <a:schemeClr val="accent1"/>
+          </a:effectRef>
+          <a:fontRef idx="minor">
+            <a:schemeClr val="lt1"/>
+          </a:fontRef>
+        </p:style>
+        <p:txBody>
+          <a:bodyPr rtlCol="0" anchor="ctr"/>
+          <a:lstStyle/>
+          <a:p>
+            <a:pPr algn="ctr"/>
+          </a:p>
+        </p:txBody>
+      </p:sp>
+      <p:sp>
+        <p:nvSpPr>
+          <p:cNvPr id="7" name="TextBox 6"/>
           <p:cNvSpPr txBox="1"/>
           <p:nvPr/>
         </p:nvSpPr>
         <p:spPr>
           <a:xfrm>
-            <a:off x="914400" y="3657600"/>
-            <a:ext cx="10332720" cy="914400"/>
+            <a:off x="1051560" y="3291840"/>
+            <a:ext cx="3017520" cy="1005840"/>
           </a:xfrm>
           <a:prstGeom prst="rect">
             <a:avLst/>
@@ -3276,33 +3321,257 @@
           <a:noFill/>
         </p:spPr>
         <p:txBody>
-          <a:bodyPr wrap="none">
+          <a:bodyPr wrap="square">
             <a:spAutoFit/>
           </a:bodyPr>
           <a:lstStyle/>
           <a:p>
             <a:r>
-              <a:rPr sz="1600">
+              <a:rPr sz="2600" b="1">
+                <a:solidFill>
+                  <a:srgbClr val="34D399"/>
+                </a:solidFill>
+                <a:latin typeface="Segoe UI"/>
+              </a:rPr>
+              <a:t>100% Zero Loss</a:t>
+            </a:r>
+          </a:p>
+          <a:p>
+            <a:r>
+              <a:rPr sz="1200" b="1">
+                <a:solidFill>
+                  <a:srgbClr val="F8FAFC"/>
+                </a:solidFill>
+                <a:latin typeface="Segoe UI"/>
+              </a:rPr>
+              <a:t>Irreplaceable Files Excluded</a:t>
+            </a:r>
+          </a:p>
+          <a:p>
+            <a:r>
+              <a:rPr sz="1050">
                 <a:solidFill>
                   <a:srgbClr val="94A3B8"/>
                 </a:solidFill>
                 <a:latin typeface="Segoe UI"/>
               </a:rPr>
-              <a:t>Safe automatic disk cleanup that ranks files by recoverability, not just raw byte size.</a:t>
-            </a:r>
-          </a:p>
-        </p:txBody>
-      </p:sp>
-      <p:sp>
-        <p:nvSpPr>
-          <p:cNvPr id="7" name="Rounded Rectangle 6"/>
+              <a:t>Regret = 1.00 mathematically locked</a:t>
+            </a:r>
+          </a:p>
+        </p:txBody>
+      </p:sp>
+      <p:sp>
+        <p:nvSpPr>
+          <p:cNvPr id="8" name="Rounded Rectangle 7"/>
           <p:cNvSpPr/>
           <p:nvPr/>
         </p:nvSpPr>
         <p:spPr>
           <a:xfrm>
-            <a:off x="914400" y="5029200"/>
-            <a:ext cx="10360152" cy="1097280"/>
+            <a:off x="4434840" y="3200400"/>
+            <a:ext cx="3291840" cy="1188720"/>
+          </a:xfrm>
+          <a:prstGeom prst="roundRect">
+            <a:avLst/>
+          </a:prstGeom>
+          <a:solidFill>
+            <a:srgbClr val="131B2C"/>
+          </a:solidFill>
+          <a:ln w="12700">
+            <a:solidFill>
+              <a:srgbClr val="38BDF8"/>
+            </a:solidFill>
+          </a:ln>
+        </p:spPr>
+        <p:style>
+          <a:lnRef idx="1">
+            <a:schemeClr val="accent1"/>
+          </a:lnRef>
+          <a:fillRef idx="3">
+            <a:schemeClr val="accent1"/>
+          </a:fillRef>
+          <a:effectRef idx="2">
+            <a:schemeClr val="accent1"/>
+          </a:effectRef>
+          <a:fontRef idx="minor">
+            <a:schemeClr val="lt1"/>
+          </a:fontRef>
+        </p:style>
+        <p:txBody>
+          <a:bodyPr rtlCol="0" anchor="ctr"/>
+          <a:lstStyle/>
+          <a:p>
+            <a:pPr algn="ctr"/>
+          </a:p>
+        </p:txBody>
+      </p:sp>
+      <p:sp>
+        <p:nvSpPr>
+          <p:cNvPr id="9" name="TextBox 8"/>
+          <p:cNvSpPr txBox="1"/>
+          <p:nvPr/>
+        </p:nvSpPr>
+        <p:spPr>
+          <a:xfrm>
+            <a:off x="4572000" y="3291840"/>
+            <a:ext cx="3017520" cy="1005840"/>
+          </a:xfrm>
+          <a:prstGeom prst="rect">
+            <a:avLst/>
+          </a:prstGeom>
+          <a:noFill/>
+        </p:spPr>
+        <p:txBody>
+          <a:bodyPr wrap="square">
+            <a:spAutoFit/>
+          </a:bodyPr>
+          <a:lstStyle/>
+          <a:p>
+            <a:r>
+              <a:rPr sz="2600" b="1">
+                <a:solidFill>
+                  <a:srgbClr val="38BDF8"/>
+                </a:solidFill>
+                <a:latin typeface="Segoe UI"/>
+              </a:rPr>
+              <a:t>1-Scan Forecast</a:t>
+            </a:r>
+          </a:p>
+          <a:p>
+            <a:r>
+              <a:rPr sz="1200" b="1">
+                <a:solidFill>
+                  <a:srgbClr val="F8FAFC"/>
+                </a:solidFill>
+                <a:latin typeface="Segoe UI"/>
+              </a:rPr>
+              <a:t>Modification-Time Distribution</a:t>
+            </a:r>
+          </a:p>
+          <a:p>
+            <a:r>
+              <a:rPr sz="1050">
+                <a:solidFill>
+                  <a:srgbClr val="94A3B8"/>
+                </a:solidFill>
+                <a:latin typeface="Segoe UI"/>
+              </a:rPr>
+              <a:t>Days-until-full date without daemons</a:t>
+            </a:r>
+          </a:p>
+        </p:txBody>
+      </p:sp>
+      <p:sp>
+        <p:nvSpPr>
+          <p:cNvPr id="10" name="Rounded Rectangle 9"/>
+          <p:cNvSpPr/>
+          <p:nvPr/>
+        </p:nvSpPr>
+        <p:spPr>
+          <a:xfrm>
+            <a:off x="7955279" y="3200400"/>
+            <a:ext cx="3291840" cy="1188720"/>
+          </a:xfrm>
+          <a:prstGeom prst="roundRect">
+            <a:avLst/>
+          </a:prstGeom>
+          <a:solidFill>
+            <a:srgbClr val="131B2C"/>
+          </a:solidFill>
+          <a:ln w="12700">
+            <a:solidFill>
+              <a:srgbClr val="C084FC"/>
+            </a:solidFill>
+          </a:ln>
+        </p:spPr>
+        <p:style>
+          <a:lnRef idx="1">
+            <a:schemeClr val="accent1"/>
+          </a:lnRef>
+          <a:fillRef idx="3">
+            <a:schemeClr val="accent1"/>
+          </a:fillRef>
+          <a:effectRef idx="2">
+            <a:schemeClr val="accent1"/>
+          </a:effectRef>
+          <a:fontRef idx="minor">
+            <a:schemeClr val="lt1"/>
+          </a:fontRef>
+        </p:style>
+        <p:txBody>
+          <a:bodyPr rtlCol="0" anchor="ctr"/>
+          <a:lstStyle/>
+          <a:p>
+            <a:pPr algn="ctr"/>
+          </a:p>
+        </p:txBody>
+      </p:sp>
+      <p:sp>
+        <p:nvSpPr>
+          <p:cNvPr id="11" name="TextBox 10"/>
+          <p:cNvSpPr txBox="1"/>
+          <p:nvPr/>
+        </p:nvSpPr>
+        <p:spPr>
+          <a:xfrm>
+            <a:off x="8092440" y="3291840"/>
+            <a:ext cx="3017520" cy="1005840"/>
+          </a:xfrm>
+          <a:prstGeom prst="rect">
+            <a:avLst/>
+          </a:prstGeom>
+          <a:noFill/>
+        </p:spPr>
+        <p:txBody>
+          <a:bodyPr wrap="square">
+            <a:spAutoFit/>
+          </a:bodyPr>
+          <a:lstStyle/>
+          <a:p>
+            <a:r>
+              <a:rPr sz="2600" b="1">
+                <a:solidFill>
+                  <a:srgbClr val="C084FC"/>
+                </a:solidFill>
+                <a:latin typeface="Segoe UI"/>
+              </a:rPr>
+              <a:t>0 Dependencies</a:t>
+            </a:r>
+          </a:p>
+          <a:p>
+            <a:r>
+              <a:rPr sz="1200" b="1">
+                <a:solidFill>
+                  <a:srgbClr val="F8FAFC"/>
+                </a:solidFill>
+                <a:latin typeface="Segoe UI"/>
+              </a:rPr>
+              <a:t>Standard Library Core</a:t>
+            </a:r>
+          </a:p>
+          <a:p>
+            <a:r>
+              <a:rPr sz="1050">
+                <a:solidFill>
+                  <a:srgbClr val="94A3B8"/>
+                </a:solidFill>
+                <a:latin typeface="Segoe UI"/>
+              </a:rPr>
+              <a:t>Fast Blake2b tiered content hasher</a:t>
+            </a:r>
+          </a:p>
+        </p:txBody>
+      </p:sp>
+      <p:sp>
+        <p:nvSpPr>
+          <p:cNvPr id="12" name="Rounded Rectangle 11"/>
+          <p:cNvSpPr/>
+          <p:nvPr/>
+        </p:nvSpPr>
+        <p:spPr>
+          <a:xfrm>
+            <a:off x="914400" y="4754880"/>
+            <a:ext cx="10360152" cy="1280160"/>
           </a:xfrm>
           <a:prstGeom prst="roundRect">
             <a:avLst/>
@@ -3340,14 +3609,14 @@
       </p:sp>
       <p:sp>
         <p:nvSpPr>
-          <p:cNvPr id="8" name="TextBox 7"/>
+          <p:cNvPr id="13" name="TextBox 12"/>
           <p:cNvSpPr txBox="1"/>
           <p:nvPr/>
         </p:nvSpPr>
         <p:spPr>
           <a:xfrm>
-            <a:off x="1097280" y="5166360"/>
-            <a:ext cx="9966960" cy="822960"/>
+            <a:off x="1097280" y="4892040"/>
+            <a:ext cx="9966960" cy="1005840"/>
           </a:xfrm>
           <a:prstGeom prst="rect">
             <a:avLst/>
@@ -3367,7 +3636,7 @@
                 </a:solidFill>
                 <a:latin typeface="Segoe UI"/>
               </a:rPr>
-              <a:t>Problem Statement 2: AI-Powered Intelligent Storage Optimizer for Linux OS  |  Inbuilt Regret Objective Model</a:t>
+              <a:t>Problem Statement 2: AI-Powered Intelligent Storage Optimizer for Linux OS</a:t>
             </a:r>
           </a:p>
           <a:p>
@@ -3495,7 +3764,7 @@
         </p:nvSpPr>
         <p:spPr>
           <a:xfrm>
-            <a:off x="731520" y="365760"/>
+            <a:off x="731520" y="320040"/>
             <a:ext cx="10698480" cy="320040"/>
           </a:xfrm>
           <a:prstGeom prst="rect">
@@ -3529,7 +3798,7 @@
         </p:nvSpPr>
         <p:spPr>
           <a:xfrm>
-            <a:off x="731520" y="640080"/>
+            <a:off x="731520" y="594360"/>
             <a:ext cx="10698480" cy="548640"/>
           </a:xfrm>
           <a:prstGeom prst="rect">
@@ -3544,7 +3813,7 @@
           <a:lstStyle/>
           <a:p>
             <a:r>
-              <a:rPr sz="2400" b="1">
+              <a:rPr sz="2300" b="1">
                 <a:solidFill>
                   <a:srgbClr val="F8FAFC"/>
                 </a:solidFill>
@@ -3574,8 +3843,8 @@
         </p:nvSpPr>
         <p:spPr>
           <a:xfrm>
-            <a:off x="731520" y="1554480"/>
-            <a:ext cx="5120640" cy="4023360"/>
+            <a:off x="731520" y="1463040"/>
+            <a:ext cx="5120640" cy="4114800"/>
           </a:xfrm>
           <a:prstGeom prst="roundRect">
             <a:avLst/>
@@ -3619,8 +3888,8 @@
         </p:nvSpPr>
         <p:spPr>
           <a:xfrm>
-            <a:off x="932688" y="1719072"/>
-            <a:ext cx="4718303" cy="3694176"/>
+            <a:off x="932688" y="1609344"/>
+            <a:ext cx="4718303" cy="3822191"/>
           </a:xfrm>
           <a:prstGeom prst="rect">
             <a:avLst/>
@@ -3635,11 +3904,11 @@
           <a:p>
             <a:pPr>
               <a:spcAft>
-                <a:spcPts val="1000"/>
+                <a:spcPts val="800"/>
               </a:spcAft>
             </a:pPr>
             <a:r>
-              <a:rPr sz="1100" b="1">
+              <a:rPr sz="1050" b="1">
                 <a:solidFill>
                   <a:srgbClr val="F87171"/>
                 </a:solidFill>
@@ -3648,7 +3917,7 @@
               <a:t>[THE 2 GB DILEMMA] </a:t>
             </a:r>
             <a:r>
-              <a:rPr sz="1600" b="1">
+              <a:rPr sz="1550" b="1">
                 <a:solidFill>
                   <a:srgbClr val="F8FAFC"/>
                 </a:solidFill>
@@ -3660,11 +3929,11 @@
           <a:p>
             <a:pPr>
               <a:spcAft>
-                <a:spcPts val="600"/>
+                <a:spcPts val="500"/>
               </a:spcAft>
             </a:pPr>
             <a:r>
-              <a:rPr sz="1250" b="1">
+              <a:rPr sz="1200" b="1">
                 <a:solidFill>
                   <a:srgbClr val="94A3B8"/>
                 </a:solidFill>
@@ -3673,7 +3942,7 @@
               <a:t>The Scenario: </a:t>
             </a:r>
             <a:r>
-              <a:rPr sz="1250">
+              <a:rPr sz="1200">
                 <a:solidFill>
                   <a:srgbClr val="F8FAFC"/>
                 </a:solidFill>
@@ -3685,11 +3954,11 @@
           <a:p>
             <a:pPr>
               <a:spcAft>
-                <a:spcPts val="600"/>
+                <a:spcPts val="500"/>
               </a:spcAft>
             </a:pPr>
             <a:r>
-              <a:rPr sz="1250" b="1">
+              <a:rPr sz="1200" b="1">
                 <a:solidFill>
                   <a:srgbClr val="F87171"/>
                 </a:solidFill>
@@ -3698,7 +3967,7 @@
               <a:t>Traditional Ranking: </a:t>
             </a:r>
             <a:r>
-              <a:rPr sz="1250">
+              <a:rPr sz="1200">
                 <a:solidFill>
                   <a:srgbClr val="F8FAFC"/>
                 </a:solidFill>
@@ -3710,11 +3979,11 @@
           <a:p>
             <a:pPr>
               <a:spcAft>
-                <a:spcPts val="600"/>
+                <a:spcPts val="500"/>
               </a:spcAft>
             </a:pPr>
             <a:r>
-              <a:rPr sz="1250" b="1">
+              <a:rPr sz="1200" b="1">
                 <a:solidFill>
                   <a:srgbClr val="F87171"/>
                 </a:solidFill>
@@ -3723,7 +3992,7 @@
               <a:t>The Asymmetry: </a:t>
             </a:r>
             <a:r>
-              <a:rPr sz="1250">
+              <a:rPr sz="1200">
                 <a:solidFill>
                   <a:srgbClr val="F8FAFC"/>
                 </a:solidFill>
@@ -3735,20 +4004,20 @@
           <a:p>
             <a:pPr>
               <a:spcAft>
-                <a:spcPts val="600"/>
+                <a:spcPts val="500"/>
               </a:spcAft>
             </a:pPr>
             <a:r>
-              <a:rPr sz="1250" b="1">
+              <a:rPr sz="1200" b="1">
                 <a:solidFill>
                   <a:srgbClr val="FBBF24"/>
                 </a:solidFill>
                 <a:latin typeface="Segoe UI"/>
               </a:rPr>
-              <a:t>User Friction: </a:t>
-            </a:r>
-            <a:r>
-              <a:rPr sz="1250">
+              <a:t>User Reluctance: </a:t>
+            </a:r>
+            <a:r>
+              <a:rPr sz="1200">
                 <a:solidFill>
                   <a:srgbClr val="F8FAFC"/>
                 </a:solidFill>
@@ -3767,8 +4036,8 @@
         </p:nvSpPr>
         <p:spPr>
           <a:xfrm>
-            <a:off x="6217920" y="1554480"/>
-            <a:ext cx="5120640" cy="4023360"/>
+            <a:off x="6217920" y="1463040"/>
+            <a:ext cx="5120640" cy="4114800"/>
           </a:xfrm>
           <a:prstGeom prst="roundRect">
             <a:avLst/>
@@ -3812,8 +4081,8 @@
         </p:nvSpPr>
         <p:spPr>
           <a:xfrm>
-            <a:off x="6419088" y="1719072"/>
-            <a:ext cx="4718303" cy="3694176"/>
+            <a:off x="6419088" y="1609344"/>
+            <a:ext cx="4718303" cy="3822191"/>
           </a:xfrm>
           <a:prstGeom prst="rect">
             <a:avLst/>
@@ -3828,11 +4097,11 @@
           <a:p>
             <a:pPr>
               <a:spcAft>
-                <a:spcPts val="1000"/>
+                <a:spcPts val="800"/>
               </a:spcAft>
             </a:pPr>
             <a:r>
-              <a:rPr sz="1100" b="1">
+              <a:rPr sz="1050" b="1">
                 <a:solidFill>
                   <a:srgbClr val="34D399"/>
                 </a:solidFill>
@@ -3841,7 +4110,7 @@
               <a:t>[SANCHAY'S SHIFT] </a:t>
             </a:r>
             <a:r>
-              <a:rPr sz="1600" b="1">
+              <a:rPr sz="1550" b="1">
                 <a:solidFill>
                   <a:srgbClr val="F8FAFC"/>
                 </a:solidFill>
@@ -3853,11 +4122,11 @@
           <a:p>
             <a:pPr>
               <a:spcAft>
-                <a:spcPts val="600"/>
+                <a:spcPts val="500"/>
               </a:spcAft>
             </a:pPr>
             <a:r>
-              <a:rPr sz="1250" b="1">
+              <a:rPr sz="1200" b="1">
                 <a:solidFill>
                   <a:srgbClr val="34D399"/>
                 </a:solidFill>
@@ -3866,7 +4135,7 @@
               <a:t>The Core Question: </a:t>
             </a:r>
             <a:r>
-              <a:rPr sz="1250">
+              <a:rPr sz="1200">
                 <a:solidFill>
                   <a:srgbClr val="F8FAFC"/>
                 </a:solidFill>
@@ -3878,11 +4147,11 @@
           <a:p>
             <a:pPr>
               <a:spcAft>
-                <a:spcPts val="600"/>
+                <a:spcPts val="500"/>
               </a:spcAft>
             </a:pPr>
             <a:r>
-              <a:rPr sz="1250" b="1">
+              <a:rPr sz="1200" b="1">
                 <a:solidFill>
                   <a:srgbClr val="38BDF8"/>
                 </a:solidFill>
@@ -3891,7 +4160,7 @@
               <a:t>Reproducibility Metric: </a:t>
             </a:r>
             <a:r>
-              <a:rPr sz="1250">
+              <a:rPr sz="1200">
                 <a:solidFill>
                   <a:srgbClr val="F8FAFC"/>
                 </a:solidFill>
@@ -3903,11 +4172,11 @@
           <a:p>
             <a:pPr>
               <a:spcAft>
-                <a:spcPts val="600"/>
+                <a:spcPts val="500"/>
               </a:spcAft>
             </a:pPr>
             <a:r>
-              <a:rPr sz="1250" b="1">
+              <a:rPr sz="1200" b="1">
                 <a:solidFill>
                   <a:srgbClr val="34D399"/>
                 </a:solidFill>
@@ -3916,7 +4185,7 @@
               <a:t>Hard Guarantee: </a:t>
             </a:r>
             <a:r>
-              <a:rPr sz="1250">
+              <a:rPr sz="1200">
                 <a:solidFill>
                   <a:srgbClr val="F8FAFC"/>
                 </a:solidFill>
@@ -3928,11 +4197,11 @@
           <a:p>
             <a:pPr>
               <a:spcAft>
-                <a:spcPts val="600"/>
+                <a:spcPts val="500"/>
               </a:spcAft>
             </a:pPr>
             <a:r>
-              <a:rPr sz="1250" b="1">
+              <a:rPr sz="1200" b="1">
                 <a:solidFill>
                   <a:srgbClr val="F8FAFC"/>
                 </a:solidFill>
@@ -3941,7 +4210,7 @@
               <a:t>Practical Utility: </a:t>
             </a:r>
             <a:r>
-              <a:rPr sz="1250">
+              <a:rPr sz="1200">
                 <a:solidFill>
                   <a:srgbClr val="F8FAFC"/>
                 </a:solidFill>
@@ -3960,7 +4229,7 @@
         </p:nvSpPr>
         <p:spPr>
           <a:xfrm>
-            <a:off x="731520" y="5715000"/>
+            <a:off x="731520" y="5760720"/>
             <a:ext cx="10607040" cy="685800"/>
           </a:xfrm>
           <a:prstGeom prst="roundRect">
@@ -4005,7 +4274,7 @@
         </p:nvSpPr>
         <p:spPr>
           <a:xfrm>
-            <a:off x="914400" y="5760720"/>
+            <a:off x="914400" y="5806440"/>
             <a:ext cx="10241280" cy="594360"/>
           </a:xfrm>
           <a:prstGeom prst="rect">
@@ -4143,7 +4412,7 @@
         </p:nvSpPr>
         <p:spPr>
           <a:xfrm>
-            <a:off x="731520" y="365760"/>
+            <a:off x="731520" y="320040"/>
             <a:ext cx="10698480" cy="320040"/>
           </a:xfrm>
           <a:prstGeom prst="rect">
@@ -4177,7 +4446,7 @@
         </p:nvSpPr>
         <p:spPr>
           <a:xfrm>
-            <a:off x="731520" y="640080"/>
+            <a:off x="731520" y="594360"/>
             <a:ext cx="10698480" cy="548640"/>
           </a:xfrm>
           <a:prstGeom prst="rect">
@@ -4192,7 +4461,7 @@
           <a:lstStyle/>
           <a:p>
             <a:r>
-              <a:rPr sz="2400" b="1">
+              <a:rPr sz="2300" b="1">
                 <a:solidFill>
                   <a:srgbClr val="F8FAFC"/>
                 </a:solidFill>
@@ -4222,8 +4491,8 @@
         </p:nvSpPr>
         <p:spPr>
           <a:xfrm>
-            <a:off x="731520" y="1554480"/>
-            <a:ext cx="5120640" cy="4846320"/>
+            <a:off x="731520" y="1463040"/>
+            <a:ext cx="5120640" cy="4937760"/>
           </a:xfrm>
           <a:prstGeom prst="roundRect">
             <a:avLst/>
@@ -4267,8 +4536,8 @@
         </p:nvSpPr>
         <p:spPr>
           <a:xfrm>
-            <a:off x="932688" y="1719072"/>
-            <a:ext cx="4718303" cy="4517136"/>
+            <a:off x="932688" y="1609344"/>
+            <a:ext cx="4718303" cy="4645152"/>
           </a:xfrm>
           <a:prstGeom prst="rect">
             <a:avLst/>
@@ -4283,11 +4552,11 @@
           <a:p>
             <a:pPr>
               <a:spcAft>
-                <a:spcPts val="1000"/>
+                <a:spcPts val="800"/>
               </a:spcAft>
             </a:pPr>
             <a:r>
-              <a:rPr sz="1100" b="1">
+              <a:rPr sz="1050" b="1">
                 <a:solidFill>
                   <a:srgbClr val="38BDF8"/>
                 </a:solidFill>
@@ -4296,7 +4565,7 @@
               <a:t>[4-TIER TAXONOMY] </a:t>
             </a:r>
             <a:r>
-              <a:rPr sz="1600" b="1">
+              <a:rPr sz="1550" b="1">
                 <a:solidFill>
                   <a:srgbClr val="F8FAFC"/>
                 </a:solidFill>
@@ -4308,11 +4577,11 @@
           <a:p>
             <a:pPr>
               <a:spcAft>
-                <a:spcPts val="600"/>
+                <a:spcPts val="500"/>
               </a:spcAft>
             </a:pPr>
             <a:r>
-              <a:rPr sz="1250" b="1">
+              <a:rPr sz="1200" b="1">
                 <a:solidFill>
                   <a:srgbClr val="34D399"/>
                 </a:solidFill>
@@ -4321,7 +4590,7 @@
               <a:t>1. Disposable (Regret 0.02): </a:t>
             </a:r>
             <a:r>
-              <a:rPr sz="1250">
+              <a:rPr sz="1200">
                 <a:solidFill>
                   <a:srgbClr val="F8FAFC"/>
                 </a:solidFill>
@@ -4333,11 +4602,11 @@
           <a:p>
             <a:pPr>
               <a:spcAft>
-                <a:spcPts val="600"/>
+                <a:spcPts val="500"/>
               </a:spcAft>
             </a:pPr>
             <a:r>
-              <a:rPr sz="1250" b="1">
+              <a:rPr sz="1200" b="1">
                 <a:solidFill>
                   <a:srgbClr val="38BDF8"/>
                 </a:solidFill>
@@ -4346,7 +4615,7 @@
               <a:t>2. Duplicate (Regret 0.10): </a:t>
             </a:r>
             <a:r>
-              <a:rPr sz="1250">
+              <a:rPr sz="1200">
                 <a:solidFill>
                   <a:srgbClr val="F8FAFC"/>
                 </a:solidFill>
@@ -4358,11 +4627,11 @@
           <a:p>
             <a:pPr>
               <a:spcAft>
-                <a:spcPts val="600"/>
+                <a:spcPts val="500"/>
               </a:spcAft>
             </a:pPr>
             <a:r>
-              <a:rPr sz="1250" b="1">
+              <a:rPr sz="1200" b="1">
                 <a:solidFill>
                   <a:srgbClr val="FBBF24"/>
                 </a:solidFill>
@@ -4371,7 +4640,7 @@
               <a:t>3. Tracked Git (Regret 0.20): </a:t>
             </a:r>
             <a:r>
-              <a:rPr sz="1250">
+              <a:rPr sz="1200">
                 <a:solidFill>
                   <a:srgbClr val="F8FAFC"/>
                 </a:solidFill>
@@ -4383,11 +4652,11 @@
           <a:p>
             <a:pPr>
               <a:spcAft>
-                <a:spcPts val="600"/>
+                <a:spcPts val="500"/>
               </a:spcAft>
             </a:pPr>
             <a:r>
-              <a:rPr sz="1250" b="1">
+              <a:rPr sz="1200" b="1">
                 <a:solidFill>
                   <a:srgbClr val="F87171"/>
                 </a:solidFill>
@@ -4396,7 +4665,7 @@
               <a:t>4. Unique (Regret 1.00): </a:t>
             </a:r>
             <a:r>
-              <a:rPr sz="1250">
+              <a:rPr sz="1200">
                 <a:solidFill>
                   <a:srgbClr val="F8FAFC"/>
                 </a:solidFill>
@@ -4408,11 +4677,11 @@
           <a:p>
             <a:pPr>
               <a:spcAft>
-                <a:spcPts val="600"/>
+                <a:spcPts val="500"/>
               </a:spcAft>
             </a:pPr>
             <a:r>
-              <a:rPr sz="1250" b="1">
+              <a:rPr sz="1200" b="1">
                 <a:solidFill>
                   <a:srgbClr val="94A3B8"/>
                 </a:solidFill>
@@ -4421,7 +4690,7 @@
               <a:t>Git Index Verification: </a:t>
             </a:r>
             <a:r>
-              <a:rPr sz="1250">
+              <a:rPr sz="1200">
                 <a:solidFill>
                   <a:srgbClr val="F8FAFC"/>
                 </a:solidFill>
@@ -4440,8 +4709,8 @@
         </p:nvSpPr>
         <p:spPr>
           <a:xfrm>
-            <a:off x="6217920" y="1554480"/>
-            <a:ext cx="5120640" cy="4846320"/>
+            <a:off x="6217920" y="1463040"/>
+            <a:ext cx="5120640" cy="4937760"/>
           </a:xfrm>
           <a:prstGeom prst="roundRect">
             <a:avLst/>
@@ -4485,8 +4754,8 @@
         </p:nvSpPr>
         <p:spPr>
           <a:xfrm>
-            <a:off x="6419088" y="1719072"/>
-            <a:ext cx="4718303" cy="4517136"/>
+            <a:off x="6419088" y="1609344"/>
+            <a:ext cx="4718303" cy="4645152"/>
           </a:xfrm>
           <a:prstGeom prst="rect">
             <a:avLst/>
@@ -4501,11 +4770,11 @@
           <a:p>
             <a:pPr>
               <a:spcAft>
-                <a:spcPts val="1000"/>
+                <a:spcPts val="800"/>
               </a:spcAft>
             </a:pPr>
             <a:r>
-              <a:rPr sz="1100" b="1">
+              <a:rPr sz="1050" b="1">
                 <a:solidFill>
                   <a:srgbClr val="34D399"/>
                 </a:solidFill>
@@ -4514,7 +4783,7 @@
               <a:t>[RUNWAY FORECASTING] </a:t>
             </a:r>
             <a:r>
-              <a:rPr sz="1600" b="1">
+              <a:rPr sz="1550" b="1">
                 <a:solidFill>
                   <a:srgbClr val="F8FAFC"/>
                 </a:solidFill>
@@ -4526,11 +4795,11 @@
           <a:p>
             <a:pPr>
               <a:spcAft>
-                <a:spcPts val="600"/>
+                <a:spcPts val="500"/>
               </a:spcAft>
             </a:pPr>
             <a:r>
-              <a:rPr sz="1250" b="1">
+              <a:rPr sz="1200" b="1">
                 <a:solidFill>
                   <a:srgbClr val="94A3B8"/>
                 </a:solidFill>
@@ -4539,7 +4808,7 @@
               <a:t>The Problem: </a:t>
             </a:r>
             <a:r>
-              <a:rPr sz="1250">
+              <a:rPr sz="1200">
                 <a:solidFill>
                   <a:srgbClr val="F8FAFC"/>
                 </a:solidFill>
@@ -4551,11 +4820,11 @@
           <a:p>
             <a:pPr>
               <a:spcAft>
-                <a:spcPts val="600"/>
+                <a:spcPts val="500"/>
               </a:spcAft>
             </a:pPr>
             <a:r>
-              <a:rPr sz="1250" b="1">
+              <a:rPr sz="1200" b="1">
                 <a:solidFill>
                   <a:srgbClr val="34D399"/>
                 </a:solidFill>
@@ -4564,7 +4833,7 @@
               <a:t>SANCHAY's Insight: </a:t>
             </a:r>
             <a:r>
-              <a:rPr sz="1250">
+              <a:rPr sz="1200">
                 <a:solidFill>
                   <a:srgbClr val="F8FAFC"/>
                 </a:solidFill>
@@ -4576,11 +4845,11 @@
           <a:p>
             <a:pPr>
               <a:spcAft>
-                <a:spcPts val="600"/>
+                <a:spcPts val="500"/>
               </a:spcAft>
             </a:pPr>
             <a:r>
-              <a:rPr sz="1250" b="1">
+              <a:rPr sz="1200" b="1">
                 <a:solidFill>
                   <a:srgbClr val="38BDF8"/>
                 </a:solidFill>
@@ -4589,7 +4858,7 @@
               <a:t>Instant Rate: </a:t>
             </a:r>
             <a:r>
-              <a:rPr sz="1250">
+              <a:rPr sz="1200">
                 <a:solidFill>
                   <a:srgbClr val="F8FAFC"/>
                 </a:solidFill>
@@ -4601,11 +4870,11 @@
           <a:p>
             <a:pPr>
               <a:spcAft>
-                <a:spcPts val="600"/>
+                <a:spcPts val="500"/>
               </a:spcAft>
             </a:pPr>
             <a:r>
-              <a:rPr sz="1250" b="1">
+              <a:rPr sz="1200" b="1">
                 <a:solidFill>
                   <a:srgbClr val="34D399"/>
                 </a:solidFill>
@@ -4614,7 +4883,7 @@
               <a:t>Exhaustion Date: </a:t>
             </a:r>
             <a:r>
-              <a:rPr sz="1250">
+              <a:rPr sz="1200">
                 <a:solidFill>
                   <a:srgbClr val="F8FAFC"/>
                 </a:solidFill>
@@ -4626,11 +4895,11 @@
           <a:p>
             <a:pPr>
               <a:spcAft>
-                <a:spcPts val="600"/>
+                <a:spcPts val="500"/>
               </a:spcAft>
             </a:pPr>
             <a:r>
-              <a:rPr sz="1250" b="1">
+              <a:rPr sz="1200" b="1">
                 <a:solidFill>
                   <a:srgbClr val="F8FAFC"/>
                 </a:solidFill>
@@ -4639,7 +4908,7 @@
               <a:t>Linux Relatime Aware: </a:t>
             </a:r>
             <a:r>
-              <a:rPr sz="1250">
+              <a:rPr sz="1200">
                 <a:solidFill>
                   <a:srgbClr val="F8FAFC"/>
                 </a:solidFill>
@@ -4762,7 +5031,7 @@
         </p:nvSpPr>
         <p:spPr>
           <a:xfrm>
-            <a:off x="731520" y="365760"/>
+            <a:off x="731520" y="320040"/>
             <a:ext cx="10698480" cy="320040"/>
           </a:xfrm>
           <a:prstGeom prst="rect">
@@ -4796,7 +5065,7 @@
         </p:nvSpPr>
         <p:spPr>
           <a:xfrm>
-            <a:off x="731520" y="640080"/>
+            <a:off x="731520" y="594360"/>
             <a:ext cx="10698480" cy="548640"/>
           </a:xfrm>
           <a:prstGeom prst="rect">
@@ -4811,7 +5080,7 @@
           <a:lstStyle/>
           <a:p>
             <a:r>
-              <a:rPr sz="2400" b="1">
+              <a:rPr sz="2300" b="1">
                 <a:solidFill>
                   <a:srgbClr val="F8FAFC"/>
                 </a:solidFill>
@@ -4841,8 +5110,8 @@
         </p:nvSpPr>
         <p:spPr>
           <a:xfrm>
-            <a:off x="731520" y="1554480"/>
-            <a:ext cx="5120640" cy="4846320"/>
+            <a:off x="731520" y="1463040"/>
+            <a:ext cx="5120640" cy="4937760"/>
           </a:xfrm>
           <a:prstGeom prst="roundRect">
             <a:avLst/>
@@ -4886,8 +5155,8 @@
         </p:nvSpPr>
         <p:spPr>
           <a:xfrm>
-            <a:off x="932688" y="1719072"/>
-            <a:ext cx="4718303" cy="4517136"/>
+            <a:off x="932688" y="1609344"/>
+            <a:ext cx="4718303" cy="4645152"/>
           </a:xfrm>
           <a:prstGeom prst="rect">
             <a:avLst/>
@@ -4902,11 +5171,11 @@
           <a:p>
             <a:pPr>
               <a:spcAft>
-                <a:spcPts val="1000"/>
+                <a:spcPts val="800"/>
               </a:spcAft>
             </a:pPr>
             <a:r>
-              <a:rPr sz="1100" b="1">
+              <a:rPr sz="1050" b="1">
                 <a:solidFill>
                   <a:srgbClr val="F87171"/>
                 </a:solidFill>
@@ -4915,7 +5184,7 @@
               <a:t>[TRADITIONAL PROMPT-ONLY AI] </a:t>
             </a:r>
             <a:r>
-              <a:rPr sz="1600" b="1">
+              <a:rPr sz="1550" b="1">
                 <a:solidFill>
                   <a:srgbClr val="F8FAFC"/>
                 </a:solidFill>
@@ -4927,11 +5196,11 @@
           <a:p>
             <a:pPr>
               <a:spcAft>
-                <a:spcPts val="600"/>
+                <a:spcPts val="500"/>
               </a:spcAft>
             </a:pPr>
             <a:r>
-              <a:rPr sz="1250" b="1">
+              <a:rPr sz="1200" b="1">
                 <a:solidFill>
                   <a:srgbClr val="F87171"/>
                 </a:solidFill>
@@ -4940,7 +5209,7 @@
               <a:t>Approach: </a:t>
             </a:r>
             <a:r>
-              <a:rPr sz="1250">
+              <a:rPr sz="1200">
                 <a:solidFill>
                   <a:srgbClr val="F8FAFC"/>
                 </a:solidFill>
@@ -4952,11 +5221,11 @@
           <a:p>
             <a:pPr>
               <a:spcAft>
-                <a:spcPts val="600"/>
+                <a:spcPts val="500"/>
               </a:spcAft>
             </a:pPr>
             <a:r>
-              <a:rPr sz="1250" b="1">
+              <a:rPr sz="1200" b="1">
                 <a:solidFill>
                   <a:srgbClr val="F87171"/>
                 </a:solidFill>
@@ -4965,7 +5234,7 @@
               <a:t>The Hazard: </a:t>
             </a:r>
             <a:r>
-              <a:rPr sz="1250">
+              <a:rPr sz="1200">
                 <a:solidFill>
                   <a:srgbClr val="F8FAFC"/>
                 </a:solidFill>
@@ -4977,11 +5246,11 @@
           <a:p>
             <a:pPr>
               <a:spcAft>
-                <a:spcPts val="600"/>
+                <a:spcPts val="500"/>
               </a:spcAft>
             </a:pPr>
             <a:r>
-              <a:rPr sz="1250" b="1">
+              <a:rPr sz="1200" b="1">
                 <a:solidFill>
                   <a:srgbClr val="F87171"/>
                 </a:solidFill>
@@ -4990,7 +5259,7 @@
               <a:t>Failure Mode: </a:t>
             </a:r>
             <a:r>
-              <a:rPr sz="1250">
+              <a:rPr sz="1200">
                 <a:solidFill>
                   <a:srgbClr val="F8FAFC"/>
                 </a:solidFill>
@@ -5002,11 +5271,11 @@
           <a:p>
             <a:pPr>
               <a:spcAft>
-                <a:spcPts val="600"/>
+                <a:spcPts val="500"/>
               </a:spcAft>
             </a:pPr>
             <a:r>
-              <a:rPr sz="1250" b="1">
+              <a:rPr sz="1200" b="1">
                 <a:solidFill>
                   <a:srgbClr val="94A3B8"/>
                 </a:solidFill>
@@ -5015,7 +5284,7 @@
               <a:t>Core Weakness: </a:t>
             </a:r>
             <a:r>
-              <a:rPr sz="1250">
+              <a:rPr sz="1200">
                 <a:solidFill>
                   <a:srgbClr val="F8FAFC"/>
                 </a:solidFill>
@@ -5034,8 +5303,8 @@
         </p:nvSpPr>
         <p:spPr>
           <a:xfrm>
-            <a:off x="6217920" y="1554480"/>
-            <a:ext cx="5120640" cy="4846320"/>
+            <a:off x="6217920" y="1463040"/>
+            <a:ext cx="5120640" cy="4937760"/>
           </a:xfrm>
           <a:prstGeom prst="roundRect">
             <a:avLst/>
@@ -5079,8 +5348,8 @@
         </p:nvSpPr>
         <p:spPr>
           <a:xfrm>
-            <a:off x="6419088" y="1719072"/>
-            <a:ext cx="4718303" cy="4517136"/>
+            <a:off x="6419088" y="1609344"/>
+            <a:ext cx="4718303" cy="4645152"/>
           </a:xfrm>
           <a:prstGeom prst="rect">
             <a:avLst/>
@@ -5095,11 +5364,11 @@
           <a:p>
             <a:pPr>
               <a:spcAft>
-                <a:spcPts val="1000"/>
+                <a:spcPts val="800"/>
               </a:spcAft>
             </a:pPr>
             <a:r>
-              <a:rPr sz="1100" b="1">
+              <a:rPr sz="1050" b="1">
                 <a:solidFill>
                   <a:srgbClr val="34D399"/>
                 </a:solidFill>
@@ -5108,7 +5377,7 @@
               <a:t>[SANCHAY ISOLATED ARCHITECTURE] </a:t>
             </a:r>
             <a:r>
-              <a:rPr sz="1600" b="1">
+              <a:rPr sz="1550" b="1">
                 <a:solidFill>
                   <a:srgbClr val="F8FAFC"/>
                 </a:solidFill>
@@ -5120,11 +5389,11 @@
           <a:p>
             <a:pPr>
               <a:spcAft>
-                <a:spcPts val="600"/>
+                <a:spcPts val="500"/>
               </a:spcAft>
             </a:pPr>
             <a:r>
-              <a:rPr sz="1250" b="1">
+              <a:rPr sz="1200" b="1">
                 <a:solidFill>
                   <a:srgbClr val="34D399"/>
                 </a:solidFill>
@@ -5133,7 +5402,7 @@
               <a:t>Pre-Classification: </a:t>
             </a:r>
             <a:r>
-              <a:rPr sz="1250">
+              <a:rPr sz="1200">
                 <a:solidFill>
                   <a:srgbClr val="F8FAFC"/>
                 </a:solidFill>
@@ -5145,11 +5414,11 @@
           <a:p>
             <a:pPr>
               <a:spcAft>
-                <a:spcPts val="600"/>
+                <a:spcPts val="500"/>
               </a:spcAft>
             </a:pPr>
             <a:r>
-              <a:rPr sz="1250" b="1">
+              <a:rPr sz="1200" b="1">
                 <a:solidFill>
                   <a:srgbClr val="38BDF8"/>
                 </a:solidFill>
@@ -5158,7 +5427,7 @@
               <a:t>Restricted Context: </a:t>
             </a:r>
             <a:r>
-              <a:rPr sz="1250">
+              <a:rPr sz="1200">
                 <a:solidFill>
                   <a:srgbClr val="F8FAFC"/>
                 </a:solidFill>
@@ -5170,11 +5439,11 @@
           <a:p>
             <a:pPr>
               <a:spcAft>
-                <a:spcPts val="600"/>
+                <a:spcPts val="500"/>
               </a:spcAft>
             </a:pPr>
             <a:r>
-              <a:rPr sz="1250" b="1">
+              <a:rPr sz="1200" b="1">
                 <a:solidFill>
                   <a:srgbClr val="34D399"/>
                 </a:solidFill>
@@ -5183,7 +5452,7 @@
               <a:t>Zero Mutation Power: </a:t>
             </a:r>
             <a:r>
-              <a:rPr sz="1250">
+              <a:rPr sz="1200">
                 <a:solidFill>
                   <a:srgbClr val="F8FAFC"/>
                 </a:solidFill>
@@ -5195,11 +5464,11 @@
           <a:p>
             <a:pPr>
               <a:spcAft>
-                <a:spcPts val="600"/>
+                <a:spcPts val="500"/>
               </a:spcAft>
             </a:pPr>
             <a:r>
-              <a:rPr sz="1250" b="1">
+              <a:rPr sz="1200" b="1">
                 <a:solidFill>
                   <a:srgbClr val="34D399"/>
                 </a:solidFill>
@@ -5208,7 +5477,7 @@
               <a:t>Worst-Case Bound: </a:t>
             </a:r>
             <a:r>
-              <a:rPr sz="1250">
+              <a:rPr sz="1200">
                 <a:solidFill>
                   <a:srgbClr val="F8FAFC"/>
                 </a:solidFill>
@@ -5331,7 +5600,7 @@
         </p:nvSpPr>
         <p:spPr>
           <a:xfrm>
-            <a:off x="731520" y="365760"/>
+            <a:off x="731520" y="320040"/>
             <a:ext cx="10698480" cy="320040"/>
           </a:xfrm>
           <a:prstGeom prst="rect">
@@ -5365,7 +5634,7 @@
         </p:nvSpPr>
         <p:spPr>
           <a:xfrm>
-            <a:off x="731520" y="640080"/>
+            <a:off x="731520" y="594360"/>
             <a:ext cx="10698480" cy="548640"/>
           </a:xfrm>
           <a:prstGeom prst="rect">
@@ -5380,7 +5649,7 @@
           <a:lstStyle/>
           <a:p>
             <a:r>
-              <a:rPr sz="2400" b="1">
+              <a:rPr sz="2300" b="1">
                 <a:solidFill>
                   <a:srgbClr val="F8FAFC"/>
                 </a:solidFill>
@@ -5410,8 +5679,8 @@
         </p:nvSpPr>
         <p:spPr>
           <a:xfrm>
-            <a:off x="731520" y="1463040"/>
-            <a:ext cx="10698480" cy="4937760"/>
+            <a:off x="731520" y="1417320"/>
+            <a:ext cx="10698480" cy="5029200"/>
           </a:xfrm>
           <a:prstGeom prst="roundRect">
             <a:avLst/>
@@ -5463,7 +5732,7 @@
         </p:blipFill>
         <p:spPr>
           <a:xfrm>
-            <a:off x="914400" y="1645920"/>
+            <a:off x="914400" y="1600200"/>
             <a:ext cx="10332720" cy="5175927"/>
           </a:xfrm>
           <a:prstGeom prst="rect">
@@ -5583,7 +5852,7 @@
         </p:nvSpPr>
         <p:spPr>
           <a:xfrm>
-            <a:off x="731520" y="365760"/>
+            <a:off x="731520" y="320040"/>
             <a:ext cx="10698480" cy="320040"/>
           </a:xfrm>
           <a:prstGeom prst="rect">
@@ -5617,7 +5886,7 @@
         </p:nvSpPr>
         <p:spPr>
           <a:xfrm>
-            <a:off x="731520" y="640080"/>
+            <a:off x="731520" y="594360"/>
             <a:ext cx="10698480" cy="548640"/>
           </a:xfrm>
           <a:prstGeom prst="rect">
@@ -5632,7 +5901,7 @@
           <a:lstStyle/>
           <a:p>
             <a:r>
-              <a:rPr sz="2400" b="1">
+              <a:rPr sz="2300" b="1">
                 <a:solidFill>
                   <a:srgbClr val="F8FAFC"/>
                 </a:solidFill>
@@ -5662,8 +5931,8 @@
         </p:nvSpPr>
         <p:spPr>
           <a:xfrm>
-            <a:off x="731520" y="1463040"/>
-            <a:ext cx="10698480" cy="4937760"/>
+            <a:off x="731520" y="1417320"/>
+            <a:ext cx="10698480" cy="5029200"/>
           </a:xfrm>
           <a:prstGeom prst="roundRect">
             <a:avLst/>
@@ -5715,7 +5984,7 @@
         </p:blipFill>
         <p:spPr>
           <a:xfrm>
-            <a:off x="1280160" y="1600200"/>
+            <a:off x="1280160" y="1554480"/>
             <a:ext cx="9601200" cy="6005456"/>
           </a:xfrm>
           <a:prstGeom prst="rect">
@@ -5835,7 +6104,7 @@
         </p:nvSpPr>
         <p:spPr>
           <a:xfrm>
-            <a:off x="731520" y="365760"/>
+            <a:off x="731520" y="320040"/>
             <a:ext cx="10698480" cy="320040"/>
           </a:xfrm>
           <a:prstGeom prst="rect">
@@ -5869,7 +6138,7 @@
         </p:nvSpPr>
         <p:spPr>
           <a:xfrm>
-            <a:off x="731520" y="640080"/>
+            <a:off x="731520" y="594360"/>
             <a:ext cx="10698480" cy="548640"/>
           </a:xfrm>
           <a:prstGeom prst="rect">
@@ -5884,7 +6153,7 @@
           <a:lstStyle/>
           <a:p>
             <a:r>
-              <a:rPr sz="2400" b="1">
+              <a:rPr sz="2300" b="1">
                 <a:solidFill>
                   <a:srgbClr val="F8FAFC"/>
                 </a:solidFill>
@@ -5914,8 +6183,8 @@
         </p:nvSpPr>
         <p:spPr>
           <a:xfrm>
-            <a:off x="731520" y="1554480"/>
-            <a:ext cx="5120640" cy="4846320"/>
+            <a:off x="731520" y="1463040"/>
+            <a:ext cx="5120640" cy="4937760"/>
           </a:xfrm>
           <a:prstGeom prst="roundRect">
             <a:avLst/>
@@ -5959,8 +6228,8 @@
         </p:nvSpPr>
         <p:spPr>
           <a:xfrm>
-            <a:off x="932688" y="1719072"/>
-            <a:ext cx="4718303" cy="4517136"/>
+            <a:off x="932688" y="1609344"/>
+            <a:ext cx="4718303" cy="4645152"/>
           </a:xfrm>
           <a:prstGeom prst="rect">
             <a:avLst/>
@@ -5975,11 +6244,11 @@
           <a:p>
             <a:pPr>
               <a:spcAft>
-                <a:spcPts val="1000"/>
+                <a:spcPts val="800"/>
               </a:spcAft>
             </a:pPr>
             <a:r>
-              <a:rPr sz="1100" b="1">
+              <a:rPr sz="1050" b="1">
                 <a:solidFill>
                   <a:srgbClr val="38BDF8"/>
                 </a:solidFill>
@@ -5988,7 +6257,7 @@
               <a:t>[OPEN SOURCE TECH STACK] </a:t>
             </a:r>
             <a:r>
-              <a:rPr sz="1600" b="1">
+              <a:rPr sz="1550" b="1">
                 <a:solidFill>
                   <a:srgbClr val="F8FAFC"/>
                 </a:solidFill>
@@ -6000,11 +6269,11 @@
           <a:p>
             <a:pPr>
               <a:spcAft>
-                <a:spcPts val="600"/>
+                <a:spcPts val="500"/>
               </a:spcAft>
             </a:pPr>
             <a:r>
-              <a:rPr sz="1250" b="1">
+              <a:rPr sz="1200" b="1">
                 <a:solidFill>
                   <a:srgbClr val="38BDF8"/>
                 </a:solidFill>
@@ -6013,7 +6282,7 @@
               <a:t>Language &amp; Core: </a:t>
             </a:r>
             <a:r>
-              <a:rPr sz="1250">
+              <a:rPr sz="1200">
                 <a:solidFill>
                   <a:srgbClr val="F8FAFC"/>
                 </a:solidFill>
@@ -6025,11 +6294,11 @@
           <a:p>
             <a:pPr>
               <a:spcAft>
-                <a:spcPts val="600"/>
+                <a:spcPts val="500"/>
               </a:spcAft>
             </a:pPr>
             <a:r>
-              <a:rPr sz="1250" b="1">
+              <a:rPr sz="1200" b="1">
                 <a:solidFill>
                   <a:srgbClr val="34D399"/>
                 </a:solidFill>
@@ -6038,7 +6307,7 @@
               <a:t>Tiered Hashing: </a:t>
             </a:r>
             <a:r>
-              <a:rPr sz="1250">
+              <a:rPr sz="1200">
                 <a:solidFill>
                   <a:srgbClr val="F8FAFC"/>
                 </a:solidFill>
@@ -6050,11 +6319,11 @@
           <a:p>
             <a:pPr>
               <a:spcAft>
-                <a:spcPts val="600"/>
+                <a:spcPts val="500"/>
               </a:spcAft>
             </a:pPr>
             <a:r>
-              <a:rPr sz="1250" b="1">
+              <a:rPr sz="1200" b="1">
                 <a:solidFill>
                   <a:srgbClr val="F8FAFC"/>
                 </a:solidFill>
@@ -6063,7 +6332,7 @@
               <a:t>Operator Interface: </a:t>
             </a:r>
             <a:r>
-              <a:rPr sz="1250">
+              <a:rPr sz="1200">
                 <a:solidFill>
                   <a:srgbClr val="F8FAFC"/>
                 </a:solidFill>
@@ -6075,11 +6344,11 @@
           <a:p>
             <a:pPr>
               <a:spcAft>
-                <a:spcPts val="600"/>
+                <a:spcPts val="500"/>
               </a:spcAft>
             </a:pPr>
             <a:r>
-              <a:rPr sz="1250" b="1">
+              <a:rPr sz="1200" b="1">
                 <a:solidFill>
                   <a:srgbClr val="94A3B8"/>
                 </a:solidFill>
@@ -6088,7 +6357,7 @@
               <a:t>HTML Dashboard: </a:t>
             </a:r>
             <a:r>
-              <a:rPr sz="1250">
+              <a:rPr sz="1200">
                 <a:solidFill>
                   <a:srgbClr val="F8FAFC"/>
                 </a:solidFill>
@@ -6100,11 +6369,11 @@
           <a:p>
             <a:pPr>
               <a:spcAft>
-                <a:spcPts val="600"/>
+                <a:spcPts val="500"/>
               </a:spcAft>
             </a:pPr>
             <a:r>
-              <a:rPr sz="1250" b="1">
+              <a:rPr sz="1200" b="1">
                 <a:solidFill>
                   <a:srgbClr val="34D399"/>
                 </a:solidFill>
@@ -6113,7 +6382,7 @@
               <a:t>Automated Tests: </a:t>
             </a:r>
             <a:r>
-              <a:rPr sz="1250">
+              <a:rPr sz="1200">
                 <a:solidFill>
                   <a:srgbClr val="F8FAFC"/>
                 </a:solidFill>
@@ -6125,11 +6394,11 @@
           <a:p>
             <a:pPr>
               <a:spcAft>
-                <a:spcPts val="600"/>
+                <a:spcPts val="500"/>
               </a:spcAft>
             </a:pPr>
             <a:r>
-              <a:rPr sz="1250" b="1">
+              <a:rPr sz="1200" b="1">
                 <a:solidFill>
                   <a:srgbClr val="34D399"/>
                 </a:solidFill>
@@ -6138,7 +6407,7 @@
               <a:t>Licensing: </a:t>
             </a:r>
             <a:r>
-              <a:rPr sz="1250">
+              <a:rPr sz="1200">
                 <a:solidFill>
                   <a:srgbClr val="F8FAFC"/>
                 </a:solidFill>
@@ -6157,8 +6426,8 @@
         </p:nvSpPr>
         <p:spPr>
           <a:xfrm>
-            <a:off x="6217920" y="1554480"/>
-            <a:ext cx="5120640" cy="4846320"/>
+            <a:off x="6217920" y="1463040"/>
+            <a:ext cx="5120640" cy="4937760"/>
           </a:xfrm>
           <a:prstGeom prst="roundRect">
             <a:avLst/>
@@ -6202,8 +6471,8 @@
         </p:nvSpPr>
         <p:spPr>
           <a:xfrm>
-            <a:off x="6419088" y="1719072"/>
-            <a:ext cx="4718303" cy="4517136"/>
+            <a:off x="6419088" y="1609344"/>
+            <a:ext cx="4718303" cy="4645152"/>
           </a:xfrm>
           <a:prstGeom prst="rect">
             <a:avLst/>
@@ -6218,11 +6487,11 @@
           <a:p>
             <a:pPr>
               <a:spcAft>
-                <a:spcPts val="1000"/>
+                <a:spcPts val="800"/>
               </a:spcAft>
             </a:pPr>
             <a:r>
-              <a:rPr sz="1100" b="1">
+              <a:rPr sz="1050" b="1">
                 <a:solidFill>
                   <a:srgbClr val="34D399"/>
                 </a:solidFill>
@@ -6231,7 +6500,7 @@
               <a:t>[COMPLIANCE &amp; IMPACT] </a:t>
             </a:r>
             <a:r>
-              <a:rPr sz="1600" b="1">
+              <a:rPr sz="1550" b="1">
                 <a:solidFill>
                   <a:srgbClr val="F8FAFC"/>
                 </a:solidFill>
@@ -6243,11 +6512,11 @@
           <a:p>
             <a:pPr>
               <a:spcAft>
-                <a:spcPts val="600"/>
+                <a:spcPts val="500"/>
               </a:spcAft>
             </a:pPr>
             <a:r>
-              <a:rPr sz="1250" b="1">
+              <a:rPr sz="1200" b="1">
                 <a:solidFill>
                   <a:srgbClr val="34D399"/>
                 </a:solidFill>
@@ -6256,7 +6525,7 @@
               <a:t>DPDP Act 2023 Compliance: </a:t>
             </a:r>
             <a:r>
-              <a:rPr sz="1250">
+              <a:rPr sz="1200">
                 <a:solidFill>
                   <a:srgbClr val="F8FAFC"/>
                 </a:solidFill>
@@ -6268,11 +6537,11 @@
           <a:p>
             <a:pPr>
               <a:spcAft>
-                <a:spcPts val="600"/>
+                <a:spcPts val="500"/>
               </a:spcAft>
             </a:pPr>
             <a:r>
-              <a:rPr sz="1250" b="1">
+              <a:rPr sz="1200" b="1">
                 <a:solidFill>
                   <a:srgbClr val="38BDF8"/>
                 </a:solidFill>
@@ -6281,7 +6550,7 @@
               <a:t>Hardlink Awareness: </a:t>
             </a:r>
             <a:r>
-              <a:rPr sz="1250">
+              <a:rPr sz="1200">
                 <a:solidFill>
                   <a:srgbClr val="F8FAFC"/>
                 </a:solidFill>
@@ -6293,11 +6562,11 @@
           <a:p>
             <a:pPr>
               <a:spcAft>
-                <a:spcPts val="600"/>
+                <a:spcPts val="500"/>
               </a:spcAft>
             </a:pPr>
             <a:r>
-              <a:rPr sz="1250" b="1">
+              <a:rPr sz="1200" b="1">
                 <a:solidFill>
                   <a:srgbClr val="F8FAFC"/>
                 </a:solidFill>
@@ -6306,7 +6575,7 @@
               <a:t>Server &amp; Desktop Utility: </a:t>
             </a:r>
             <a:r>
-              <a:rPr sz="1250">
+              <a:rPr sz="1200">
                 <a:solidFill>
                   <a:srgbClr val="F8FAFC"/>
                 </a:solidFill>
@@ -6318,11 +6587,11 @@
           <a:p>
             <a:pPr>
               <a:spcAft>
-                <a:spcPts val="600"/>
+                <a:spcPts val="500"/>
               </a:spcAft>
             </a:pPr>
             <a:r>
-              <a:rPr sz="1250" b="1">
+              <a:rPr sz="1200" b="1">
                 <a:solidFill>
                   <a:srgbClr val="34D399"/>
                 </a:solidFill>
@@ -6331,7 +6600,7 @@
               <a:t>Indigenous Self-Reliance: </a:t>
             </a:r>
             <a:r>
-              <a:rPr sz="1250">
+              <a:rPr sz="1200">
                 <a:solidFill>
                   <a:srgbClr val="F8FAFC"/>
                 </a:solidFill>
